--- a/dist/초2/수학/자료와규칙/초2_수학_자료와규칙_03_무늬와수의규칙.pptx
+++ b/dist/초2/수학/자료와규칙/초2_수학_자료와규칙_03_무늬와수의규칙.pptx
@@ -122,13 +122,13 @@
   <p:extLst>
     <p:ext uri="{521415D9-36F7-43E2-AB2F-B90AF26B5E84}">
       <p14:sectionLst xmlns:p14="http://schemas.microsoft.com/office/powerpoint/2010/main">
-        <p14:section name="도입" id="{b8191546-dc4e-4f2f-d6f7-a36da2d511c0}">
+        <p14:section name="도입" id="{2959520e-2d78-55a6-a739-2cf1f8b72f9b}">
           <p14:sldIdLst>
             <p14:sldId id="256"/>
             <p14:sldId id="257"/>
           </p14:sldIdLst>
         </p14:section>
-        <p14:section name="개념" id="{1088b846-8735-de4f-ccbd-583be2ee6265}">
+        <p14:section name="개념" id="{111d2fdd-95fa-f7a5-5714-9fd12c1a3a53}">
           <p14:sldIdLst>
             <p14:sldId id="258"/>
             <p14:sldId id="259"/>
@@ -138,32 +138,32 @@
             <p14:sldId id="265"/>
           </p14:sldIdLst>
         </p14:section>
-        <p14:section name="연습" id="{05f2651f-9084-79e8-d4c0-dd497bf242a2}">
+        <p14:section name="연습" id="{9cde9124-dc20-f9ca-d33d-6f7ea1317081}">
           <p14:sldIdLst>
             <p14:sldId id="261"/>
             <p14:sldId id="262"/>
             <p14:sldId id="266"/>
           </p14:sldIdLst>
         </p14:section>
-        <p14:section name="개념" id="{e3a41fea-4682-16be-1a41-6706e5dea3af}">
+        <p14:section name="개념" id="{61d5971f-b770-56b2-49b4-2e0c133500f0}">
           <p14:sldIdLst/>
         </p14:section>
-        <p14:section name="연습" id="{86f5a541-b31b-7597-3649-38aa8205b52c}">
+        <p14:section name="연습" id="{a251df4b-d239-eb96-da6a-63a4c8b5f3d7}">
           <p14:sldIdLst/>
         </p14:section>
-        <p14:section name="확인" id="{580a13cc-63f8-a1e3-ba1d-5c5b52bae0ed}">
+        <p14:section name="확인" id="{b1402200-268b-efe7-6b04-1baa5d4f117e}">
           <p14:sldIdLst>
             <p14:sldId id="267"/>
             <p14:sldId id="268"/>
             <p14:sldId id="269"/>
           </p14:sldIdLst>
         </p14:section>
-        <p14:section name="정리" id="{22d13aca-98dc-ead3-a656-0cadc2d6bcf8}">
+        <p14:section name="정리" id="{ae1f5745-00bd-5a69-ced1-51fb7760fb55}">
           <p14:sldIdLst>
             <p14:sldId id="270"/>
           </p14:sldIdLst>
         </p14:section>
-        <p14:section name="보충" id="{e0476e7f-785d-3b19-1026-d6f33b295e68}">
+        <p14:section name="보충" id="{a65ebeba-f6fb-9a65-cfeb-b4b18ed1f265}">
           <p14:sldIdLst>
             <p14:sldId id="271"/>
           </p14:sldIdLst>
@@ -3633,7 +3633,7 @@
       </p:sp>
       <p:sp>
         <p:nvSpPr>
-          <p:cNvPr id="3" name="S10-card134"/>
+          <p:cNvPr id="3" name="S10-card109"/>
           <p:cNvSpPr/>
           <p:nvPr/>
         </p:nvSpPr>
@@ -3660,7 +3660,7 @@
       </p:sp>
       <p:sp>
         <p:nvSpPr>
-          <p:cNvPr id="4" name="S10-cardtext135"/>
+          <p:cNvPr id="4" name="S10-cardtext110"/>
           <p:cNvSpPr txBox="1"/>
           <p:nvPr/>
         </p:nvSpPr>
@@ -3702,7 +3702,7 @@
       </p:sp>
       <p:sp>
         <p:nvSpPr>
-          <p:cNvPr id="5" name="S10-card136"/>
+          <p:cNvPr id="5" name="S10-card111"/>
           <p:cNvSpPr/>
           <p:nvPr/>
         </p:nvSpPr>
@@ -3729,7 +3729,7 @@
       </p:sp>
       <p:sp>
         <p:nvSpPr>
-          <p:cNvPr id="6" name="S10-cardtext137"/>
+          <p:cNvPr id="6" name="S10-cardtext112"/>
           <p:cNvSpPr txBox="1"/>
           <p:nvPr/>
         </p:nvSpPr>
@@ -3771,7 +3771,7 @@
       </p:sp>
       <p:graphicFrame>
         <p:nvGraphicFramePr>
-          <p:cNvPr id="11" name="S10-table138"/>
+          <p:cNvPr id="11" name="S10-table113"/>
           <p:cNvGraphicFramePr>
             <a:graphicFrameLocks noGrp="1"/>
           </p:cNvGraphicFramePr>
@@ -6379,7 +6379,7 @@
       </p:sp>
       <p:sp>
         <p:nvSpPr>
-          <p:cNvPr id="3" name="S11-text139"/>
+          <p:cNvPr id="3" name="S11-text114"/>
           <p:cNvSpPr txBox="1"/>
           <p:nvPr/>
         </p:nvSpPr>
@@ -6418,7 +6418,7 @@
       </p:sp>
       <p:sp>
         <p:nvSpPr>
-          <p:cNvPr id="4" name="S11-card140"/>
+          <p:cNvPr id="4" name="S11-card115"/>
           <p:cNvSpPr/>
           <p:nvPr/>
         </p:nvSpPr>
@@ -6445,7 +6445,7 @@
       </p:sp>
       <p:sp>
         <p:nvSpPr>
-          <p:cNvPr id="5" name="S11-cardtext141"/>
+          <p:cNvPr id="5" name="S11-cardtext116"/>
           <p:cNvSpPr txBox="1"/>
           <p:nvPr/>
         </p:nvSpPr>
@@ -6487,7 +6487,7 @@
       </p:sp>
       <p:graphicFrame>
         <p:nvGraphicFramePr>
-          <p:cNvPr id="12" name="S11-table142"/>
+          <p:cNvPr id="12" name="S11-table117"/>
           <p:cNvGraphicFramePr>
             <a:graphicFrameLocks noGrp="1"/>
           </p:cNvGraphicFramePr>
@@ -7888,7 +7888,7 @@
       </p:graphicFrame>
       <p:graphicFrame>
         <p:nvGraphicFramePr>
-          <p:cNvPr id="23" name="S11-table143"/>
+          <p:cNvPr id="23" name="S11-table118"/>
           <p:cNvGraphicFramePr>
             <a:graphicFrameLocks noGrp="1"/>
           </p:cNvGraphicFramePr>
@@ -9403,7 +9403,7 @@
       </p:sp>
       <p:sp>
         <p:nvSpPr>
-          <p:cNvPr id="3" name="S12-text144"/>
+          <p:cNvPr id="3" name="S12-text119"/>
           <p:cNvSpPr txBox="1"/>
           <p:nvPr/>
         </p:nvSpPr>
@@ -9442,7 +9442,7 @@
       </p:sp>
       <p:sp>
         <p:nvSpPr>
-          <p:cNvPr id="4" name="S12-card145"/>
+          <p:cNvPr id="4" name="S12-card120"/>
           <p:cNvSpPr/>
           <p:nvPr/>
         </p:nvSpPr>
@@ -9469,7 +9469,7 @@
       </p:sp>
       <p:sp>
         <p:nvSpPr>
-          <p:cNvPr id="5" name="S12-cardtext146"/>
+          <p:cNvPr id="5" name="S12-cardtext121"/>
           <p:cNvSpPr txBox="1"/>
           <p:nvPr/>
         </p:nvSpPr>
@@ -9511,7 +9511,7 @@
       </p:sp>
       <p:sp>
         <p:nvSpPr>
-          <p:cNvPr id="6" name="S12-tile147"/>
+          <p:cNvPr id="6" name="S12-tile122"/>
           <p:cNvSpPr txBox="1"/>
           <p:nvPr/>
         </p:nvSpPr>
@@ -9558,7 +9558,7 @@
       </p:sp>
       <p:sp>
         <p:nvSpPr>
-          <p:cNvPr id="7" name="S12-tile148"/>
+          <p:cNvPr id="7" name="S12-tile123"/>
           <p:cNvSpPr txBox="1"/>
           <p:nvPr/>
         </p:nvSpPr>
@@ -9605,7 +9605,7 @@
       </p:sp>
       <p:sp>
         <p:nvSpPr>
-          <p:cNvPr id="8" name="S12-tile149"/>
+          <p:cNvPr id="8" name="S12-tile124"/>
           <p:cNvSpPr txBox="1"/>
           <p:nvPr/>
         </p:nvSpPr>
@@ -9652,7 +9652,7 @@
       </p:sp>
       <p:sp>
         <p:nvSpPr>
-          <p:cNvPr id="9" name="S12-tile150"/>
+          <p:cNvPr id="9" name="S12-tile125"/>
           <p:cNvSpPr txBox="1"/>
           <p:nvPr/>
         </p:nvSpPr>
@@ -9699,7 +9699,7 @@
       </p:sp>
       <p:sp>
         <p:nvSpPr>
-          <p:cNvPr id="10" name="S12-tile151"/>
+          <p:cNvPr id="10" name="S12-tile126"/>
           <p:cNvSpPr txBox="1"/>
           <p:nvPr/>
         </p:nvSpPr>
@@ -9746,7 +9746,7 @@
       </p:sp>
       <p:sp>
         <p:nvSpPr>
-          <p:cNvPr id="11" name="S12-tile152"/>
+          <p:cNvPr id="11" name="S12-tile127"/>
           <p:cNvSpPr txBox="1"/>
           <p:nvPr/>
         </p:nvSpPr>
@@ -9793,7 +9793,7 @@
       </p:sp>
       <p:sp>
         <p:nvSpPr>
-          <p:cNvPr id="12" name="S12-tile153"/>
+          <p:cNvPr id="12" name="S12-tile128"/>
           <p:cNvSpPr txBox="1"/>
           <p:nvPr/>
         </p:nvSpPr>
@@ -9840,7 +9840,7 @@
       </p:sp>
       <p:sp>
         <p:nvSpPr>
-          <p:cNvPr id="13" name="S12-label154"/>
+          <p:cNvPr id="13" name="S12-label129"/>
           <p:cNvSpPr txBox="1"/>
           <p:nvPr/>
         </p:nvSpPr>
@@ -9879,7 +9879,7 @@
       </p:sp>
       <p:graphicFrame>
         <p:nvGraphicFramePr>
-          <p:cNvPr id="13" name="S12-table155"/>
+          <p:cNvPr id="13" name="S12-table130"/>
           <p:cNvGraphicFramePr>
             <a:graphicFrameLocks noGrp="1"/>
           </p:cNvGraphicFramePr>
@@ -10870,7 +10870,7 @@
       </p:graphicFrame>
       <p:sp>
         <p:nvSpPr>
-          <p:cNvPr id="15" name="S12-label156"/>
+          <p:cNvPr id="15" name="S12-label131"/>
           <p:cNvSpPr txBox="1"/>
           <p:nvPr/>
         </p:nvSpPr>
@@ -11023,7 +11023,7 @@
       </p:sp>
       <p:sp>
         <p:nvSpPr>
-          <p:cNvPr id="3" name="S13-card157"/>
+          <p:cNvPr id="3" name="S13-card132"/>
           <p:cNvSpPr/>
           <p:nvPr/>
         </p:nvSpPr>
@@ -11050,7 +11050,7 @@
       </p:sp>
       <p:sp>
         <p:nvSpPr>
-          <p:cNvPr id="4" name="S13-cardtext158"/>
+          <p:cNvPr id="4" name="S13-cardtext133"/>
           <p:cNvSpPr txBox="1"/>
           <p:nvPr/>
         </p:nvSpPr>
@@ -11092,7 +11092,7 @@
       </p:sp>
       <p:sp>
         <p:nvSpPr>
-          <p:cNvPr id="5" name="S13-chip159"/>
+          <p:cNvPr id="5" name="S13-chip134"/>
           <p:cNvSpPr txBox="1"/>
           <p:nvPr/>
         </p:nvSpPr>
@@ -11139,7 +11139,7 @@
       </p:sp>
       <p:sp>
         <p:nvSpPr>
-          <p:cNvPr id="6" name="S13-text160"/>
+          <p:cNvPr id="6" name="S13-text135"/>
           <p:cNvSpPr txBox="1"/>
           <p:nvPr/>
         </p:nvSpPr>
@@ -11178,7 +11178,7 @@
       </p:sp>
       <p:sp>
         <p:nvSpPr>
-          <p:cNvPr id="7" name="S13-text161"/>
+          <p:cNvPr id="7" name="S13-text136"/>
           <p:cNvSpPr txBox="1"/>
           <p:nvPr/>
         </p:nvSpPr>
@@ -11217,7 +11217,7 @@
       </p:sp>
       <p:sp>
         <p:nvSpPr>
-          <p:cNvPr id="8" name="S13-text162"/>
+          <p:cNvPr id="8" name="S13-text137"/>
           <p:cNvSpPr txBox="1"/>
           <p:nvPr/>
         </p:nvSpPr>
@@ -11256,7 +11256,7 @@
       </p:sp>
       <p:sp>
         <p:nvSpPr>
-          <p:cNvPr id="9" name="S13-text163"/>
+          <p:cNvPr id="9" name="S13-text138"/>
           <p:cNvSpPr txBox="1"/>
           <p:nvPr/>
         </p:nvSpPr>
@@ -11295,7 +11295,7 @@
       </p:sp>
       <p:sp>
         <p:nvSpPr>
-          <p:cNvPr id="10" name="S13-text164"/>
+          <p:cNvPr id="10" name="S13-text139"/>
           <p:cNvSpPr txBox="1"/>
           <p:nvPr/>
         </p:nvSpPr>
@@ -11334,7 +11334,7 @@
       </p:sp>
       <p:sp>
         <p:nvSpPr>
-          <p:cNvPr id="11" name="S13-text165"/>
+          <p:cNvPr id="11" name="S13-text140"/>
           <p:cNvSpPr txBox="1"/>
           <p:nvPr/>
         </p:nvSpPr>
@@ -11373,7 +11373,7 @@
       </p:sp>
       <p:sp>
         <p:nvSpPr>
-          <p:cNvPr id="12" name="S13-chip166"/>
+          <p:cNvPr id="12" name="S13-chip141"/>
           <p:cNvSpPr txBox="1"/>
           <p:nvPr/>
         </p:nvSpPr>
@@ -11420,7 +11420,7 @@
       </p:sp>
       <p:sp>
         <p:nvSpPr>
-          <p:cNvPr id="13" name="S13-text167"/>
+          <p:cNvPr id="13" name="S13-text142"/>
           <p:cNvSpPr txBox="1"/>
           <p:nvPr/>
         </p:nvSpPr>
@@ -11459,7 +11459,7 @@
       </p:sp>
       <p:sp>
         <p:nvSpPr>
-          <p:cNvPr id="14" name="S13-text168"/>
+          <p:cNvPr id="14" name="S13-text143"/>
           <p:cNvSpPr txBox="1"/>
           <p:nvPr/>
         </p:nvSpPr>
@@ -11498,7 +11498,7 @@
       </p:sp>
       <p:sp>
         <p:nvSpPr>
-          <p:cNvPr id="15" name="S13-text169"/>
+          <p:cNvPr id="15" name="S13-text144"/>
           <p:cNvSpPr txBox="1"/>
           <p:nvPr/>
         </p:nvSpPr>
@@ -11537,7 +11537,7 @@
       </p:sp>
       <p:sp>
         <p:nvSpPr>
-          <p:cNvPr id="16" name="S13-text170"/>
+          <p:cNvPr id="16" name="S13-text145"/>
           <p:cNvSpPr txBox="1"/>
           <p:nvPr/>
         </p:nvSpPr>
@@ -11690,7 +11690,7 @@
       </p:sp>
       <p:sp>
         <p:nvSpPr>
-          <p:cNvPr id="3" name="S14-text171"/>
+          <p:cNvPr id="3" name="S14-text146"/>
           <p:cNvSpPr txBox="1"/>
           <p:nvPr/>
         </p:nvSpPr>
@@ -11729,7 +11729,7 @@
       </p:sp>
       <p:sp>
         <p:nvSpPr>
-          <p:cNvPr id="4" name="S14-card172"/>
+          <p:cNvPr id="4" name="S14-card147"/>
           <p:cNvSpPr/>
           <p:nvPr/>
         </p:nvSpPr>
@@ -11756,7 +11756,7 @@
       </p:sp>
       <p:sp>
         <p:nvSpPr>
-          <p:cNvPr id="5" name="S14-cardtext173"/>
+          <p:cNvPr id="5" name="S14-cardtext148"/>
           <p:cNvSpPr txBox="1"/>
           <p:nvPr/>
         </p:nvSpPr>
@@ -11798,7 +11798,7 @@
       </p:sp>
       <p:sp>
         <p:nvSpPr>
-          <p:cNvPr id="6" name="S14-chip174"/>
+          <p:cNvPr id="6" name="S14-chip149"/>
           <p:cNvSpPr txBox="1"/>
           <p:nvPr/>
         </p:nvSpPr>
@@ -11845,7 +11845,7 @@
       </p:sp>
       <p:sp>
         <p:nvSpPr>
-          <p:cNvPr id="7" name="S14-card175"/>
+          <p:cNvPr id="7" name="S14-card150"/>
           <p:cNvSpPr/>
           <p:nvPr/>
         </p:nvSpPr>
@@ -11872,7 +11872,7 @@
       </p:sp>
       <p:sp>
         <p:nvSpPr>
-          <p:cNvPr id="8" name="S14-cardtext176"/>
+          <p:cNvPr id="8" name="S14-cardtext151"/>
           <p:cNvSpPr txBox="1"/>
           <p:nvPr/>
         </p:nvSpPr>
@@ -11914,7 +11914,7 @@
       </p:sp>
       <p:sp>
         <p:nvSpPr>
-          <p:cNvPr id="9" name="S14-chip177"/>
+          <p:cNvPr id="9" name="S14-chip152"/>
           <p:cNvSpPr txBox="1"/>
           <p:nvPr/>
         </p:nvSpPr>
@@ -11961,7 +11961,7 @@
       </p:sp>
       <p:sp>
         <p:nvSpPr>
-          <p:cNvPr id="10" name="S14-card178"/>
+          <p:cNvPr id="10" name="S14-card153"/>
           <p:cNvSpPr/>
           <p:nvPr/>
         </p:nvSpPr>
@@ -11988,7 +11988,7 @@
       </p:sp>
       <p:sp>
         <p:nvSpPr>
-          <p:cNvPr id="11" name="S14-cardtext179"/>
+          <p:cNvPr id="11" name="S14-cardtext154"/>
           <p:cNvSpPr txBox="1"/>
           <p:nvPr/>
         </p:nvSpPr>
@@ -12030,7 +12030,7 @@
       </p:sp>
       <p:sp>
         <p:nvSpPr>
-          <p:cNvPr id="12" name="S14-chip180"/>
+          <p:cNvPr id="12" name="S14-chip155"/>
           <p:cNvSpPr txBox="1"/>
           <p:nvPr/>
         </p:nvSpPr>
@@ -12077,7 +12077,7 @@
       </p:sp>
       <p:sp>
         <p:nvSpPr>
-          <p:cNvPr id="13" name="S14-card181"/>
+          <p:cNvPr id="13" name="S14-card156"/>
           <p:cNvSpPr/>
           <p:nvPr/>
         </p:nvSpPr>
@@ -12104,7 +12104,7 @@
       </p:sp>
       <p:sp>
         <p:nvSpPr>
-          <p:cNvPr id="14" name="S14-cardtext182"/>
+          <p:cNvPr id="14" name="S14-cardtext157"/>
           <p:cNvSpPr txBox="1"/>
           <p:nvPr/>
         </p:nvSpPr>
@@ -12260,7 +12260,7 @@
       </p:sp>
       <p:sp>
         <p:nvSpPr>
-          <p:cNvPr id="3" name="S15-card183"/>
+          <p:cNvPr id="3" name="S15-card158"/>
           <p:cNvSpPr/>
           <p:nvPr/>
         </p:nvSpPr>
@@ -12287,7 +12287,7 @@
       </p:sp>
       <p:sp>
         <p:nvSpPr>
-          <p:cNvPr id="4" name="S15-cardtext184"/>
+          <p:cNvPr id="4" name="S15-cardtext159"/>
           <p:cNvSpPr txBox="1"/>
           <p:nvPr/>
         </p:nvSpPr>
@@ -12329,7 +12329,7 @@
       </p:sp>
       <p:sp>
         <p:nvSpPr>
-          <p:cNvPr id="5" name="S15-chip185"/>
+          <p:cNvPr id="5" name="S15-chip160"/>
           <p:cNvSpPr txBox="1"/>
           <p:nvPr/>
         </p:nvSpPr>
@@ -12376,7 +12376,7 @@
       </p:sp>
       <p:sp>
         <p:nvSpPr>
-          <p:cNvPr id="6" name="S15-chip186"/>
+          <p:cNvPr id="6" name="S15-chip161"/>
           <p:cNvSpPr txBox="1"/>
           <p:nvPr/>
         </p:nvSpPr>
@@ -12423,7 +12423,7 @@
       </p:sp>
       <p:sp>
         <p:nvSpPr>
-          <p:cNvPr id="7" name="S15-text187"/>
+          <p:cNvPr id="7" name="S15-text162"/>
           <p:cNvSpPr txBox="1"/>
           <p:nvPr/>
         </p:nvSpPr>
@@ -12462,7 +12462,7 @@
       </p:sp>
       <p:sp>
         <p:nvSpPr>
-          <p:cNvPr id="8" name="S15-text188"/>
+          <p:cNvPr id="8" name="S15-text163"/>
           <p:cNvSpPr txBox="1"/>
           <p:nvPr/>
         </p:nvSpPr>
@@ -12518,7 +12518,7 @@
       </p:sp>
       <p:sp>
         <p:nvSpPr>
-          <p:cNvPr id="9" name="S15-text189"/>
+          <p:cNvPr id="9" name="S15-text164"/>
           <p:cNvSpPr txBox="1"/>
           <p:nvPr/>
         </p:nvSpPr>
@@ -12557,7 +12557,7 @@
       </p:sp>
       <p:sp>
         <p:nvSpPr>
-          <p:cNvPr id="10" name="S15-text190"/>
+          <p:cNvPr id="10" name="S15-text165"/>
           <p:cNvSpPr txBox="1"/>
           <p:nvPr/>
         </p:nvSpPr>
@@ -12588,7 +12588,7 @@
                 <a:ea typeface="맑은 고딕" pitchFamily="34" charset="-122"/>
                 <a:cs typeface="맑은 고딕" pitchFamily="34" charset="-120"/>
               </a:rPr>
-              <a:t>③ 덧셈표에서 오른쪽</a:t>
+              <a:t>③ 덧셈표에서</a:t>
             </a:r>
             <a:endParaRPr lang="ko-KR" sz="2600" dirty="0"/>
           </a:p>
@@ -12605,7 +12605,7 @@
                 <a:ea typeface="맑은 고딕" pitchFamily="34" charset="-122"/>
                 <a:cs typeface="맑은 고딕" pitchFamily="34" charset="-120"/>
               </a:rPr>
-              <a:t>으로 가면?</a:t>
+              <a:t>오른쪽으로 가면?</a:t>
             </a:r>
             <a:endParaRPr lang="ko-KR" sz="2600" dirty="0"/>
           </a:p>
@@ -12613,7 +12613,7 @@
       </p:sp>
       <p:sp>
         <p:nvSpPr>
-          <p:cNvPr id="11" name="S15-text191"/>
+          <p:cNvPr id="11" name="S15-text166"/>
           <p:cNvSpPr txBox="1"/>
           <p:nvPr/>
         </p:nvSpPr>
@@ -12766,7 +12766,7 @@
       </p:sp>
       <p:sp>
         <p:nvSpPr>
-          <p:cNvPr id="3" name="S16-text192"/>
+          <p:cNvPr id="3" name="S16-text167"/>
           <p:cNvSpPr txBox="1"/>
           <p:nvPr/>
         </p:nvSpPr>
@@ -12805,7 +12805,7 @@
       </p:sp>
       <p:sp>
         <p:nvSpPr>
-          <p:cNvPr id="4" name="S16-card193"/>
+          <p:cNvPr id="4" name="S16-card168"/>
           <p:cNvSpPr/>
           <p:nvPr/>
         </p:nvSpPr>
@@ -12832,7 +12832,7 @@
       </p:sp>
       <p:sp>
         <p:nvSpPr>
-          <p:cNvPr id="5" name="S16-cardtext194"/>
+          <p:cNvPr id="5" name="S16-cardtext169"/>
           <p:cNvSpPr txBox="1"/>
           <p:nvPr/>
         </p:nvSpPr>
@@ -12874,7 +12874,7 @@
       </p:sp>
       <p:sp>
         <p:nvSpPr>
-          <p:cNvPr id="6" name="S16-card195"/>
+          <p:cNvPr id="6" name="S16-card170"/>
           <p:cNvSpPr/>
           <p:nvPr/>
         </p:nvSpPr>
@@ -12901,7 +12901,7 @@
       </p:sp>
       <p:sp>
         <p:nvSpPr>
-          <p:cNvPr id="7" name="S16-cardtext196"/>
+          <p:cNvPr id="7" name="S16-cardtext171"/>
           <p:cNvSpPr txBox="1"/>
           <p:nvPr/>
         </p:nvSpPr>
@@ -12943,7 +12943,7 @@
       </p:sp>
       <p:sp>
         <p:nvSpPr>
-          <p:cNvPr id="8" name="S16-line197"/>
+          <p:cNvPr id="8" name="S16-line172"/>
           <p:cNvSpPr/>
           <p:nvPr/>
         </p:nvSpPr>
@@ -12968,7 +12968,7 @@
       </p:sp>
       <p:sp>
         <p:nvSpPr>
-          <p:cNvPr id="9" name="S16-line198"/>
+          <p:cNvPr id="9" name="S16-line173"/>
           <p:cNvSpPr/>
           <p:nvPr/>
         </p:nvSpPr>
@@ -12991,7 +12991,7 @@
       </p:sp>
       <p:sp>
         <p:nvSpPr>
-          <p:cNvPr id="10" name="S16-label199"/>
+          <p:cNvPr id="10" name="S16-label174"/>
           <p:cNvSpPr txBox="1"/>
           <p:nvPr/>
         </p:nvSpPr>
@@ -13030,7 +13030,7 @@
       </p:sp>
       <p:sp>
         <p:nvSpPr>
-          <p:cNvPr id="11" name="S16-line200"/>
+          <p:cNvPr id="11" name="S16-line175"/>
           <p:cNvSpPr/>
           <p:nvPr/>
         </p:nvSpPr>
@@ -13053,7 +13053,7 @@
       </p:sp>
       <p:sp>
         <p:nvSpPr>
-          <p:cNvPr id="12" name="S16-label201"/>
+          <p:cNvPr id="12" name="S16-label176"/>
           <p:cNvSpPr txBox="1"/>
           <p:nvPr/>
         </p:nvSpPr>
@@ -13092,7 +13092,7 @@
       </p:sp>
       <p:sp>
         <p:nvSpPr>
-          <p:cNvPr id="13" name="S16-line202"/>
+          <p:cNvPr id="13" name="S16-line177"/>
           <p:cNvSpPr/>
           <p:nvPr/>
         </p:nvSpPr>
@@ -13115,7 +13115,7 @@
       </p:sp>
       <p:sp>
         <p:nvSpPr>
-          <p:cNvPr id="14" name="S16-label203"/>
+          <p:cNvPr id="14" name="S16-label178"/>
           <p:cNvSpPr txBox="1"/>
           <p:nvPr/>
         </p:nvSpPr>
@@ -13154,7 +13154,7 @@
       </p:sp>
       <p:sp>
         <p:nvSpPr>
-          <p:cNvPr id="15" name="S16-line204"/>
+          <p:cNvPr id="15" name="S16-line179"/>
           <p:cNvSpPr/>
           <p:nvPr/>
         </p:nvSpPr>
@@ -13177,7 +13177,7 @@
       </p:sp>
       <p:sp>
         <p:nvSpPr>
-          <p:cNvPr id="16" name="S16-label205"/>
+          <p:cNvPr id="16" name="S16-label180"/>
           <p:cNvSpPr txBox="1"/>
           <p:nvPr/>
         </p:nvSpPr>
@@ -13216,7 +13216,7 @@
       </p:sp>
       <p:sp>
         <p:nvSpPr>
-          <p:cNvPr id="17" name="S16-line206"/>
+          <p:cNvPr id="17" name="S16-line181"/>
           <p:cNvSpPr/>
           <p:nvPr/>
         </p:nvSpPr>
@@ -13239,7 +13239,7 @@
       </p:sp>
       <p:sp>
         <p:nvSpPr>
-          <p:cNvPr id="18" name="S16-label207"/>
+          <p:cNvPr id="18" name="S16-label182"/>
           <p:cNvSpPr txBox="1"/>
           <p:nvPr/>
         </p:nvSpPr>
@@ -13278,7 +13278,7 @@
       </p:sp>
       <p:sp>
         <p:nvSpPr>
-          <p:cNvPr id="19" name="S16-line208"/>
+          <p:cNvPr id="19" name="S16-line183"/>
           <p:cNvSpPr/>
           <p:nvPr/>
         </p:nvSpPr>
@@ -13301,7 +13301,7 @@
       </p:sp>
       <p:sp>
         <p:nvSpPr>
-          <p:cNvPr id="20" name="S16-label209"/>
+          <p:cNvPr id="20" name="S16-label184"/>
           <p:cNvSpPr txBox="1"/>
           <p:nvPr/>
         </p:nvSpPr>
@@ -13340,7 +13340,7 @@
       </p:sp>
       <p:sp>
         <p:nvSpPr>
-          <p:cNvPr id="21" name="S16-line210"/>
+          <p:cNvPr id="21" name="S16-line185"/>
           <p:cNvSpPr/>
           <p:nvPr/>
         </p:nvSpPr>
@@ -13363,7 +13363,7 @@
       </p:sp>
       <p:sp>
         <p:nvSpPr>
-          <p:cNvPr id="22" name="S16-label211"/>
+          <p:cNvPr id="22" name="S16-label186"/>
           <p:cNvSpPr txBox="1"/>
           <p:nvPr/>
         </p:nvSpPr>
@@ -13402,7 +13402,7 @@
       </p:sp>
       <p:sp>
         <p:nvSpPr>
-          <p:cNvPr id="23" name="S16-line212"/>
+          <p:cNvPr id="23" name="S16-line187"/>
           <p:cNvSpPr/>
           <p:nvPr/>
         </p:nvSpPr>
@@ -13425,7 +13425,7 @@
       </p:sp>
       <p:sp>
         <p:nvSpPr>
-          <p:cNvPr id="24" name="S16-label213"/>
+          <p:cNvPr id="24" name="S16-label188"/>
           <p:cNvSpPr txBox="1"/>
           <p:nvPr/>
         </p:nvSpPr>
@@ -13464,7 +13464,7 @@
       </p:sp>
       <p:sp>
         <p:nvSpPr>
-          <p:cNvPr id="25" name="S16-line214"/>
+          <p:cNvPr id="25" name="S16-line189"/>
           <p:cNvSpPr/>
           <p:nvPr/>
         </p:nvSpPr>
@@ -13487,7 +13487,7 @@
       </p:sp>
       <p:sp>
         <p:nvSpPr>
-          <p:cNvPr id="26" name="S16-label215"/>
+          <p:cNvPr id="26" name="S16-label190"/>
           <p:cNvSpPr txBox="1"/>
           <p:nvPr/>
         </p:nvSpPr>
@@ -13526,7 +13526,7 @@
       </p:sp>
       <p:sp>
         <p:nvSpPr>
-          <p:cNvPr id="27" name="S16-line216"/>
+          <p:cNvPr id="27" name="S16-line191"/>
           <p:cNvSpPr/>
           <p:nvPr/>
         </p:nvSpPr>
@@ -13549,7 +13549,7 @@
       </p:sp>
       <p:sp>
         <p:nvSpPr>
-          <p:cNvPr id="28" name="S16-label217"/>
+          <p:cNvPr id="28" name="S16-label192"/>
           <p:cNvSpPr txBox="1"/>
           <p:nvPr/>
         </p:nvSpPr>
@@ -13588,7 +13588,7 @@
       </p:sp>
       <p:sp>
         <p:nvSpPr>
-          <p:cNvPr id="29" name="S16-line218"/>
+          <p:cNvPr id="29" name="S16-line193"/>
           <p:cNvSpPr/>
           <p:nvPr/>
         </p:nvSpPr>
@@ -13611,7 +13611,7 @@
       </p:sp>
       <p:sp>
         <p:nvSpPr>
-          <p:cNvPr id="30" name="S16-label219"/>
+          <p:cNvPr id="30" name="S16-label194"/>
           <p:cNvSpPr txBox="1"/>
           <p:nvPr/>
         </p:nvSpPr>
@@ -13650,7 +13650,7 @@
       </p:sp>
       <p:sp>
         <p:nvSpPr>
-          <p:cNvPr id="31" name="S16-mark220"/>
+          <p:cNvPr id="31" name="S16-mark195"/>
           <p:cNvSpPr/>
           <p:nvPr/>
         </p:nvSpPr>
@@ -13675,7 +13675,7 @@
       </p:sp>
       <p:sp>
         <p:nvSpPr>
-          <p:cNvPr id="32" name="S16-mark221"/>
+          <p:cNvPr id="32" name="S16-mark196"/>
           <p:cNvSpPr/>
           <p:nvPr/>
         </p:nvSpPr>
@@ -13700,7 +13700,7 @@
       </p:sp>
       <p:sp>
         <p:nvSpPr>
-          <p:cNvPr id="33" name="S16-mark222"/>
+          <p:cNvPr id="33" name="S16-mark197"/>
           <p:cNvSpPr/>
           <p:nvPr/>
         </p:nvSpPr>
@@ -13725,7 +13725,7 @@
       </p:sp>
       <p:sp>
         <p:nvSpPr>
-          <p:cNvPr id="34" name="S16-mark223"/>
+          <p:cNvPr id="34" name="S16-mark198"/>
           <p:cNvSpPr/>
           <p:nvPr/>
         </p:nvSpPr>
@@ -13750,7 +13750,7 @@
       </p:sp>
       <p:sp>
         <p:nvSpPr>
-          <p:cNvPr id="35" name="S16-mark224"/>
+          <p:cNvPr id="35" name="S16-mark199"/>
           <p:cNvSpPr/>
           <p:nvPr/>
         </p:nvSpPr>
@@ -13775,7 +13775,7 @@
       </p:sp>
       <p:sp>
         <p:nvSpPr>
-          <p:cNvPr id="36" name="S16-mark225"/>
+          <p:cNvPr id="36" name="S16-mark200"/>
           <p:cNvSpPr/>
           <p:nvPr/>
         </p:nvSpPr>
@@ -13800,7 +13800,7 @@
       </p:sp>
       <p:sp>
         <p:nvSpPr>
-          <p:cNvPr id="37" name="S16-line226"/>
+          <p:cNvPr id="37" name="S16-line201"/>
           <p:cNvSpPr/>
           <p:nvPr/>
         </p:nvSpPr>
@@ -13823,7 +13823,7 @@
       </p:sp>
       <p:sp>
         <p:nvSpPr>
-          <p:cNvPr id="38" name="S16-line227"/>
+          <p:cNvPr id="38" name="S16-line202"/>
           <p:cNvSpPr/>
           <p:nvPr/>
         </p:nvSpPr>
@@ -13847,7 +13847,7 @@
       </p:sp>
       <p:sp>
         <p:nvSpPr>
-          <p:cNvPr id="39" name="S16-label228"/>
+          <p:cNvPr id="39" name="S16-label203"/>
           <p:cNvSpPr txBox="1"/>
           <p:nvPr/>
         </p:nvSpPr>
@@ -13886,7 +13886,7 @@
       </p:sp>
       <p:sp>
         <p:nvSpPr>
-          <p:cNvPr id="40" name="S16-line229"/>
+          <p:cNvPr id="40" name="S16-line204"/>
           <p:cNvSpPr/>
           <p:nvPr/>
         </p:nvSpPr>
@@ -13909,7 +13909,7 @@
       </p:sp>
       <p:sp>
         <p:nvSpPr>
-          <p:cNvPr id="41" name="S16-line230"/>
+          <p:cNvPr id="41" name="S16-line205"/>
           <p:cNvSpPr/>
           <p:nvPr/>
         </p:nvSpPr>
@@ -13933,7 +13933,7 @@
       </p:sp>
       <p:sp>
         <p:nvSpPr>
-          <p:cNvPr id="42" name="S16-label231"/>
+          <p:cNvPr id="42" name="S16-label206"/>
           <p:cNvSpPr txBox="1"/>
           <p:nvPr/>
         </p:nvSpPr>
@@ -13972,7 +13972,7 @@
       </p:sp>
       <p:sp>
         <p:nvSpPr>
-          <p:cNvPr id="43" name="S16-line232"/>
+          <p:cNvPr id="43" name="S16-line207"/>
           <p:cNvSpPr/>
           <p:nvPr/>
         </p:nvSpPr>
@@ -13995,7 +13995,7 @@
       </p:sp>
       <p:sp>
         <p:nvSpPr>
-          <p:cNvPr id="44" name="S16-line233"/>
+          <p:cNvPr id="44" name="S16-line208"/>
           <p:cNvSpPr/>
           <p:nvPr/>
         </p:nvSpPr>
@@ -14019,7 +14019,7 @@
       </p:sp>
       <p:sp>
         <p:nvSpPr>
-          <p:cNvPr id="45" name="S16-label234"/>
+          <p:cNvPr id="45" name="S16-label209"/>
           <p:cNvSpPr txBox="1"/>
           <p:nvPr/>
         </p:nvSpPr>
@@ -14058,7 +14058,7 @@
       </p:sp>
       <p:sp>
         <p:nvSpPr>
-          <p:cNvPr id="46" name="S16-line235"/>
+          <p:cNvPr id="46" name="S16-line210"/>
           <p:cNvSpPr/>
           <p:nvPr/>
         </p:nvSpPr>
@@ -14081,7 +14081,7 @@
       </p:sp>
       <p:sp>
         <p:nvSpPr>
-          <p:cNvPr id="47" name="S16-line236"/>
+          <p:cNvPr id="47" name="S16-line211"/>
           <p:cNvSpPr/>
           <p:nvPr/>
         </p:nvSpPr>
@@ -14105,7 +14105,7 @@
       </p:sp>
       <p:sp>
         <p:nvSpPr>
-          <p:cNvPr id="48" name="S16-label237"/>
+          <p:cNvPr id="48" name="S16-label212"/>
           <p:cNvSpPr txBox="1"/>
           <p:nvPr/>
         </p:nvSpPr>
@@ -14144,7 +14144,7 @@
       </p:sp>
       <p:sp>
         <p:nvSpPr>
-          <p:cNvPr id="49" name="S16-line238"/>
+          <p:cNvPr id="49" name="S16-line213"/>
           <p:cNvSpPr/>
           <p:nvPr/>
         </p:nvSpPr>
@@ -14167,7 +14167,7 @@
       </p:sp>
       <p:sp>
         <p:nvSpPr>
-          <p:cNvPr id="50" name="S16-line239"/>
+          <p:cNvPr id="50" name="S16-line214"/>
           <p:cNvSpPr/>
           <p:nvPr/>
         </p:nvSpPr>
@@ -14191,7 +14191,7 @@
       </p:sp>
       <p:sp>
         <p:nvSpPr>
-          <p:cNvPr id="51" name="S16-label240"/>
+          <p:cNvPr id="51" name="S16-label215"/>
           <p:cNvSpPr txBox="1"/>
           <p:nvPr/>
         </p:nvSpPr>
@@ -14230,7 +14230,7 @@
       </p:sp>
       <p:sp>
         <p:nvSpPr>
-          <p:cNvPr id="52" name="S16-figure241" descr="0부터 10까지 2씩 뛰어 세는 수직선"/>
+          <p:cNvPr id="52" name="S16-figure216" descr="0부터 10까지 2씩 뛰어 세는 수직선"/>
           <p:cNvSpPr/>
           <p:nvPr/>
         </p:nvSpPr>
@@ -17361,7 +17361,46 @@
       </p:sp>
       <p:sp>
         <p:nvSpPr>
-          <p:cNvPr id="3" name="S06-card88"/>
+          <p:cNvPr id="3" name="S06-text88"/>
+          <p:cNvSpPr txBox="1"/>
+          <p:nvPr/>
+        </p:nvSpPr>
+        <p:spPr>
+          <a:xfrm>
+            <a:off x="548640" y="1325880"/>
+            <a:ext cx="11091672" cy="502920"/>
+          </a:xfrm>
+          <a:prstGeom prst="rect">
+            <a:avLst/>
+          </a:prstGeom>
+          <a:noFill/>
+          <a:ln/>
+        </p:spPr>
+        <p:txBody>
+          <a:bodyPr wrap="square" lIns="0" tIns="0" rIns="0" bIns="0" rtlCol="0" anchor="ctr"/>
+          <a:lstStyle/>
+          <a:p>
+            <a:pPr eaLnBrk="0" algn="l" indent="0" marL="0">
+              <a:buNone/>
+            </a:pPr>
+            <a:r>
+              <a:rPr lang="ko-KR" altLang="en-US" sz="3200" dirty="0">
+                <a:solidFill>
+                  <a:srgbClr val="1F2937"/>
+                </a:solidFill>
+                <a:latin typeface="맑은 고딕" pitchFamily="34" charset="0"/>
+                <a:ea typeface="맑은 고딕" pitchFamily="34" charset="-122"/>
+                <a:cs typeface="맑은 고딕" pitchFamily="34" charset="-120"/>
+              </a:rPr>
+              <a:t>되풀이되는 묶음을 찾아 ?를 알아내요.</a:t>
+            </a:r>
+            <a:endParaRPr lang="ko-KR" sz="3200" dirty="0"/>
+          </a:p>
+        </p:txBody>
+      </p:sp>
+      <p:sp>
+        <p:nvSpPr>
+          <p:cNvPr id="4" name="S06-card89"/>
           <p:cNvSpPr/>
           <p:nvPr/>
         </p:nvSpPr>
@@ -17376,11 +17415,11 @@
             </a:avLst>
           </a:prstGeom>
           <a:solidFill>
-            <a:srgbClr val="E6ECF4"/>
+            <a:srgbClr val="FDEBDD"/>
           </a:solidFill>
           <a:ln w="12700">
             <a:solidFill>
-              <a:srgbClr val="E6ECF4"/>
+              <a:srgbClr val="FDEBDD"/>
             </a:solidFill>
             <a:prstDash val="solid"/>
           </a:ln>
@@ -17388,7 +17427,7 @@
       </p:sp>
       <p:sp>
         <p:nvSpPr>
-          <p:cNvPr id="4" name="S06-cardtext89"/>
+          <p:cNvPr id="5" name="S06-cardtext90"/>
           <p:cNvSpPr txBox="1"/>
           <p:nvPr/>
         </p:nvSpPr>
@@ -17422,7 +17461,7 @@
                 <a:ea typeface="맑은 고딕" pitchFamily="34" charset="-122"/>
                 <a:cs typeface="맑은 고딕" pitchFamily="34" charset="-120"/>
               </a:rPr>
-              <a:t>되풀이되는 묶음을 먼저 찾아요.</a:t>
+              <a:t>④ S05의 넷째 모양은 쌓기나무 몇 개일까요?</a:t>
             </a:r>
             <a:endParaRPr lang="ko-KR" sz="3200" dirty="0"/>
           </a:p>
@@ -17430,1236 +17469,14 @@
       </p:sp>
       <p:sp>
         <p:nvSpPr>
-          <p:cNvPr id="5" name="S06-chip90"/>
+          <p:cNvPr id="6" name="S06-eqtext91"/>
           <p:cNvSpPr txBox="1"/>
           <p:nvPr/>
         </p:nvSpPr>
         <p:spPr>
           <a:xfrm>
-            <a:off x="548640" y="1773936"/>
-            <a:ext cx="566928" cy="566928"/>
-          </a:xfrm>
-          <a:prstGeom prst="roundRect">
-            <a:avLst>
-              <a:gd name="adj" fmla="val 25806"/>
-            </a:avLst>
-          </a:prstGeom>
-          <a:solidFill>
-            <a:srgbClr val="264653"/>
-          </a:solidFill>
-          <a:ln>
-            <a:solidFill>
-              <a:srgbClr val="264653"/>
-            </a:solidFill>
-          </a:ln>
-        </p:spPr>
-        <p:txBody>
-          <a:bodyPr wrap="square" lIns="0" tIns="0" rIns="0" bIns="0" rtlCol="0" anchor="ctr"/>
-          <a:lstStyle/>
-          <a:p>
-            <a:pPr eaLnBrk="0" algn="ctr" indent="0" marL="0">
-              <a:buNone/>
-            </a:pPr>
-            <a:r>
-              <a:rPr lang="ko-KR" altLang="en-US" sz="2600" b="1" dirty="0">
-                <a:solidFill>
-                  <a:srgbClr val="FFFFFF"/>
-                </a:solidFill>
-                <a:latin typeface="맑은 고딕" pitchFamily="34" charset="0"/>
-                <a:ea typeface="맑은 고딕" pitchFamily="34" charset="-122"/>
-                <a:cs typeface="맑은 고딕" pitchFamily="34" charset="-120"/>
-              </a:rPr>
-              <a:t>①</a:t>
-            </a:r>
-            <a:endParaRPr lang="ko-KR" sz="2600" dirty="0"/>
-          </a:p>
-        </p:txBody>
-      </p:sp>
-      <p:sp>
-        <p:nvSpPr>
-          <p:cNvPr id="6" name="S06-tile91"/>
-          <p:cNvSpPr txBox="1"/>
-          <p:nvPr/>
-        </p:nvSpPr>
-        <p:spPr>
-          <a:xfrm>
-            <a:off x="1344168" y="1882521"/>
-            <a:ext cx="349758" cy="349758"/>
-          </a:xfrm>
-          <a:prstGeom prst="roundRect">
-            <a:avLst>
-              <a:gd name="adj" fmla="val 36601"/>
-            </a:avLst>
-          </a:prstGeom>
-          <a:solidFill>
-            <a:srgbClr val="FFFFFF"/>
-          </a:solidFill>
-          <a:ln w="19050">
-            <a:solidFill>
-              <a:srgbClr val="264653"/>
-            </a:solidFill>
-          </a:ln>
-        </p:spPr>
-        <p:txBody>
-          <a:bodyPr wrap="square" lIns="0" tIns="0" rIns="0" bIns="0" rtlCol="0" anchor="ctr"/>
-          <a:lstStyle/>
-          <a:p>
-            <a:pPr eaLnBrk="0" algn="ctr" indent="0" marL="0">
-              <a:buNone/>
-            </a:pPr>
-            <a:r>
-              <a:rPr lang="ko-KR" altLang="en-US" sz="1500" b="1" dirty="0">
-                <a:solidFill>
-                  <a:srgbClr val="1F2937"/>
-                </a:solidFill>
-                <a:latin typeface="맑은 고딕" pitchFamily="34" charset="0"/>
-                <a:ea typeface="맑은 고딕" pitchFamily="34" charset="-122"/>
-                <a:cs typeface="맑은 고딕" pitchFamily="34" charset="-120"/>
-              </a:rPr>
-              <a:t>■</a:t>
-            </a:r>
-            <a:endParaRPr lang="ko-KR" sz="1500" dirty="0"/>
-          </a:p>
-        </p:txBody>
-      </p:sp>
-      <p:sp>
-        <p:nvSpPr>
-          <p:cNvPr id="7" name="S06-tile92"/>
-          <p:cNvSpPr txBox="1"/>
-          <p:nvPr/>
-        </p:nvSpPr>
-        <p:spPr>
-          <a:xfrm>
-            <a:off x="1895094" y="1882521"/>
-            <a:ext cx="349758" cy="349758"/>
-          </a:xfrm>
-          <a:prstGeom prst="roundRect">
-            <a:avLst>
-              <a:gd name="adj" fmla="val 36601"/>
-            </a:avLst>
-          </a:prstGeom>
-          <a:solidFill>
-            <a:srgbClr val="FFFFFF"/>
-          </a:solidFill>
-          <a:ln w="19050">
-            <a:solidFill>
-              <a:srgbClr val="264653"/>
-            </a:solidFill>
-          </a:ln>
-        </p:spPr>
-        <p:txBody>
-          <a:bodyPr wrap="square" lIns="0" tIns="0" rIns="0" bIns="0" rtlCol="0" anchor="ctr"/>
-          <a:lstStyle/>
-          <a:p>
-            <a:pPr eaLnBrk="0" algn="ctr" indent="0" marL="0">
-              <a:buNone/>
-            </a:pPr>
-            <a:r>
-              <a:rPr lang="ko-KR" altLang="en-US" sz="1500" b="1" dirty="0">
-                <a:solidFill>
-                  <a:srgbClr val="1F2937"/>
-                </a:solidFill>
-                <a:latin typeface="맑은 고딕" pitchFamily="34" charset="0"/>
-                <a:ea typeface="맑은 고딕" pitchFamily="34" charset="-122"/>
-                <a:cs typeface="맑은 고딕" pitchFamily="34" charset="-120"/>
-              </a:rPr>
-              <a:t>●</a:t>
-            </a:r>
-            <a:endParaRPr lang="ko-KR" sz="1500" dirty="0"/>
-          </a:p>
-        </p:txBody>
-      </p:sp>
-      <p:sp>
-        <p:nvSpPr>
-          <p:cNvPr id="8" name="S06-tile93"/>
-          <p:cNvSpPr txBox="1"/>
-          <p:nvPr/>
-        </p:nvSpPr>
-        <p:spPr>
-          <a:xfrm>
-            <a:off x="2446020" y="1882521"/>
-            <a:ext cx="349758" cy="349758"/>
-          </a:xfrm>
-          <a:prstGeom prst="roundRect">
-            <a:avLst>
-              <a:gd name="adj" fmla="val 36601"/>
-            </a:avLst>
-          </a:prstGeom>
-          <a:solidFill>
-            <a:srgbClr val="FFFFFF"/>
-          </a:solidFill>
-          <a:ln w="19050">
-            <a:solidFill>
-              <a:srgbClr val="264653"/>
-            </a:solidFill>
-          </a:ln>
-        </p:spPr>
-        <p:txBody>
-          <a:bodyPr wrap="square" lIns="0" tIns="0" rIns="0" bIns="0" rtlCol="0" anchor="ctr"/>
-          <a:lstStyle/>
-          <a:p>
-            <a:pPr eaLnBrk="0" algn="ctr" indent="0" marL="0">
-              <a:buNone/>
-            </a:pPr>
-            <a:r>
-              <a:rPr lang="ko-KR" altLang="en-US" sz="1500" b="1" dirty="0">
-                <a:solidFill>
-                  <a:srgbClr val="1F2937"/>
-                </a:solidFill>
-                <a:latin typeface="맑은 고딕" pitchFamily="34" charset="0"/>
-                <a:ea typeface="맑은 고딕" pitchFamily="34" charset="-122"/>
-                <a:cs typeface="맑은 고딕" pitchFamily="34" charset="-120"/>
-              </a:rPr>
-              <a:t>●</a:t>
-            </a:r>
-            <a:endParaRPr lang="ko-KR" sz="1500" dirty="0"/>
-          </a:p>
-        </p:txBody>
-      </p:sp>
-      <p:sp>
-        <p:nvSpPr>
-          <p:cNvPr id="9" name="S06-tile94"/>
-          <p:cNvSpPr txBox="1"/>
-          <p:nvPr/>
-        </p:nvSpPr>
-        <p:spPr>
-          <a:xfrm>
-            <a:off x="2996946" y="1882521"/>
-            <a:ext cx="349758" cy="349758"/>
-          </a:xfrm>
-          <a:prstGeom prst="roundRect">
-            <a:avLst>
-              <a:gd name="adj" fmla="val 36601"/>
-            </a:avLst>
-          </a:prstGeom>
-          <a:solidFill>
-            <a:srgbClr val="FFFFFF"/>
-          </a:solidFill>
-          <a:ln w="19050">
-            <a:solidFill>
-              <a:srgbClr val="264653"/>
-            </a:solidFill>
-          </a:ln>
-        </p:spPr>
-        <p:txBody>
-          <a:bodyPr wrap="square" lIns="0" tIns="0" rIns="0" bIns="0" rtlCol="0" anchor="ctr"/>
-          <a:lstStyle/>
-          <a:p>
-            <a:pPr eaLnBrk="0" algn="ctr" indent="0" marL="0">
-              <a:buNone/>
-            </a:pPr>
-            <a:r>
-              <a:rPr lang="ko-KR" altLang="en-US" sz="1500" b="1" dirty="0">
-                <a:solidFill>
-                  <a:srgbClr val="1F2937"/>
-                </a:solidFill>
-                <a:latin typeface="맑은 고딕" pitchFamily="34" charset="0"/>
-                <a:ea typeface="맑은 고딕" pitchFamily="34" charset="-122"/>
-                <a:cs typeface="맑은 고딕" pitchFamily="34" charset="-120"/>
-              </a:rPr>
-              <a:t>■</a:t>
-            </a:r>
-            <a:endParaRPr lang="ko-KR" sz="1500" dirty="0"/>
-          </a:p>
-        </p:txBody>
-      </p:sp>
-      <p:sp>
-        <p:nvSpPr>
-          <p:cNvPr id="10" name="S06-tile95"/>
-          <p:cNvSpPr txBox="1"/>
-          <p:nvPr/>
-        </p:nvSpPr>
-        <p:spPr>
-          <a:xfrm>
-            <a:off x="3547872" y="1882521"/>
-            <a:ext cx="349758" cy="349758"/>
-          </a:xfrm>
-          <a:prstGeom prst="roundRect">
-            <a:avLst>
-              <a:gd name="adj" fmla="val 36601"/>
-            </a:avLst>
-          </a:prstGeom>
-          <a:solidFill>
-            <a:srgbClr val="FFFFFF"/>
-          </a:solidFill>
-          <a:ln w="19050">
-            <a:solidFill>
-              <a:srgbClr val="264653"/>
-            </a:solidFill>
-          </a:ln>
-        </p:spPr>
-        <p:txBody>
-          <a:bodyPr wrap="square" lIns="0" tIns="0" rIns="0" bIns="0" rtlCol="0" anchor="ctr"/>
-          <a:lstStyle/>
-          <a:p>
-            <a:pPr eaLnBrk="0" algn="ctr" indent="0" marL="0">
-              <a:buNone/>
-            </a:pPr>
-            <a:r>
-              <a:rPr lang="ko-KR" altLang="en-US" sz="1500" b="1" dirty="0">
-                <a:solidFill>
-                  <a:srgbClr val="1F2937"/>
-                </a:solidFill>
-                <a:latin typeface="맑은 고딕" pitchFamily="34" charset="0"/>
-                <a:ea typeface="맑은 고딕" pitchFamily="34" charset="-122"/>
-                <a:cs typeface="맑은 고딕" pitchFamily="34" charset="-120"/>
-              </a:rPr>
-              <a:t>●</a:t>
-            </a:r>
-            <a:endParaRPr lang="ko-KR" sz="1500" dirty="0"/>
-          </a:p>
-        </p:txBody>
-      </p:sp>
-      <p:sp>
-        <p:nvSpPr>
-          <p:cNvPr id="11" name="S06-tile96"/>
-          <p:cNvSpPr txBox="1"/>
-          <p:nvPr/>
-        </p:nvSpPr>
-        <p:spPr>
-          <a:xfrm>
-            <a:off x="4098798" y="1882521"/>
-            <a:ext cx="349758" cy="349758"/>
-          </a:xfrm>
-          <a:prstGeom prst="roundRect">
-            <a:avLst>
-              <a:gd name="adj" fmla="val 36601"/>
-            </a:avLst>
-          </a:prstGeom>
-          <a:solidFill>
-            <a:srgbClr val="FFFFFF"/>
-          </a:solidFill>
-          <a:ln w="19050">
-            <a:solidFill>
-              <a:srgbClr val="264653"/>
-            </a:solidFill>
-          </a:ln>
-        </p:spPr>
-        <p:txBody>
-          <a:bodyPr wrap="square" lIns="0" tIns="0" rIns="0" bIns="0" rtlCol="0" anchor="ctr"/>
-          <a:lstStyle/>
-          <a:p>
-            <a:pPr eaLnBrk="0" algn="ctr" indent="0" marL="0">
-              <a:buNone/>
-            </a:pPr>
-            <a:r>
-              <a:rPr lang="ko-KR" altLang="en-US" sz="1500" b="1" dirty="0">
-                <a:solidFill>
-                  <a:srgbClr val="1F2937"/>
-                </a:solidFill>
-                <a:latin typeface="맑은 고딕" pitchFamily="34" charset="0"/>
-                <a:ea typeface="맑은 고딕" pitchFamily="34" charset="-122"/>
-                <a:cs typeface="맑은 고딕" pitchFamily="34" charset="-120"/>
-              </a:rPr>
-              <a:t>●</a:t>
-            </a:r>
-            <a:endParaRPr lang="ko-KR" sz="1500" dirty="0"/>
-          </a:p>
-        </p:txBody>
-      </p:sp>
-      <p:sp>
-        <p:nvSpPr>
-          <p:cNvPr id="12" name="S06-tile97"/>
-          <p:cNvSpPr txBox="1"/>
-          <p:nvPr/>
-        </p:nvSpPr>
-        <p:spPr>
-          <a:xfrm>
-            <a:off x="4649724" y="1882521"/>
-            <a:ext cx="349758" cy="349758"/>
-          </a:xfrm>
-          <a:prstGeom prst="roundRect">
-            <a:avLst>
-              <a:gd name="adj" fmla="val 36601"/>
-            </a:avLst>
-          </a:prstGeom>
-          <a:solidFill>
-            <a:srgbClr val="FFFFFF"/>
-          </a:solidFill>
-          <a:ln w="19050">
-            <a:solidFill>
-              <a:srgbClr val="264653"/>
-            </a:solidFill>
-          </a:ln>
-        </p:spPr>
-        <p:txBody>
-          <a:bodyPr wrap="square" lIns="0" tIns="0" rIns="0" bIns="0" rtlCol="0" anchor="ctr"/>
-          <a:lstStyle/>
-          <a:p>
-            <a:pPr eaLnBrk="0" algn="ctr" indent="0" marL="0">
-              <a:buNone/>
-            </a:pPr>
-            <a:r>
-              <a:rPr lang="ko-KR" altLang="en-US" sz="1500" b="1" dirty="0">
-                <a:solidFill>
-                  <a:srgbClr val="1F2937"/>
-                </a:solidFill>
-                <a:latin typeface="맑은 고딕" pitchFamily="34" charset="0"/>
-                <a:ea typeface="맑은 고딕" pitchFamily="34" charset="-122"/>
-                <a:cs typeface="맑은 고딕" pitchFamily="34" charset="-120"/>
-              </a:rPr>
-              <a:t>■</a:t>
-            </a:r>
-            <a:endParaRPr lang="ko-KR" sz="1500" dirty="0"/>
-          </a:p>
-        </p:txBody>
-      </p:sp>
-      <p:sp>
-        <p:nvSpPr>
-          <p:cNvPr id="13" name="S06-tile98"/>
-          <p:cNvSpPr txBox="1"/>
-          <p:nvPr/>
-        </p:nvSpPr>
-        <p:spPr>
-          <a:xfrm>
-            <a:off x="5200650" y="1882521"/>
-            <a:ext cx="349758" cy="349758"/>
-          </a:xfrm>
-          <a:prstGeom prst="roundRect">
-            <a:avLst>
-              <a:gd name="adj" fmla="val 36601"/>
-            </a:avLst>
-          </a:prstGeom>
-          <a:solidFill>
-            <a:srgbClr val="FFFFFF"/>
-          </a:solidFill>
-          <a:ln w="19050">
-            <a:solidFill>
-              <a:srgbClr val="264653"/>
-            </a:solidFill>
-          </a:ln>
-        </p:spPr>
-        <p:txBody>
-          <a:bodyPr wrap="square" lIns="0" tIns="0" rIns="0" bIns="0" rtlCol="0" anchor="ctr"/>
-          <a:lstStyle/>
-          <a:p>
-            <a:pPr eaLnBrk="0" algn="ctr" indent="0" marL="0">
-              <a:buNone/>
-            </a:pPr>
-            <a:r>
-              <a:rPr lang="ko-KR" altLang="en-US" sz="1500" b="1" dirty="0">
-                <a:solidFill>
-                  <a:srgbClr val="1F2937"/>
-                </a:solidFill>
-                <a:latin typeface="맑은 고딕" pitchFamily="34" charset="0"/>
-                <a:ea typeface="맑은 고딕" pitchFamily="34" charset="-122"/>
-                <a:cs typeface="맑은 고딕" pitchFamily="34" charset="-120"/>
-              </a:rPr>
-              <a:t>?</a:t>
-            </a:r>
-            <a:endParaRPr lang="ko-KR" sz="1500" dirty="0"/>
-          </a:p>
-        </p:txBody>
-      </p:sp>
-      <p:sp>
-        <p:nvSpPr>
-          <p:cNvPr id="14" name="S06-chip99"/>
-          <p:cNvSpPr txBox="1"/>
-          <p:nvPr/>
-        </p:nvSpPr>
-        <p:spPr>
-          <a:xfrm>
-            <a:off x="6277356" y="1773936"/>
-            <a:ext cx="566928" cy="566928"/>
-          </a:xfrm>
-          <a:prstGeom prst="roundRect">
-            <a:avLst>
-              <a:gd name="adj" fmla="val 25806"/>
-            </a:avLst>
-          </a:prstGeom>
-          <a:solidFill>
-            <a:srgbClr val="264653"/>
-          </a:solidFill>
-          <a:ln>
-            <a:solidFill>
-              <a:srgbClr val="264653"/>
-            </a:solidFill>
-          </a:ln>
-        </p:spPr>
-        <p:txBody>
-          <a:bodyPr wrap="square" lIns="0" tIns="0" rIns="0" bIns="0" rtlCol="0" anchor="ctr"/>
-          <a:lstStyle/>
-          <a:p>
-            <a:pPr eaLnBrk="0" algn="ctr" indent="0" marL="0">
-              <a:buNone/>
-            </a:pPr>
-            <a:r>
-              <a:rPr lang="ko-KR" altLang="en-US" sz="2600" b="1" dirty="0">
-                <a:solidFill>
-                  <a:srgbClr val="FFFFFF"/>
-                </a:solidFill>
-                <a:latin typeface="맑은 고딕" pitchFamily="34" charset="0"/>
-                <a:ea typeface="맑은 고딕" pitchFamily="34" charset="-122"/>
-                <a:cs typeface="맑은 고딕" pitchFamily="34" charset="-120"/>
-              </a:rPr>
-              <a:t>②</a:t>
-            </a:r>
-            <a:endParaRPr lang="ko-KR" sz="2600" dirty="0"/>
-          </a:p>
-        </p:txBody>
-      </p:sp>
-      <p:sp>
-        <p:nvSpPr>
-          <p:cNvPr id="15" name="S06-tile100"/>
-          <p:cNvSpPr txBox="1"/>
-          <p:nvPr/>
-        </p:nvSpPr>
-        <p:spPr>
-          <a:xfrm>
-            <a:off x="7072884" y="1882521"/>
-            <a:ext cx="349758" cy="349758"/>
-          </a:xfrm>
-          <a:prstGeom prst="roundRect">
-            <a:avLst>
-              <a:gd name="adj" fmla="val 36601"/>
-            </a:avLst>
-          </a:prstGeom>
-          <a:solidFill>
-            <a:srgbClr val="FFFFFF"/>
-          </a:solidFill>
-          <a:ln w="19050">
-            <a:solidFill>
-              <a:srgbClr val="264653"/>
-            </a:solidFill>
-          </a:ln>
-        </p:spPr>
-        <p:txBody>
-          <a:bodyPr wrap="square" lIns="0" tIns="0" rIns="0" bIns="0" rtlCol="0" anchor="ctr"/>
-          <a:lstStyle/>
-          <a:p>
-            <a:pPr eaLnBrk="0" algn="ctr" indent="0" marL="0">
-              <a:buNone/>
-            </a:pPr>
-            <a:r>
-              <a:rPr lang="ko-KR" altLang="en-US" sz="1500" b="1" dirty="0">
-                <a:solidFill>
-                  <a:srgbClr val="1F2937"/>
-                </a:solidFill>
-                <a:latin typeface="맑은 고딕" pitchFamily="34" charset="0"/>
-                <a:ea typeface="맑은 고딕" pitchFamily="34" charset="-122"/>
-                <a:cs typeface="맑은 고딕" pitchFamily="34" charset="-120"/>
-              </a:rPr>
-              <a:t>○</a:t>
-            </a:r>
-            <a:endParaRPr lang="ko-KR" sz="1500" dirty="0"/>
-          </a:p>
-        </p:txBody>
-      </p:sp>
-      <p:sp>
-        <p:nvSpPr>
-          <p:cNvPr id="16" name="S06-tile101"/>
-          <p:cNvSpPr txBox="1"/>
-          <p:nvPr/>
-        </p:nvSpPr>
-        <p:spPr>
-          <a:xfrm>
-            <a:off x="7623810" y="1882521"/>
-            <a:ext cx="349758" cy="349758"/>
-          </a:xfrm>
-          <a:prstGeom prst="roundRect">
-            <a:avLst>
-              <a:gd name="adj" fmla="val 36601"/>
-            </a:avLst>
-          </a:prstGeom>
-          <a:solidFill>
-            <a:srgbClr val="FFFFFF"/>
-          </a:solidFill>
-          <a:ln w="19050">
-            <a:solidFill>
-              <a:srgbClr val="264653"/>
-            </a:solidFill>
-          </a:ln>
-        </p:spPr>
-        <p:txBody>
-          <a:bodyPr wrap="square" lIns="0" tIns="0" rIns="0" bIns="0" rtlCol="0" anchor="ctr"/>
-          <a:lstStyle/>
-          <a:p>
-            <a:pPr eaLnBrk="0" algn="ctr" indent="0" marL="0">
-              <a:buNone/>
-            </a:pPr>
-            <a:r>
-              <a:rPr lang="ko-KR" altLang="en-US" sz="1500" b="1" dirty="0">
-                <a:solidFill>
-                  <a:srgbClr val="1F2937"/>
-                </a:solidFill>
-                <a:latin typeface="맑은 고딕" pitchFamily="34" charset="0"/>
-                <a:ea typeface="맑은 고딕" pitchFamily="34" charset="-122"/>
-                <a:cs typeface="맑은 고딕" pitchFamily="34" charset="-120"/>
-              </a:rPr>
-              <a:t>○</a:t>
-            </a:r>
-            <a:endParaRPr lang="ko-KR" sz="1500" dirty="0"/>
-          </a:p>
-        </p:txBody>
-      </p:sp>
-      <p:sp>
-        <p:nvSpPr>
-          <p:cNvPr id="17" name="S06-tile102"/>
-          <p:cNvSpPr txBox="1"/>
-          <p:nvPr/>
-        </p:nvSpPr>
-        <p:spPr>
-          <a:xfrm>
-            <a:off x="8174736" y="1882521"/>
-            <a:ext cx="349758" cy="349758"/>
-          </a:xfrm>
-          <a:prstGeom prst="roundRect">
-            <a:avLst>
-              <a:gd name="adj" fmla="val 36601"/>
-            </a:avLst>
-          </a:prstGeom>
-          <a:solidFill>
-            <a:srgbClr val="FFFFFF"/>
-          </a:solidFill>
-          <a:ln w="19050">
-            <a:solidFill>
-              <a:srgbClr val="264653"/>
-            </a:solidFill>
-          </a:ln>
-        </p:spPr>
-        <p:txBody>
-          <a:bodyPr wrap="square" lIns="0" tIns="0" rIns="0" bIns="0" rtlCol="0" anchor="ctr"/>
-          <a:lstStyle/>
-          <a:p>
-            <a:pPr eaLnBrk="0" algn="ctr" indent="0" marL="0">
-              <a:buNone/>
-            </a:pPr>
-            <a:r>
-              <a:rPr lang="ko-KR" altLang="en-US" sz="1500" b="1" dirty="0">
-                <a:solidFill>
-                  <a:srgbClr val="1F2937"/>
-                </a:solidFill>
-                <a:latin typeface="맑은 고딕" pitchFamily="34" charset="0"/>
-                <a:ea typeface="맑은 고딕" pitchFamily="34" charset="-122"/>
-                <a:cs typeface="맑은 고딕" pitchFamily="34" charset="-120"/>
-              </a:rPr>
-              <a:t>●</a:t>
-            </a:r>
-            <a:endParaRPr lang="ko-KR" sz="1500" dirty="0"/>
-          </a:p>
-        </p:txBody>
-      </p:sp>
-      <p:sp>
-        <p:nvSpPr>
-          <p:cNvPr id="18" name="S06-tile103"/>
-          <p:cNvSpPr txBox="1"/>
-          <p:nvPr/>
-        </p:nvSpPr>
-        <p:spPr>
-          <a:xfrm>
-            <a:off x="8725662" y="1882521"/>
-            <a:ext cx="349758" cy="349758"/>
-          </a:xfrm>
-          <a:prstGeom prst="roundRect">
-            <a:avLst>
-              <a:gd name="adj" fmla="val 36601"/>
-            </a:avLst>
-          </a:prstGeom>
-          <a:solidFill>
-            <a:srgbClr val="FFFFFF"/>
-          </a:solidFill>
-          <a:ln w="19050">
-            <a:solidFill>
-              <a:srgbClr val="264653"/>
-            </a:solidFill>
-          </a:ln>
-        </p:spPr>
-        <p:txBody>
-          <a:bodyPr wrap="square" lIns="0" tIns="0" rIns="0" bIns="0" rtlCol="0" anchor="ctr"/>
-          <a:lstStyle/>
-          <a:p>
-            <a:pPr eaLnBrk="0" algn="ctr" indent="0" marL="0">
-              <a:buNone/>
-            </a:pPr>
-            <a:r>
-              <a:rPr lang="ko-KR" altLang="en-US" sz="1500" b="1" dirty="0">
-                <a:solidFill>
-                  <a:srgbClr val="1F2937"/>
-                </a:solidFill>
-                <a:latin typeface="맑은 고딕" pitchFamily="34" charset="0"/>
-                <a:ea typeface="맑은 고딕" pitchFamily="34" charset="-122"/>
-                <a:cs typeface="맑은 고딕" pitchFamily="34" charset="-120"/>
-              </a:rPr>
-              <a:t>○</a:t>
-            </a:r>
-            <a:endParaRPr lang="ko-KR" sz="1500" dirty="0"/>
-          </a:p>
-        </p:txBody>
-      </p:sp>
-      <p:sp>
-        <p:nvSpPr>
-          <p:cNvPr id="19" name="S06-tile104"/>
-          <p:cNvSpPr txBox="1"/>
-          <p:nvPr/>
-        </p:nvSpPr>
-        <p:spPr>
-          <a:xfrm>
-            <a:off x="9276588" y="1882521"/>
-            <a:ext cx="349758" cy="349758"/>
-          </a:xfrm>
-          <a:prstGeom prst="roundRect">
-            <a:avLst>
-              <a:gd name="adj" fmla="val 36601"/>
-            </a:avLst>
-          </a:prstGeom>
-          <a:solidFill>
-            <a:srgbClr val="FFFFFF"/>
-          </a:solidFill>
-          <a:ln w="19050">
-            <a:solidFill>
-              <a:srgbClr val="264653"/>
-            </a:solidFill>
-          </a:ln>
-        </p:spPr>
-        <p:txBody>
-          <a:bodyPr wrap="square" lIns="0" tIns="0" rIns="0" bIns="0" rtlCol="0" anchor="ctr"/>
-          <a:lstStyle/>
-          <a:p>
-            <a:pPr eaLnBrk="0" algn="ctr" indent="0" marL="0">
-              <a:buNone/>
-            </a:pPr>
-            <a:r>
-              <a:rPr lang="ko-KR" altLang="en-US" sz="1500" b="1" dirty="0">
-                <a:solidFill>
-                  <a:srgbClr val="1F2937"/>
-                </a:solidFill>
-                <a:latin typeface="맑은 고딕" pitchFamily="34" charset="0"/>
-                <a:ea typeface="맑은 고딕" pitchFamily="34" charset="-122"/>
-                <a:cs typeface="맑은 고딕" pitchFamily="34" charset="-120"/>
-              </a:rPr>
-              <a:t>○</a:t>
-            </a:r>
-            <a:endParaRPr lang="ko-KR" sz="1500" dirty="0"/>
-          </a:p>
-        </p:txBody>
-      </p:sp>
-      <p:sp>
-        <p:nvSpPr>
-          <p:cNvPr id="20" name="S06-tile105"/>
-          <p:cNvSpPr txBox="1"/>
-          <p:nvPr/>
-        </p:nvSpPr>
-        <p:spPr>
-          <a:xfrm>
-            <a:off x="9827514" y="1882521"/>
-            <a:ext cx="349758" cy="349758"/>
-          </a:xfrm>
-          <a:prstGeom prst="roundRect">
-            <a:avLst>
-              <a:gd name="adj" fmla="val 36601"/>
-            </a:avLst>
-          </a:prstGeom>
-          <a:solidFill>
-            <a:srgbClr val="FFFFFF"/>
-          </a:solidFill>
-          <a:ln w="19050">
-            <a:solidFill>
-              <a:srgbClr val="264653"/>
-            </a:solidFill>
-          </a:ln>
-        </p:spPr>
-        <p:txBody>
-          <a:bodyPr wrap="square" lIns="0" tIns="0" rIns="0" bIns="0" rtlCol="0" anchor="ctr"/>
-          <a:lstStyle/>
-          <a:p>
-            <a:pPr eaLnBrk="0" algn="ctr" indent="0" marL="0">
-              <a:buNone/>
-            </a:pPr>
-            <a:r>
-              <a:rPr lang="ko-KR" altLang="en-US" sz="1500" b="1" dirty="0">
-                <a:solidFill>
-                  <a:srgbClr val="1F2937"/>
-                </a:solidFill>
-                <a:latin typeface="맑은 고딕" pitchFamily="34" charset="0"/>
-                <a:ea typeface="맑은 고딕" pitchFamily="34" charset="-122"/>
-                <a:cs typeface="맑은 고딕" pitchFamily="34" charset="-120"/>
-              </a:rPr>
-              <a:t>●</a:t>
-            </a:r>
-            <a:endParaRPr lang="ko-KR" sz="1500" dirty="0"/>
-          </a:p>
-        </p:txBody>
-      </p:sp>
-      <p:sp>
-        <p:nvSpPr>
-          <p:cNvPr id="21" name="S06-tile106"/>
-          <p:cNvSpPr txBox="1"/>
-          <p:nvPr/>
-        </p:nvSpPr>
-        <p:spPr>
-          <a:xfrm>
-            <a:off x="10378440" y="1882521"/>
-            <a:ext cx="349758" cy="349758"/>
-          </a:xfrm>
-          <a:prstGeom prst="roundRect">
-            <a:avLst>
-              <a:gd name="adj" fmla="val 36601"/>
-            </a:avLst>
-          </a:prstGeom>
-          <a:solidFill>
-            <a:srgbClr val="FFFFFF"/>
-          </a:solidFill>
-          <a:ln w="19050">
-            <a:solidFill>
-              <a:srgbClr val="264653"/>
-            </a:solidFill>
-          </a:ln>
-        </p:spPr>
-        <p:txBody>
-          <a:bodyPr wrap="square" lIns="0" tIns="0" rIns="0" bIns="0" rtlCol="0" anchor="ctr"/>
-          <a:lstStyle/>
-          <a:p>
-            <a:pPr eaLnBrk="0" algn="ctr" indent="0" marL="0">
-              <a:buNone/>
-            </a:pPr>
-            <a:r>
-              <a:rPr lang="ko-KR" altLang="en-US" sz="1500" b="1" dirty="0">
-                <a:solidFill>
-                  <a:srgbClr val="1F2937"/>
-                </a:solidFill>
-                <a:latin typeface="맑은 고딕" pitchFamily="34" charset="0"/>
-                <a:ea typeface="맑은 고딕" pitchFamily="34" charset="-122"/>
-                <a:cs typeface="맑은 고딕" pitchFamily="34" charset="-120"/>
-              </a:rPr>
-              <a:t>○</a:t>
-            </a:r>
-            <a:endParaRPr lang="ko-KR" sz="1500" dirty="0"/>
-          </a:p>
-        </p:txBody>
-      </p:sp>
-      <p:sp>
-        <p:nvSpPr>
-          <p:cNvPr id="22" name="S06-tile107"/>
-          <p:cNvSpPr txBox="1"/>
-          <p:nvPr/>
-        </p:nvSpPr>
-        <p:spPr>
-          <a:xfrm>
-            <a:off x="10929366" y="1882521"/>
-            <a:ext cx="349758" cy="349758"/>
-          </a:xfrm>
-          <a:prstGeom prst="roundRect">
-            <a:avLst>
-              <a:gd name="adj" fmla="val 36601"/>
-            </a:avLst>
-          </a:prstGeom>
-          <a:solidFill>
-            <a:srgbClr val="FFFFFF"/>
-          </a:solidFill>
-          <a:ln w="19050">
-            <a:solidFill>
-              <a:srgbClr val="264653"/>
-            </a:solidFill>
-          </a:ln>
-        </p:spPr>
-        <p:txBody>
-          <a:bodyPr wrap="square" lIns="0" tIns="0" rIns="0" bIns="0" rtlCol="0" anchor="ctr"/>
-          <a:lstStyle/>
-          <a:p>
-            <a:pPr eaLnBrk="0" algn="ctr" indent="0" marL="0">
-              <a:buNone/>
-            </a:pPr>
-            <a:r>
-              <a:rPr lang="ko-KR" altLang="en-US" sz="1500" b="1" dirty="0">
-                <a:solidFill>
-                  <a:srgbClr val="1F2937"/>
-                </a:solidFill>
-                <a:latin typeface="맑은 고딕" pitchFamily="34" charset="0"/>
-                <a:ea typeface="맑은 고딕" pitchFamily="34" charset="-122"/>
-                <a:cs typeface="맑은 고딕" pitchFamily="34" charset="-120"/>
-              </a:rPr>
-              <a:t>?</a:t>
-            </a:r>
-            <a:endParaRPr lang="ko-KR" sz="1500" dirty="0"/>
-          </a:p>
-        </p:txBody>
-      </p:sp>
-      <p:sp>
-        <p:nvSpPr>
-          <p:cNvPr id="23" name="S06-chip108"/>
-          <p:cNvSpPr txBox="1"/>
-          <p:nvPr/>
-        </p:nvSpPr>
-        <p:spPr>
-          <a:xfrm>
-            <a:off x="548640" y="3762756"/>
-            <a:ext cx="566928" cy="566928"/>
-          </a:xfrm>
-          <a:prstGeom prst="roundRect">
-            <a:avLst>
-              <a:gd name="adj" fmla="val 25806"/>
-            </a:avLst>
-          </a:prstGeom>
-          <a:solidFill>
-            <a:srgbClr val="264653"/>
-          </a:solidFill>
-          <a:ln>
-            <a:solidFill>
-              <a:srgbClr val="264653"/>
-            </a:solidFill>
-          </a:ln>
-        </p:spPr>
-        <p:txBody>
-          <a:bodyPr wrap="square" lIns="0" tIns="0" rIns="0" bIns="0" rtlCol="0" anchor="ctr"/>
-          <a:lstStyle/>
-          <a:p>
-            <a:pPr eaLnBrk="0" algn="ctr" indent="0" marL="0">
-              <a:buNone/>
-            </a:pPr>
-            <a:r>
-              <a:rPr lang="ko-KR" altLang="en-US" sz="2600" b="1" dirty="0">
-                <a:solidFill>
-                  <a:srgbClr val="FFFFFF"/>
-                </a:solidFill>
-                <a:latin typeface="맑은 고딕" pitchFamily="34" charset="0"/>
-                <a:ea typeface="맑은 고딕" pitchFamily="34" charset="-122"/>
-                <a:cs typeface="맑은 고딕" pitchFamily="34" charset="-120"/>
-              </a:rPr>
-              <a:t>③</a:t>
-            </a:r>
-            <a:endParaRPr lang="ko-KR" sz="2600" dirty="0"/>
-          </a:p>
-        </p:txBody>
-      </p:sp>
-      <p:sp>
-        <p:nvSpPr>
-          <p:cNvPr id="24" name="S06-tile109"/>
-          <p:cNvSpPr txBox="1"/>
-          <p:nvPr/>
-        </p:nvSpPr>
-        <p:spPr>
-          <a:xfrm>
-            <a:off x="1344168" y="3779520"/>
-            <a:ext cx="533400" cy="533400"/>
-          </a:xfrm>
-          <a:prstGeom prst="roundRect">
-            <a:avLst>
-              <a:gd name="adj" fmla="val 24000"/>
-            </a:avLst>
-          </a:prstGeom>
-          <a:solidFill>
-            <a:srgbClr val="FFFFFF"/>
-          </a:solidFill>
-          <a:ln w="19050">
-            <a:solidFill>
-              <a:srgbClr val="264653"/>
-            </a:solidFill>
-          </a:ln>
-        </p:spPr>
-        <p:txBody>
-          <a:bodyPr wrap="square" lIns="0" tIns="0" rIns="0" bIns="0" rtlCol="0" anchor="ctr"/>
-          <a:lstStyle/>
-          <a:p>
-            <a:pPr eaLnBrk="0" algn="ctr" indent="0" marL="0">
-              <a:buNone/>
-            </a:pPr>
-            <a:r>
-              <a:rPr lang="ko-KR" altLang="en-US" sz="2300" b="1" dirty="0">
-                <a:solidFill>
-                  <a:srgbClr val="1F2937"/>
-                </a:solidFill>
-                <a:latin typeface="맑은 고딕" pitchFamily="34" charset="0"/>
-                <a:ea typeface="맑은 고딕" pitchFamily="34" charset="-122"/>
-                <a:cs typeface="맑은 고딕" pitchFamily="34" charset="-120"/>
-              </a:rPr>
-              <a:t>▲</a:t>
-            </a:r>
-            <a:endParaRPr lang="ko-KR" sz="2300" dirty="0"/>
-          </a:p>
-        </p:txBody>
-      </p:sp>
-      <p:sp>
-        <p:nvSpPr>
-          <p:cNvPr id="25" name="S06-tile110"/>
-          <p:cNvSpPr txBox="1"/>
-          <p:nvPr/>
-        </p:nvSpPr>
-        <p:spPr>
-          <a:xfrm>
-            <a:off x="2078736" y="3779520"/>
-            <a:ext cx="533400" cy="533400"/>
-          </a:xfrm>
-          <a:prstGeom prst="roundRect">
-            <a:avLst>
-              <a:gd name="adj" fmla="val 24000"/>
-            </a:avLst>
-          </a:prstGeom>
-          <a:solidFill>
-            <a:srgbClr val="FFFFFF"/>
-          </a:solidFill>
-          <a:ln w="19050">
-            <a:solidFill>
-              <a:srgbClr val="264653"/>
-            </a:solidFill>
-          </a:ln>
-        </p:spPr>
-        <p:txBody>
-          <a:bodyPr wrap="square" lIns="0" tIns="0" rIns="0" bIns="0" rtlCol="0" anchor="ctr"/>
-          <a:lstStyle/>
-          <a:p>
-            <a:pPr eaLnBrk="0" algn="ctr" indent="0" marL="0">
-              <a:buNone/>
-            </a:pPr>
-            <a:r>
-              <a:rPr lang="ko-KR" altLang="en-US" sz="2300" b="1" dirty="0">
-                <a:solidFill>
-                  <a:srgbClr val="1F2937"/>
-                </a:solidFill>
-                <a:latin typeface="맑은 고딕" pitchFamily="34" charset="0"/>
-                <a:ea typeface="맑은 고딕" pitchFamily="34" charset="-122"/>
-                <a:cs typeface="맑은 고딕" pitchFamily="34" charset="-120"/>
-              </a:rPr>
-              <a:t>△</a:t>
-            </a:r>
-            <a:endParaRPr lang="ko-KR" sz="2300" dirty="0"/>
-          </a:p>
-        </p:txBody>
-      </p:sp>
-      <p:sp>
-        <p:nvSpPr>
-          <p:cNvPr id="26" name="S06-tile111"/>
-          <p:cNvSpPr txBox="1"/>
-          <p:nvPr/>
-        </p:nvSpPr>
-        <p:spPr>
-          <a:xfrm>
-            <a:off x="2813304" y="3779520"/>
-            <a:ext cx="533400" cy="533400"/>
-          </a:xfrm>
-          <a:prstGeom prst="roundRect">
-            <a:avLst>
-              <a:gd name="adj" fmla="val 24000"/>
-            </a:avLst>
-          </a:prstGeom>
-          <a:solidFill>
-            <a:srgbClr val="FFFFFF"/>
-          </a:solidFill>
-          <a:ln w="19050">
-            <a:solidFill>
-              <a:srgbClr val="264653"/>
-            </a:solidFill>
-          </a:ln>
-        </p:spPr>
-        <p:txBody>
-          <a:bodyPr wrap="square" lIns="0" tIns="0" rIns="0" bIns="0" rtlCol="0" anchor="ctr"/>
-          <a:lstStyle/>
-          <a:p>
-            <a:pPr eaLnBrk="0" algn="ctr" indent="0" marL="0">
-              <a:buNone/>
-            </a:pPr>
-            <a:r>
-              <a:rPr lang="ko-KR" altLang="en-US" sz="2300" b="1" dirty="0">
-                <a:solidFill>
-                  <a:srgbClr val="1F2937"/>
-                </a:solidFill>
-                <a:latin typeface="맑은 고딕" pitchFamily="34" charset="0"/>
-                <a:ea typeface="맑은 고딕" pitchFamily="34" charset="-122"/>
-                <a:cs typeface="맑은 고딕" pitchFamily="34" charset="-120"/>
-              </a:rPr>
-              <a:t>▲</a:t>
-            </a:r>
-            <a:endParaRPr lang="ko-KR" sz="2300" dirty="0"/>
-          </a:p>
-        </p:txBody>
-      </p:sp>
-      <p:sp>
-        <p:nvSpPr>
-          <p:cNvPr id="27" name="S06-tile112"/>
-          <p:cNvSpPr txBox="1"/>
-          <p:nvPr/>
-        </p:nvSpPr>
-        <p:spPr>
-          <a:xfrm>
-            <a:off x="3547872" y="3779520"/>
-            <a:ext cx="533400" cy="533400"/>
-          </a:xfrm>
-          <a:prstGeom prst="roundRect">
-            <a:avLst>
-              <a:gd name="adj" fmla="val 24000"/>
-            </a:avLst>
-          </a:prstGeom>
-          <a:solidFill>
-            <a:srgbClr val="FFFFFF"/>
-          </a:solidFill>
-          <a:ln w="19050">
-            <a:solidFill>
-              <a:srgbClr val="264653"/>
-            </a:solidFill>
-          </a:ln>
-        </p:spPr>
-        <p:txBody>
-          <a:bodyPr wrap="square" lIns="0" tIns="0" rIns="0" bIns="0" rtlCol="0" anchor="ctr"/>
-          <a:lstStyle/>
-          <a:p>
-            <a:pPr eaLnBrk="0" algn="ctr" indent="0" marL="0">
-              <a:buNone/>
-            </a:pPr>
-            <a:r>
-              <a:rPr lang="ko-KR" altLang="en-US" sz="2300" b="1" dirty="0">
-                <a:solidFill>
-                  <a:srgbClr val="1F2937"/>
-                </a:solidFill>
-                <a:latin typeface="맑은 고딕" pitchFamily="34" charset="0"/>
-                <a:ea typeface="맑은 고딕" pitchFamily="34" charset="-122"/>
-                <a:cs typeface="맑은 고딕" pitchFamily="34" charset="-120"/>
-              </a:rPr>
-              <a:t>△</a:t>
-            </a:r>
-            <a:endParaRPr lang="ko-KR" sz="2300" dirty="0"/>
-          </a:p>
-        </p:txBody>
-      </p:sp>
-      <p:sp>
-        <p:nvSpPr>
-          <p:cNvPr id="28" name="S06-tile113"/>
-          <p:cNvSpPr txBox="1"/>
-          <p:nvPr/>
-        </p:nvSpPr>
-        <p:spPr>
-          <a:xfrm>
-            <a:off x="4282440" y="3779520"/>
-            <a:ext cx="533400" cy="533400"/>
-          </a:xfrm>
-          <a:prstGeom prst="roundRect">
-            <a:avLst>
-              <a:gd name="adj" fmla="val 24000"/>
-            </a:avLst>
-          </a:prstGeom>
-          <a:solidFill>
-            <a:srgbClr val="FFFFFF"/>
-          </a:solidFill>
-          <a:ln w="19050">
-            <a:solidFill>
-              <a:srgbClr val="264653"/>
-            </a:solidFill>
-          </a:ln>
-        </p:spPr>
-        <p:txBody>
-          <a:bodyPr wrap="square" lIns="0" tIns="0" rIns="0" bIns="0" rtlCol="0" anchor="ctr"/>
-          <a:lstStyle/>
-          <a:p>
-            <a:pPr eaLnBrk="0" algn="ctr" indent="0" marL="0">
-              <a:buNone/>
-            </a:pPr>
-            <a:r>
-              <a:rPr lang="ko-KR" altLang="en-US" sz="2300" b="1" dirty="0">
-                <a:solidFill>
-                  <a:srgbClr val="1F2937"/>
-                </a:solidFill>
-                <a:latin typeface="맑은 고딕" pitchFamily="34" charset="0"/>
-                <a:ea typeface="맑은 고딕" pitchFamily="34" charset="-122"/>
-                <a:cs typeface="맑은 고딕" pitchFamily="34" charset="-120"/>
-              </a:rPr>
-              <a:t>▲</a:t>
-            </a:r>
-            <a:endParaRPr lang="ko-KR" sz="2300" dirty="0"/>
-          </a:p>
-        </p:txBody>
-      </p:sp>
-      <p:sp>
-        <p:nvSpPr>
-          <p:cNvPr id="29" name="S06-tile114"/>
-          <p:cNvSpPr txBox="1"/>
-          <p:nvPr/>
-        </p:nvSpPr>
-        <p:spPr>
-          <a:xfrm>
-            <a:off x="5017008" y="3779520"/>
-            <a:ext cx="533400" cy="533400"/>
-          </a:xfrm>
-          <a:prstGeom prst="roundRect">
-            <a:avLst>
-              <a:gd name="adj" fmla="val 24000"/>
-            </a:avLst>
-          </a:prstGeom>
-          <a:solidFill>
-            <a:srgbClr val="FFFFFF"/>
-          </a:solidFill>
-          <a:ln w="19050">
-            <a:solidFill>
-              <a:srgbClr val="264653"/>
-            </a:solidFill>
-          </a:ln>
-        </p:spPr>
-        <p:txBody>
-          <a:bodyPr wrap="square" lIns="0" tIns="0" rIns="0" bIns="0" rtlCol="0" anchor="ctr"/>
-          <a:lstStyle/>
-          <a:p>
-            <a:pPr eaLnBrk="0" algn="ctr" indent="0" marL="0">
-              <a:buNone/>
-            </a:pPr>
-            <a:r>
-              <a:rPr lang="ko-KR" altLang="en-US" sz="2300" b="1" dirty="0">
-                <a:solidFill>
-                  <a:srgbClr val="1F2937"/>
-                </a:solidFill>
-                <a:latin typeface="맑은 고딕" pitchFamily="34" charset="0"/>
-                <a:ea typeface="맑은 고딕" pitchFamily="34" charset="-122"/>
-                <a:cs typeface="맑은 고딕" pitchFamily="34" charset="-120"/>
-              </a:rPr>
-              <a:t>?</a:t>
-            </a:r>
-            <a:endParaRPr lang="ko-KR" sz="2300" dirty="0"/>
-          </a:p>
-        </p:txBody>
-      </p:sp>
-      <p:sp>
-        <p:nvSpPr>
-          <p:cNvPr id="30" name="S06-chip115"/>
-          <p:cNvSpPr txBox="1"/>
-          <p:nvPr/>
-        </p:nvSpPr>
-        <p:spPr>
-          <a:xfrm>
-            <a:off x="6277356" y="3762756"/>
-            <a:ext cx="566928" cy="566928"/>
-          </a:xfrm>
-          <a:prstGeom prst="roundRect">
-            <a:avLst>
-              <a:gd name="adj" fmla="val 25806"/>
-            </a:avLst>
-          </a:prstGeom>
-          <a:solidFill>
-            <a:srgbClr val="264653"/>
-          </a:solidFill>
-          <a:ln>
-            <a:solidFill>
-              <a:srgbClr val="264653"/>
-            </a:solidFill>
-          </a:ln>
-        </p:spPr>
-        <p:txBody>
-          <a:bodyPr wrap="square" lIns="0" tIns="0" rIns="0" bIns="0" rtlCol="0" anchor="ctr"/>
-          <a:lstStyle/>
-          <a:p>
-            <a:pPr eaLnBrk="0" algn="ctr" indent="0" marL="0">
-              <a:buNone/>
-            </a:pPr>
-            <a:r>
-              <a:rPr lang="ko-KR" altLang="en-US" sz="2600" b="1" dirty="0">
-                <a:solidFill>
-                  <a:srgbClr val="FFFFFF"/>
-                </a:solidFill>
-                <a:latin typeface="맑은 고딕" pitchFamily="34" charset="0"/>
-                <a:ea typeface="맑은 고딕" pitchFamily="34" charset="-122"/>
-                <a:cs typeface="맑은 고딕" pitchFamily="34" charset="-120"/>
-              </a:rPr>
-              <a:t>④</a:t>
-            </a:r>
-            <a:endParaRPr lang="ko-KR" sz="2600" dirty="0"/>
-          </a:p>
-        </p:txBody>
-      </p:sp>
-      <p:sp>
-        <p:nvSpPr>
-          <p:cNvPr id="31" name="S06-text116"/>
-          <p:cNvSpPr txBox="1"/>
-          <p:nvPr/>
-        </p:nvSpPr>
-        <p:spPr>
-          <a:xfrm>
-            <a:off x="7072884" y="3314700"/>
-            <a:ext cx="4567428" cy="1463040"/>
+            <a:off x="548640" y="2011680"/>
+            <a:ext cx="11091672" cy="3108960"/>
           </a:xfrm>
           <a:prstGeom prst="rect">
             <a:avLst/>
@@ -18675,7 +17492,7 @@
               <a:buNone/>
             </a:pPr>
             <a:r>
-              <a:rPr lang="ko-KR" altLang="en-US" sz="3200" dirty="0">
+              <a:rPr lang="ko-KR" altLang="en-US" sz="4800" b="1" dirty="0">
                 <a:solidFill>
                   <a:srgbClr val="1F2937"/>
                 </a:solidFill>
@@ -18683,9 +17500,43 @@
                 <a:ea typeface="맑은 고딕" pitchFamily="34" charset="-122"/>
                 <a:cs typeface="맑은 고딕" pitchFamily="34" charset="-120"/>
               </a:rPr>
-              <a:t>S05의 넷째 모양은 몇 개?</a:t>
+              <a:t>① ■ ● ● ■ ● ● ■ ?</a:t>
             </a:r>
-            <a:endParaRPr lang="ko-KR" sz="3200" dirty="0"/>
+            <a:endParaRPr lang="ko-KR" sz="4800" dirty="0"/>
+          </a:p>
+          <a:p>
+            <a:pPr eaLnBrk="0" algn="l" indent="0" marL="0">
+              <a:buNone/>
+            </a:pPr>
+            <a:r>
+              <a:rPr lang="ko-KR" altLang="en-US" sz="4800" b="1" dirty="0">
+                <a:solidFill>
+                  <a:srgbClr val="1F2937"/>
+                </a:solidFill>
+                <a:latin typeface="맑은 고딕" pitchFamily="34" charset="0"/>
+                <a:ea typeface="맑은 고딕" pitchFamily="34" charset="-122"/>
+                <a:cs typeface="맑은 고딕" pitchFamily="34" charset="-120"/>
+              </a:rPr>
+              <a:t>② ○ ○ ● ○ ○ ● ○ ?</a:t>
+            </a:r>
+            <a:endParaRPr lang="ko-KR" sz="4800" dirty="0"/>
+          </a:p>
+          <a:p>
+            <a:pPr eaLnBrk="0" algn="l" indent="0" marL="0">
+              <a:buNone/>
+            </a:pPr>
+            <a:r>
+              <a:rPr lang="ko-KR" altLang="en-US" sz="4800" b="1" dirty="0">
+                <a:solidFill>
+                  <a:srgbClr val="1F2937"/>
+                </a:solidFill>
+                <a:latin typeface="맑은 고딕" pitchFamily="34" charset="0"/>
+                <a:ea typeface="맑은 고딕" pitchFamily="34" charset="-122"/>
+                <a:cs typeface="맑은 고딕" pitchFamily="34" charset="-120"/>
+              </a:rPr>
+              <a:t>③ ▲ △ ▲ △ ▲ ?</a:t>
+            </a:r>
+            <a:endParaRPr lang="ko-KR" sz="4800" dirty="0"/>
           </a:p>
         </p:txBody>
       </p:sp>
@@ -18805,7 +17656,7 @@
       </p:sp>
       <p:sp>
         <p:nvSpPr>
-          <p:cNvPr id="3" name="S07-card117"/>
+          <p:cNvPr id="3" name="S07-card92"/>
           <p:cNvSpPr/>
           <p:nvPr/>
         </p:nvSpPr>
@@ -18832,7 +17683,7 @@
       </p:sp>
       <p:sp>
         <p:nvSpPr>
-          <p:cNvPr id="4" name="S07-cardtext118"/>
+          <p:cNvPr id="4" name="S07-cardtext93"/>
           <p:cNvSpPr txBox="1"/>
           <p:nvPr/>
         </p:nvSpPr>
@@ -18874,7 +17725,7 @@
       </p:sp>
       <p:sp>
         <p:nvSpPr>
-          <p:cNvPr id="5" name="S07-card119"/>
+          <p:cNvPr id="5" name="S07-card94"/>
           <p:cNvSpPr/>
           <p:nvPr/>
         </p:nvSpPr>
@@ -18901,7 +17752,7 @@
       </p:sp>
       <p:sp>
         <p:nvSpPr>
-          <p:cNvPr id="6" name="S07-cardtext120"/>
+          <p:cNvPr id="6" name="S07-cardtext95"/>
           <p:cNvSpPr txBox="1"/>
           <p:nvPr/>
         </p:nvSpPr>
@@ -18943,7 +17794,7 @@
       </p:sp>
       <p:sp>
         <p:nvSpPr>
-          <p:cNvPr id="7" name="S07-chip121"/>
+          <p:cNvPr id="7" name="S07-chip96"/>
           <p:cNvSpPr txBox="1"/>
           <p:nvPr/>
         </p:nvSpPr>
@@ -18990,7 +17841,7 @@
       </p:sp>
       <p:sp>
         <p:nvSpPr>
-          <p:cNvPr id="8" name="S07-text122"/>
+          <p:cNvPr id="8" name="S07-text97"/>
           <p:cNvSpPr txBox="1"/>
           <p:nvPr/>
         </p:nvSpPr>
@@ -19029,7 +17880,7 @@
       </p:sp>
       <p:sp>
         <p:nvSpPr>
-          <p:cNvPr id="9" name="S07-chip123"/>
+          <p:cNvPr id="9" name="S07-chip98"/>
           <p:cNvSpPr txBox="1"/>
           <p:nvPr/>
         </p:nvSpPr>
@@ -19076,7 +17927,7 @@
       </p:sp>
       <p:sp>
         <p:nvSpPr>
-          <p:cNvPr id="10" name="S07-text124"/>
+          <p:cNvPr id="10" name="S07-text99"/>
           <p:cNvSpPr txBox="1"/>
           <p:nvPr/>
         </p:nvSpPr>
@@ -19229,7 +18080,7 @@
       </p:sp>
       <p:sp>
         <p:nvSpPr>
-          <p:cNvPr id="3" name="S08-text125"/>
+          <p:cNvPr id="3" name="S08-text100"/>
           <p:cNvSpPr txBox="1"/>
           <p:nvPr/>
         </p:nvSpPr>
@@ -19268,7 +18119,7 @@
       </p:sp>
       <p:sp>
         <p:nvSpPr>
-          <p:cNvPr id="4" name="S08-card126"/>
+          <p:cNvPr id="4" name="S08-card101"/>
           <p:cNvSpPr/>
           <p:nvPr/>
         </p:nvSpPr>
@@ -19295,7 +18146,7 @@
       </p:sp>
       <p:sp>
         <p:nvSpPr>
-          <p:cNvPr id="5" name="S08-cardtext127"/>
+          <p:cNvPr id="5" name="S08-cardtext102"/>
           <p:cNvSpPr txBox="1"/>
           <p:nvPr/>
         </p:nvSpPr>
@@ -19337,7 +18188,7 @@
       </p:sp>
       <p:graphicFrame>
         <p:nvGraphicFramePr>
-          <p:cNvPr id="9" name="S08-table128"/>
+          <p:cNvPr id="9" name="S08-table103"/>
           <p:cNvGraphicFramePr>
             <a:graphicFrameLocks noGrp="1"/>
           </p:cNvGraphicFramePr>
@@ -21945,7 +20796,7 @@
       </p:sp>
       <p:sp>
         <p:nvSpPr>
-          <p:cNvPr id="3" name="S09-card129"/>
+          <p:cNvPr id="3" name="S09-card104"/>
           <p:cNvSpPr/>
           <p:nvPr/>
         </p:nvSpPr>
@@ -21972,7 +20823,7 @@
       </p:sp>
       <p:sp>
         <p:nvSpPr>
-          <p:cNvPr id="4" name="S09-cardtext130"/>
+          <p:cNvPr id="4" name="S09-cardtext105"/>
           <p:cNvSpPr txBox="1"/>
           <p:nvPr/>
         </p:nvSpPr>
@@ -22014,7 +20865,7 @@
       </p:sp>
       <p:sp>
         <p:nvSpPr>
-          <p:cNvPr id="5" name="S09-card131"/>
+          <p:cNvPr id="5" name="S09-card106"/>
           <p:cNvSpPr/>
           <p:nvPr/>
         </p:nvSpPr>
@@ -22041,7 +20892,7 @@
       </p:sp>
       <p:sp>
         <p:nvSpPr>
-          <p:cNvPr id="6" name="S09-cardtext132"/>
+          <p:cNvPr id="6" name="S09-cardtext107"/>
           <p:cNvSpPr txBox="1"/>
           <p:nvPr/>
         </p:nvSpPr>
@@ -22083,7 +20934,7 @@
       </p:sp>
       <p:graphicFrame>
         <p:nvGraphicFramePr>
-          <p:cNvPr id="10" name="S09-table133"/>
+          <p:cNvPr id="10" name="S09-table108"/>
           <p:cNvGraphicFramePr>
             <a:graphicFrameLocks noGrp="1"/>
           </p:cNvGraphicFramePr>

--- a/dist/초2/수학/자료와규칙/초2_수학_자료와규칙_03_무늬와수의규칙.pptx
+++ b/dist/초2/수학/자료와규칙/초2_수학_자료와규칙_03_무늬와수의규칙.pptx
@@ -122,13 +122,13 @@
   <p:extLst>
     <p:ext uri="{521415D9-36F7-43E2-AB2F-B90AF26B5E84}">
       <p14:sectionLst xmlns:p14="http://schemas.microsoft.com/office/powerpoint/2010/main">
-        <p14:section name="도입" id="{2959520e-2d78-55a6-a739-2cf1f8b72f9b}">
+        <p14:section name="도입" id="{d3e15370-790b-66c3-2159-39891b150fa8}">
           <p14:sldIdLst>
             <p14:sldId id="256"/>
             <p14:sldId id="257"/>
           </p14:sldIdLst>
         </p14:section>
-        <p14:section name="개념" id="{111d2fdd-95fa-f7a5-5714-9fd12c1a3a53}">
+        <p14:section name="개념" id="{f1e60722-56c7-50bd-4276-3bb1a93ece3f}">
           <p14:sldIdLst>
             <p14:sldId id="258"/>
             <p14:sldId id="259"/>
@@ -138,32 +138,32 @@
             <p14:sldId id="265"/>
           </p14:sldIdLst>
         </p14:section>
-        <p14:section name="연습" id="{9cde9124-dc20-f9ca-d33d-6f7ea1317081}">
+        <p14:section name="연습" id="{93a785c4-d0d0-321f-c039-ca7cc6327132}">
           <p14:sldIdLst>
             <p14:sldId id="261"/>
             <p14:sldId id="262"/>
             <p14:sldId id="266"/>
           </p14:sldIdLst>
         </p14:section>
-        <p14:section name="개념" id="{61d5971f-b770-56b2-49b4-2e0c133500f0}">
+        <p14:section name="개념" id="{1430b05d-318d-f528-5f48-5841ebd601ec}">
           <p14:sldIdLst/>
         </p14:section>
-        <p14:section name="연습" id="{a251df4b-d239-eb96-da6a-63a4c8b5f3d7}">
+        <p14:section name="연습" id="{3bd8d849-4746-9090-d565-a46b567a9699}">
           <p14:sldIdLst/>
         </p14:section>
-        <p14:section name="확인" id="{b1402200-268b-efe7-6b04-1baa5d4f117e}">
+        <p14:section name="확인" id="{0b919a0c-40c5-7d55-389c-aeef2db6beeb}">
           <p14:sldIdLst>
             <p14:sldId id="267"/>
             <p14:sldId id="268"/>
             <p14:sldId id="269"/>
           </p14:sldIdLst>
         </p14:section>
-        <p14:section name="정리" id="{ae1f5745-00bd-5a69-ced1-51fb7760fb55}">
+        <p14:section name="정리" id="{3a6f6d6d-6e17-795c-b15e-d1d563092b42}">
           <p14:sldIdLst>
             <p14:sldId id="270"/>
           </p14:sldIdLst>
         </p14:section>
-        <p14:section name="보충" id="{a65ebeba-f6fb-9a65-cfeb-b4b18ed1f265}">
+        <p14:section name="보충" id="{b413d31f-6326-d71f-54a2-2b42600109ac}">
           <p14:sldIdLst>
             <p14:sldId id="271"/>
           </p14:sldIdLst>
@@ -3784,7 +3784,7 @@
           </p:nvPr>
         </p:nvGraphicFramePr>
         <p:xfrm>
-          <a:off x="1156716" y="1638300"/>
+          <a:off x="1156716" y="1687830"/>
           <a:ext cx="9875520" cy="914400"/>
         </p:xfrm>
         <a:graphic>
@@ -3799,7 +3799,7 @@
                 <a:gridCol w="1645920"/>
                 <a:gridCol w="1645920"/>
               </a:tblGrid>
-              <a:tr h="528320">
+              <a:tr h="511810">
                 <a:tc>
                   <a:txBody>
                     <a:bodyPr/>
@@ -4209,7 +4209,7 @@
                   </a:tcPr>
                 </a:tc>
               </a:tr>
-              <a:tr h="528320">
+              <a:tr h="511810">
                 <a:tc>
                   <a:txBody>
                     <a:bodyPr/>
@@ -4619,7 +4619,7 @@
                   </a:tcPr>
                 </a:tc>
               </a:tr>
-              <a:tr h="528320">
+              <a:tr h="511810">
                 <a:tc>
                   <a:txBody>
                     <a:bodyPr/>
@@ -5029,7 +5029,7 @@
                   </a:tcPr>
                 </a:tc>
               </a:tr>
-              <a:tr h="528320">
+              <a:tr h="511810">
                 <a:tc>
                   <a:txBody>
                     <a:bodyPr/>
@@ -5439,7 +5439,7 @@
                   </a:tcPr>
                 </a:tc>
               </a:tr>
-              <a:tr h="528320">
+              <a:tr h="511810">
                 <a:tc>
                   <a:txBody>
                     <a:bodyPr/>
@@ -5849,7 +5849,7 @@
                   </a:tcPr>
                 </a:tc>
               </a:tr>
-              <a:tr h="528320">
+              <a:tr h="511810">
                 <a:tc>
                   <a:txBody>
                     <a:bodyPr/>
@@ -6500,7 +6500,7 @@
           </p:nvPr>
         </p:nvGraphicFramePr>
         <p:xfrm>
-          <a:off x="548640" y="2509520"/>
+          <a:off x="548640" y="2542540"/>
           <a:ext cx="5385816" cy="914400"/>
         </p:xfrm>
         <a:graphic>
@@ -6514,7 +6514,7 @@
                 <a:gridCol w="1077163"/>
                 <a:gridCol w="1077163"/>
               </a:tblGrid>
-              <a:tr h="528320">
+              <a:tr h="511810">
                 <a:tc>
                   <a:txBody>
                     <a:bodyPr/>
@@ -6856,7 +6856,7 @@
                   </a:tcPr>
                 </a:tc>
               </a:tr>
-              <a:tr h="528320">
+              <a:tr h="511810">
                 <a:tc>
                   <a:txBody>
                     <a:bodyPr/>
@@ -7198,7 +7198,7 @@
                   </a:tcPr>
                 </a:tc>
               </a:tr>
-              <a:tr h="528320">
+              <a:tr h="511810">
                 <a:tc>
                   <a:txBody>
                     <a:bodyPr/>
@@ -7540,7 +7540,7 @@
                   </a:tcPr>
                 </a:tc>
               </a:tr>
-              <a:tr h="528320">
+              <a:tr h="511810">
                 <a:tc>
                   <a:txBody>
                     <a:bodyPr/>
@@ -7901,7 +7901,7 @@
           </p:nvPr>
         </p:nvGraphicFramePr>
         <p:xfrm>
-          <a:off x="6254496" y="2509520"/>
+          <a:off x="6254496" y="2542540"/>
           <a:ext cx="5385816" cy="914400"/>
         </p:xfrm>
         <a:graphic>
@@ -7915,7 +7915,7 @@
                 <a:gridCol w="1077163"/>
                 <a:gridCol w="1077163"/>
               </a:tblGrid>
-              <a:tr h="528320">
+              <a:tr h="511810">
                 <a:tc>
                   <a:txBody>
                     <a:bodyPr/>
@@ -8257,7 +8257,7 @@
                   </a:tcPr>
                 </a:tc>
               </a:tr>
-              <a:tr h="528320">
+              <a:tr h="511810">
                 <a:tc>
                   <a:txBody>
                     <a:bodyPr/>
@@ -8599,7 +8599,7 @@
                   </a:tcPr>
                 </a:tc>
               </a:tr>
-              <a:tr h="528320">
+              <a:tr h="511810">
                 <a:tc>
                   <a:txBody>
                     <a:bodyPr/>
@@ -8941,7 +8941,7 @@
                   </a:tcPr>
                 </a:tc>
               </a:tr>
-              <a:tr h="528320">
+              <a:tr h="511810">
                 <a:tc>
                   <a:txBody>
                     <a:bodyPr/>
@@ -9892,7 +9892,7 @@
           </p:nvPr>
         </p:nvGraphicFramePr>
         <p:xfrm>
-          <a:off x="6254496" y="2778379"/>
+          <a:off x="6254496" y="2794889"/>
           <a:ext cx="5385816" cy="914400"/>
         </p:xfrm>
         <a:graphic>
@@ -9908,7 +9908,7 @@
                 <a:gridCol w="769402"/>
                 <a:gridCol w="769402"/>
               </a:tblGrid>
-              <a:tr h="528320">
+              <a:tr h="511810">
                 <a:tc>
                   <a:txBody>
                     <a:bodyPr/>
@@ -10386,7 +10386,7 @@
                   </a:tcPr>
                 </a:tc>
               </a:tr>
-              <a:tr h="528320">
+              <a:tr h="511810">
                 <a:tc>
                   <a:txBody>
                     <a:bodyPr/>
@@ -18201,7 +18201,7 @@
           </p:nvPr>
         </p:nvGraphicFramePr>
         <p:xfrm>
-          <a:off x="1156716" y="2103120"/>
+          <a:off x="1156716" y="2030730"/>
           <a:ext cx="9875520" cy="914400"/>
         </p:xfrm>
         <a:graphic>
@@ -18216,2753 +18216,7 @@
                 <a:gridCol w="1645920"/>
                 <a:gridCol w="1645920"/>
               </a:tblGrid>
-              <a:tr h="487680">
-                <a:tc>
-                  <a:txBody>
-                    <a:bodyPr/>
-                    <a:lstStyle/>
-                    <a:p>
-                      <a:pPr eaLnBrk="0" algn="ctr" indent="0" marL="0">
-                        <a:buNone/>
-                      </a:pPr>
-                      <a:r>
-                        <a:rPr lang="en-US" sz="2400" b="1" dirty="0">
-                          <a:solidFill>
-                            <a:srgbClr val="1F2937"/>
-                          </a:solidFill>
-                          <a:latin typeface="맑은 고딕" pitchFamily="34" charset="0"/>
-                          <a:ea typeface="맑은 고딕" pitchFamily="34" charset="-122"/>
-                          <a:cs typeface="맑은 고딕" pitchFamily="34" charset="-120"/>
-                        </a:rPr>
-                        <a:t>+</a:t>
-                      </a:r>
-                      <a:endParaRPr lang="en-US" sz="2400" dirty="0">
-                        <a:latin typeface="맑은 고딕" charset="0"/>
-                        <a:ea typeface="맑은 고딕" charset="0"/>
-                        <a:cs typeface="맑은 고딕" charset="0"/>
-                      </a:endParaRPr>
-                    </a:p>
-                  </a:txBody>
-                  <a:tcPr marL="38100" marR="38100" marT="38100" marB="38100" anchor="ctr">
-                    <a:lnL w="12700" cap="flat" cmpd="sng" algn="ctr">
-                      <a:solidFill>
-                        <a:srgbClr val="94A3B8"/>
-                      </a:solidFill>
-                      <a:prstDash val="solid"/>
-                      <a:round/>
-                      <a:headEnd type="none" w="med" len="med"/>
-                      <a:tailEnd type="none" w="med" len="med"/>
-                    </a:lnL>
-                    <a:lnR w="12700" cap="flat" cmpd="sng" algn="ctr">
-                      <a:solidFill>
-                        <a:srgbClr val="94A3B8"/>
-                      </a:solidFill>
-                      <a:prstDash val="solid"/>
-                      <a:round/>
-                      <a:headEnd type="none" w="med" len="med"/>
-                      <a:tailEnd type="none" w="med" len="med"/>
-                    </a:lnR>
-                    <a:lnT w="12700" cap="flat" cmpd="sng" algn="ctr">
-                      <a:solidFill>
-                        <a:srgbClr val="94A3B8"/>
-                      </a:solidFill>
-                      <a:prstDash val="solid"/>
-                      <a:round/>
-                      <a:headEnd type="none" w="med" len="med"/>
-                      <a:tailEnd type="none" w="med" len="med"/>
-                    </a:lnT>
-                    <a:lnB w="12700" cap="flat" cmpd="sng" algn="ctr">
-                      <a:solidFill>
-                        <a:srgbClr val="94A3B8"/>
-                      </a:solidFill>
-                      <a:prstDash val="solid"/>
-                      <a:round/>
-                      <a:headEnd type="none" w="med" len="med"/>
-                      <a:tailEnd type="none" w="med" len="med"/>
-                    </a:lnB>
-                    <a:solidFill>
-                      <a:srgbClr val="EAF3F1"/>
-                    </a:solidFill>
-                  </a:tcPr>
-                </a:tc>
-                <a:tc>
-                  <a:txBody>
-                    <a:bodyPr/>
-                    <a:lstStyle/>
-                    <a:p>
-                      <a:pPr eaLnBrk="0" algn="ctr" indent="0" marL="0">
-                        <a:buNone/>
-                      </a:pPr>
-                      <a:r>
-                        <a:rPr lang="en-US" sz="2400" b="1" dirty="0">
-                          <a:solidFill>
-                            <a:srgbClr val="1F2937"/>
-                          </a:solidFill>
-                          <a:latin typeface="맑은 고딕" pitchFamily="34" charset="0"/>
-                          <a:ea typeface="맑은 고딕" pitchFamily="34" charset="-122"/>
-                          <a:cs typeface="맑은 고딕" pitchFamily="34" charset="-120"/>
-                        </a:rPr>
-                        <a:t>1</a:t>
-                      </a:r>
-                      <a:endParaRPr lang="en-US" sz="2400" dirty="0">
-                        <a:latin typeface="맑은 고딕" charset="0"/>
-                        <a:ea typeface="맑은 고딕" charset="0"/>
-                        <a:cs typeface="맑은 고딕" charset="0"/>
-                      </a:endParaRPr>
-                    </a:p>
-                  </a:txBody>
-                  <a:tcPr marL="38100" marR="38100" marT="38100" marB="38100" anchor="ctr">
-                    <a:lnL w="12700" cap="flat" cmpd="sng" algn="ctr">
-                      <a:solidFill>
-                        <a:srgbClr val="94A3B8"/>
-                      </a:solidFill>
-                      <a:prstDash val="solid"/>
-                      <a:round/>
-                      <a:headEnd type="none" w="med" len="med"/>
-                      <a:tailEnd type="none" w="med" len="med"/>
-                    </a:lnL>
-                    <a:lnR w="12700" cap="flat" cmpd="sng" algn="ctr">
-                      <a:solidFill>
-                        <a:srgbClr val="94A3B8"/>
-                      </a:solidFill>
-                      <a:prstDash val="solid"/>
-                      <a:round/>
-                      <a:headEnd type="none" w="med" len="med"/>
-                      <a:tailEnd type="none" w="med" len="med"/>
-                    </a:lnR>
-                    <a:lnT w="12700" cap="flat" cmpd="sng" algn="ctr">
-                      <a:solidFill>
-                        <a:srgbClr val="94A3B8"/>
-                      </a:solidFill>
-                      <a:prstDash val="solid"/>
-                      <a:round/>
-                      <a:headEnd type="none" w="med" len="med"/>
-                      <a:tailEnd type="none" w="med" len="med"/>
-                    </a:lnT>
-                    <a:lnB w="12700" cap="flat" cmpd="sng" algn="ctr">
-                      <a:solidFill>
-                        <a:srgbClr val="94A3B8"/>
-                      </a:solidFill>
-                      <a:prstDash val="solid"/>
-                      <a:round/>
-                      <a:headEnd type="none" w="med" len="med"/>
-                      <a:tailEnd type="none" w="med" len="med"/>
-                    </a:lnB>
-                    <a:solidFill>
-                      <a:srgbClr val="EAF3F1"/>
-                    </a:solidFill>
-                  </a:tcPr>
-                </a:tc>
-                <a:tc>
-                  <a:txBody>
-                    <a:bodyPr/>
-                    <a:lstStyle/>
-                    <a:p>
-                      <a:pPr eaLnBrk="0" algn="ctr" indent="0" marL="0">
-                        <a:buNone/>
-                      </a:pPr>
-                      <a:r>
-                        <a:rPr lang="en-US" sz="2400" b="1" dirty="0">
-                          <a:solidFill>
-                            <a:srgbClr val="1F2937"/>
-                          </a:solidFill>
-                          <a:latin typeface="맑은 고딕" pitchFamily="34" charset="0"/>
-                          <a:ea typeface="맑은 고딕" pitchFamily="34" charset="-122"/>
-                          <a:cs typeface="맑은 고딕" pitchFamily="34" charset="-120"/>
-                        </a:rPr>
-                        <a:t>2</a:t>
-                      </a:r>
-                      <a:endParaRPr lang="en-US" sz="2400" dirty="0">
-                        <a:latin typeface="맑은 고딕" charset="0"/>
-                        <a:ea typeface="맑은 고딕" charset="0"/>
-                        <a:cs typeface="맑은 고딕" charset="0"/>
-                      </a:endParaRPr>
-                    </a:p>
-                  </a:txBody>
-                  <a:tcPr marL="38100" marR="38100" marT="38100" marB="38100" anchor="ctr">
-                    <a:lnL w="12700" cap="flat" cmpd="sng" algn="ctr">
-                      <a:solidFill>
-                        <a:srgbClr val="94A3B8"/>
-                      </a:solidFill>
-                      <a:prstDash val="solid"/>
-                      <a:round/>
-                      <a:headEnd type="none" w="med" len="med"/>
-                      <a:tailEnd type="none" w="med" len="med"/>
-                    </a:lnL>
-                    <a:lnR w="12700" cap="flat" cmpd="sng" algn="ctr">
-                      <a:solidFill>
-                        <a:srgbClr val="94A3B8"/>
-                      </a:solidFill>
-                      <a:prstDash val="solid"/>
-                      <a:round/>
-                      <a:headEnd type="none" w="med" len="med"/>
-                      <a:tailEnd type="none" w="med" len="med"/>
-                    </a:lnR>
-                    <a:lnT w="12700" cap="flat" cmpd="sng" algn="ctr">
-                      <a:solidFill>
-                        <a:srgbClr val="94A3B8"/>
-                      </a:solidFill>
-                      <a:prstDash val="solid"/>
-                      <a:round/>
-                      <a:headEnd type="none" w="med" len="med"/>
-                      <a:tailEnd type="none" w="med" len="med"/>
-                    </a:lnT>
-                    <a:lnB w="12700" cap="flat" cmpd="sng" algn="ctr">
-                      <a:solidFill>
-                        <a:srgbClr val="94A3B8"/>
-                      </a:solidFill>
-                      <a:prstDash val="solid"/>
-                      <a:round/>
-                      <a:headEnd type="none" w="med" len="med"/>
-                      <a:tailEnd type="none" w="med" len="med"/>
-                    </a:lnB>
-                    <a:solidFill>
-                      <a:srgbClr val="EAF3F1"/>
-                    </a:solidFill>
-                  </a:tcPr>
-                </a:tc>
-                <a:tc>
-                  <a:txBody>
-                    <a:bodyPr/>
-                    <a:lstStyle/>
-                    <a:p>
-                      <a:pPr eaLnBrk="0" algn="ctr" indent="0" marL="0">
-                        <a:buNone/>
-                      </a:pPr>
-                      <a:r>
-                        <a:rPr lang="en-US" sz="2400" b="1" dirty="0">
-                          <a:solidFill>
-                            <a:srgbClr val="1F2937"/>
-                          </a:solidFill>
-                          <a:latin typeface="맑은 고딕" pitchFamily="34" charset="0"/>
-                          <a:ea typeface="맑은 고딕" pitchFamily="34" charset="-122"/>
-                          <a:cs typeface="맑은 고딕" pitchFamily="34" charset="-120"/>
-                        </a:rPr>
-                        <a:t>3</a:t>
-                      </a:r>
-                      <a:endParaRPr lang="en-US" sz="2400" dirty="0">
-                        <a:latin typeface="맑은 고딕" charset="0"/>
-                        <a:ea typeface="맑은 고딕" charset="0"/>
-                        <a:cs typeface="맑은 고딕" charset="0"/>
-                      </a:endParaRPr>
-                    </a:p>
-                  </a:txBody>
-                  <a:tcPr marL="38100" marR="38100" marT="38100" marB="38100" anchor="ctr">
-                    <a:lnL w="12700" cap="flat" cmpd="sng" algn="ctr">
-                      <a:solidFill>
-                        <a:srgbClr val="94A3B8"/>
-                      </a:solidFill>
-                      <a:prstDash val="solid"/>
-                      <a:round/>
-                      <a:headEnd type="none" w="med" len="med"/>
-                      <a:tailEnd type="none" w="med" len="med"/>
-                    </a:lnL>
-                    <a:lnR w="12700" cap="flat" cmpd="sng" algn="ctr">
-                      <a:solidFill>
-                        <a:srgbClr val="94A3B8"/>
-                      </a:solidFill>
-                      <a:prstDash val="solid"/>
-                      <a:round/>
-                      <a:headEnd type="none" w="med" len="med"/>
-                      <a:tailEnd type="none" w="med" len="med"/>
-                    </a:lnR>
-                    <a:lnT w="12700" cap="flat" cmpd="sng" algn="ctr">
-                      <a:solidFill>
-                        <a:srgbClr val="94A3B8"/>
-                      </a:solidFill>
-                      <a:prstDash val="solid"/>
-                      <a:round/>
-                      <a:headEnd type="none" w="med" len="med"/>
-                      <a:tailEnd type="none" w="med" len="med"/>
-                    </a:lnT>
-                    <a:lnB w="12700" cap="flat" cmpd="sng" algn="ctr">
-                      <a:solidFill>
-                        <a:srgbClr val="94A3B8"/>
-                      </a:solidFill>
-                      <a:prstDash val="solid"/>
-                      <a:round/>
-                      <a:headEnd type="none" w="med" len="med"/>
-                      <a:tailEnd type="none" w="med" len="med"/>
-                    </a:lnB>
-                    <a:solidFill>
-                      <a:srgbClr val="EAF3F1"/>
-                    </a:solidFill>
-                  </a:tcPr>
-                </a:tc>
-                <a:tc>
-                  <a:txBody>
-                    <a:bodyPr/>
-                    <a:lstStyle/>
-                    <a:p>
-                      <a:pPr eaLnBrk="0" algn="ctr" indent="0" marL="0">
-                        <a:buNone/>
-                      </a:pPr>
-                      <a:r>
-                        <a:rPr lang="en-US" sz="2400" b="1" dirty="0">
-                          <a:solidFill>
-                            <a:srgbClr val="1F2937"/>
-                          </a:solidFill>
-                          <a:latin typeface="맑은 고딕" pitchFamily="34" charset="0"/>
-                          <a:ea typeface="맑은 고딕" pitchFamily="34" charset="-122"/>
-                          <a:cs typeface="맑은 고딕" pitchFamily="34" charset="-120"/>
-                        </a:rPr>
-                        <a:t>4</a:t>
-                      </a:r>
-                      <a:endParaRPr lang="en-US" sz="2400" dirty="0">
-                        <a:latin typeface="맑은 고딕" charset="0"/>
-                        <a:ea typeface="맑은 고딕" charset="0"/>
-                        <a:cs typeface="맑은 고딕" charset="0"/>
-                      </a:endParaRPr>
-                    </a:p>
-                  </a:txBody>
-                  <a:tcPr marL="38100" marR="38100" marT="38100" marB="38100" anchor="ctr">
-                    <a:lnL w="12700" cap="flat" cmpd="sng" algn="ctr">
-                      <a:solidFill>
-                        <a:srgbClr val="94A3B8"/>
-                      </a:solidFill>
-                      <a:prstDash val="solid"/>
-                      <a:round/>
-                      <a:headEnd type="none" w="med" len="med"/>
-                      <a:tailEnd type="none" w="med" len="med"/>
-                    </a:lnL>
-                    <a:lnR w="12700" cap="flat" cmpd="sng" algn="ctr">
-                      <a:solidFill>
-                        <a:srgbClr val="94A3B8"/>
-                      </a:solidFill>
-                      <a:prstDash val="solid"/>
-                      <a:round/>
-                      <a:headEnd type="none" w="med" len="med"/>
-                      <a:tailEnd type="none" w="med" len="med"/>
-                    </a:lnR>
-                    <a:lnT w="12700" cap="flat" cmpd="sng" algn="ctr">
-                      <a:solidFill>
-                        <a:srgbClr val="94A3B8"/>
-                      </a:solidFill>
-                      <a:prstDash val="solid"/>
-                      <a:round/>
-                      <a:headEnd type="none" w="med" len="med"/>
-                      <a:tailEnd type="none" w="med" len="med"/>
-                    </a:lnT>
-                    <a:lnB w="12700" cap="flat" cmpd="sng" algn="ctr">
-                      <a:solidFill>
-                        <a:srgbClr val="94A3B8"/>
-                      </a:solidFill>
-                      <a:prstDash val="solid"/>
-                      <a:round/>
-                      <a:headEnd type="none" w="med" len="med"/>
-                      <a:tailEnd type="none" w="med" len="med"/>
-                    </a:lnB>
-                    <a:solidFill>
-                      <a:srgbClr val="EAF3F1"/>
-                    </a:solidFill>
-                  </a:tcPr>
-                </a:tc>
-                <a:tc>
-                  <a:txBody>
-                    <a:bodyPr/>
-                    <a:lstStyle/>
-                    <a:p>
-                      <a:pPr eaLnBrk="0" algn="ctr" indent="0" marL="0">
-                        <a:buNone/>
-                      </a:pPr>
-                      <a:r>
-                        <a:rPr lang="en-US" sz="2400" b="1" dirty="0">
-                          <a:solidFill>
-                            <a:srgbClr val="1F2937"/>
-                          </a:solidFill>
-                          <a:latin typeface="맑은 고딕" pitchFamily="34" charset="0"/>
-                          <a:ea typeface="맑은 고딕" pitchFamily="34" charset="-122"/>
-                          <a:cs typeface="맑은 고딕" pitchFamily="34" charset="-120"/>
-                        </a:rPr>
-                        <a:t>5</a:t>
-                      </a:r>
-                      <a:endParaRPr lang="en-US" sz="2400" dirty="0">
-                        <a:latin typeface="맑은 고딕" charset="0"/>
-                        <a:ea typeface="맑은 고딕" charset="0"/>
-                        <a:cs typeface="맑은 고딕" charset="0"/>
-                      </a:endParaRPr>
-                    </a:p>
-                  </a:txBody>
-                  <a:tcPr marL="38100" marR="38100" marT="38100" marB="38100" anchor="ctr">
-                    <a:lnL w="12700" cap="flat" cmpd="sng" algn="ctr">
-                      <a:solidFill>
-                        <a:srgbClr val="94A3B8"/>
-                      </a:solidFill>
-                      <a:prstDash val="solid"/>
-                      <a:round/>
-                      <a:headEnd type="none" w="med" len="med"/>
-                      <a:tailEnd type="none" w="med" len="med"/>
-                    </a:lnL>
-                    <a:lnR w="12700" cap="flat" cmpd="sng" algn="ctr">
-                      <a:solidFill>
-                        <a:srgbClr val="94A3B8"/>
-                      </a:solidFill>
-                      <a:prstDash val="solid"/>
-                      <a:round/>
-                      <a:headEnd type="none" w="med" len="med"/>
-                      <a:tailEnd type="none" w="med" len="med"/>
-                    </a:lnR>
-                    <a:lnT w="12700" cap="flat" cmpd="sng" algn="ctr">
-                      <a:solidFill>
-                        <a:srgbClr val="94A3B8"/>
-                      </a:solidFill>
-                      <a:prstDash val="solid"/>
-                      <a:round/>
-                      <a:headEnd type="none" w="med" len="med"/>
-                      <a:tailEnd type="none" w="med" len="med"/>
-                    </a:lnT>
-                    <a:lnB w="12700" cap="flat" cmpd="sng" algn="ctr">
-                      <a:solidFill>
-                        <a:srgbClr val="94A3B8"/>
-                      </a:solidFill>
-                      <a:prstDash val="solid"/>
-                      <a:round/>
-                      <a:headEnd type="none" w="med" len="med"/>
-                      <a:tailEnd type="none" w="med" len="med"/>
-                    </a:lnB>
-                    <a:solidFill>
-                      <a:srgbClr val="EAF3F1"/>
-                    </a:solidFill>
-                  </a:tcPr>
-                </a:tc>
-              </a:tr>
-              <a:tr h="487680">
-                <a:tc>
-                  <a:txBody>
-                    <a:bodyPr/>
-                    <a:lstStyle/>
-                    <a:p>
-                      <a:pPr eaLnBrk="0" algn="ctr" indent="0" marL="0">
-                        <a:buNone/>
-                      </a:pPr>
-                      <a:r>
-                        <a:rPr lang="en-US" sz="2400" b="1" dirty="0">
-                          <a:solidFill>
-                            <a:srgbClr val="1F2937"/>
-                          </a:solidFill>
-                          <a:latin typeface="맑은 고딕" pitchFamily="34" charset="0"/>
-                          <a:ea typeface="맑은 고딕" pitchFamily="34" charset="-122"/>
-                          <a:cs typeface="맑은 고딕" pitchFamily="34" charset="-120"/>
-                        </a:rPr>
-                        <a:t>1</a:t>
-                      </a:r>
-                      <a:endParaRPr lang="en-US" sz="2400" dirty="0">
-                        <a:latin typeface="맑은 고딕" charset="0"/>
-                        <a:ea typeface="맑은 고딕" charset="0"/>
-                        <a:cs typeface="맑은 고딕" charset="0"/>
-                      </a:endParaRPr>
-                    </a:p>
-                  </a:txBody>
-                  <a:tcPr marL="38100" marR="38100" marT="38100" marB="38100" anchor="ctr">
-                    <a:lnL w="12700" cap="flat" cmpd="sng" algn="ctr">
-                      <a:solidFill>
-                        <a:srgbClr val="94A3B8"/>
-                      </a:solidFill>
-                      <a:prstDash val="solid"/>
-                      <a:round/>
-                      <a:headEnd type="none" w="med" len="med"/>
-                      <a:tailEnd type="none" w="med" len="med"/>
-                    </a:lnL>
-                    <a:lnR w="12700" cap="flat" cmpd="sng" algn="ctr">
-                      <a:solidFill>
-                        <a:srgbClr val="94A3B8"/>
-                      </a:solidFill>
-                      <a:prstDash val="solid"/>
-                      <a:round/>
-                      <a:headEnd type="none" w="med" len="med"/>
-                      <a:tailEnd type="none" w="med" len="med"/>
-                    </a:lnR>
-                    <a:lnT w="12700" cap="flat" cmpd="sng" algn="ctr">
-                      <a:solidFill>
-                        <a:srgbClr val="94A3B8"/>
-                      </a:solidFill>
-                      <a:prstDash val="solid"/>
-                      <a:round/>
-                      <a:headEnd type="none" w="med" len="med"/>
-                      <a:tailEnd type="none" w="med" len="med"/>
-                    </a:lnT>
-                    <a:lnB w="12700" cap="flat" cmpd="sng" algn="ctr">
-                      <a:solidFill>
-                        <a:srgbClr val="94A3B8"/>
-                      </a:solidFill>
-                      <a:prstDash val="solid"/>
-                      <a:round/>
-                      <a:headEnd type="none" w="med" len="med"/>
-                      <a:tailEnd type="none" w="med" len="med"/>
-                    </a:lnB>
-                    <a:solidFill>
-                      <a:srgbClr val="EAF3F1"/>
-                    </a:solidFill>
-                  </a:tcPr>
-                </a:tc>
-                <a:tc>
-                  <a:txBody>
-                    <a:bodyPr/>
-                    <a:lstStyle/>
-                    <a:p>
-                      <a:pPr eaLnBrk="0" algn="ctr" indent="0" marL="0">
-                        <a:buNone/>
-                      </a:pPr>
-                      <a:r>
-                        <a:rPr lang="en-US" sz="2400" dirty="0">
-                          <a:solidFill>
-                            <a:srgbClr val="1F2937"/>
-                          </a:solidFill>
-                          <a:latin typeface="맑은 고딕" pitchFamily="34" charset="0"/>
-                          <a:ea typeface="맑은 고딕" pitchFamily="34" charset="-122"/>
-                          <a:cs typeface="맑은 고딕" pitchFamily="34" charset="-120"/>
-                        </a:rPr>
-                        <a:t>2</a:t>
-                      </a:r>
-                      <a:endParaRPr lang="en-US" sz="2400" dirty="0">
-                        <a:latin typeface="맑은 고딕" charset="0"/>
-                        <a:ea typeface="맑은 고딕" charset="0"/>
-                        <a:cs typeface="맑은 고딕" charset="0"/>
-                      </a:endParaRPr>
-                    </a:p>
-                  </a:txBody>
-                  <a:tcPr marL="38100" marR="38100" marT="38100" marB="38100" anchor="ctr">
-                    <a:lnL w="12700" cap="flat" cmpd="sng" algn="ctr">
-                      <a:solidFill>
-                        <a:srgbClr val="94A3B8"/>
-                      </a:solidFill>
-                      <a:prstDash val="solid"/>
-                      <a:round/>
-                      <a:headEnd type="none" w="med" len="med"/>
-                      <a:tailEnd type="none" w="med" len="med"/>
-                    </a:lnL>
-                    <a:lnR w="12700" cap="flat" cmpd="sng" algn="ctr">
-                      <a:solidFill>
-                        <a:srgbClr val="94A3B8"/>
-                      </a:solidFill>
-                      <a:prstDash val="solid"/>
-                      <a:round/>
-                      <a:headEnd type="none" w="med" len="med"/>
-                      <a:tailEnd type="none" w="med" len="med"/>
-                    </a:lnR>
-                    <a:lnT w="12700" cap="flat" cmpd="sng" algn="ctr">
-                      <a:solidFill>
-                        <a:srgbClr val="94A3B8"/>
-                      </a:solidFill>
-                      <a:prstDash val="solid"/>
-                      <a:round/>
-                      <a:headEnd type="none" w="med" len="med"/>
-                      <a:tailEnd type="none" w="med" len="med"/>
-                    </a:lnT>
-                    <a:lnB w="12700" cap="flat" cmpd="sng" algn="ctr">
-                      <a:solidFill>
-                        <a:srgbClr val="94A3B8"/>
-                      </a:solidFill>
-                      <a:prstDash val="solid"/>
-                      <a:round/>
-                      <a:headEnd type="none" w="med" len="med"/>
-                      <a:tailEnd type="none" w="med" len="med"/>
-                    </a:lnB>
-                    <a:solidFill>
-                      <a:srgbClr val="FFFFFF"/>
-                    </a:solidFill>
-                  </a:tcPr>
-                </a:tc>
-                <a:tc>
-                  <a:txBody>
-                    <a:bodyPr/>
-                    <a:lstStyle/>
-                    <a:p>
-                      <a:pPr eaLnBrk="0" algn="ctr" indent="0" marL="0">
-                        <a:buNone/>
-                      </a:pPr>
-                      <a:r>
-                        <a:rPr lang="en-US" sz="2400" dirty="0">
-                          <a:solidFill>
-                            <a:srgbClr val="1F2937"/>
-                          </a:solidFill>
-                          <a:latin typeface="맑은 고딕" pitchFamily="34" charset="0"/>
-                          <a:ea typeface="맑은 고딕" pitchFamily="34" charset="-122"/>
-                          <a:cs typeface="맑은 고딕" pitchFamily="34" charset="-120"/>
-                        </a:rPr>
-                        <a:t>3</a:t>
-                      </a:r>
-                      <a:endParaRPr lang="en-US" sz="2400" dirty="0">
-                        <a:latin typeface="맑은 고딕" charset="0"/>
-                        <a:ea typeface="맑은 고딕" charset="0"/>
-                        <a:cs typeface="맑은 고딕" charset="0"/>
-                      </a:endParaRPr>
-                    </a:p>
-                  </a:txBody>
-                  <a:tcPr marL="38100" marR="38100" marT="38100" marB="38100" anchor="ctr">
-                    <a:lnL w="12700" cap="flat" cmpd="sng" algn="ctr">
-                      <a:solidFill>
-                        <a:srgbClr val="94A3B8"/>
-                      </a:solidFill>
-                      <a:prstDash val="solid"/>
-                      <a:round/>
-                      <a:headEnd type="none" w="med" len="med"/>
-                      <a:tailEnd type="none" w="med" len="med"/>
-                    </a:lnL>
-                    <a:lnR w="12700" cap="flat" cmpd="sng" algn="ctr">
-                      <a:solidFill>
-                        <a:srgbClr val="94A3B8"/>
-                      </a:solidFill>
-                      <a:prstDash val="solid"/>
-                      <a:round/>
-                      <a:headEnd type="none" w="med" len="med"/>
-                      <a:tailEnd type="none" w="med" len="med"/>
-                    </a:lnR>
-                    <a:lnT w="12700" cap="flat" cmpd="sng" algn="ctr">
-                      <a:solidFill>
-                        <a:srgbClr val="94A3B8"/>
-                      </a:solidFill>
-                      <a:prstDash val="solid"/>
-                      <a:round/>
-                      <a:headEnd type="none" w="med" len="med"/>
-                      <a:tailEnd type="none" w="med" len="med"/>
-                    </a:lnT>
-                    <a:lnB w="12700" cap="flat" cmpd="sng" algn="ctr">
-                      <a:solidFill>
-                        <a:srgbClr val="94A3B8"/>
-                      </a:solidFill>
-                      <a:prstDash val="solid"/>
-                      <a:round/>
-                      <a:headEnd type="none" w="med" len="med"/>
-                      <a:tailEnd type="none" w="med" len="med"/>
-                    </a:lnB>
-                    <a:solidFill>
-                      <a:srgbClr val="FFFFFF"/>
-                    </a:solidFill>
-                  </a:tcPr>
-                </a:tc>
-                <a:tc>
-                  <a:txBody>
-                    <a:bodyPr/>
-                    <a:lstStyle/>
-                    <a:p>
-                      <a:pPr eaLnBrk="0" algn="ctr" indent="0" marL="0">
-                        <a:buNone/>
-                      </a:pPr>
-                      <a:r>
-                        <a:rPr lang="en-US" sz="2400" dirty="0">
-                          <a:solidFill>
-                            <a:srgbClr val="1F2937"/>
-                          </a:solidFill>
-                          <a:latin typeface="맑은 고딕" pitchFamily="34" charset="0"/>
-                          <a:ea typeface="맑은 고딕" pitchFamily="34" charset="-122"/>
-                          <a:cs typeface="맑은 고딕" pitchFamily="34" charset="-120"/>
-                        </a:rPr>
-                        <a:t>4</a:t>
-                      </a:r>
-                      <a:endParaRPr lang="en-US" sz="2400" dirty="0">
-                        <a:latin typeface="맑은 고딕" charset="0"/>
-                        <a:ea typeface="맑은 고딕" charset="0"/>
-                        <a:cs typeface="맑은 고딕" charset="0"/>
-                      </a:endParaRPr>
-                    </a:p>
-                  </a:txBody>
-                  <a:tcPr marL="38100" marR="38100" marT="38100" marB="38100" anchor="ctr">
-                    <a:lnL w="12700" cap="flat" cmpd="sng" algn="ctr">
-                      <a:solidFill>
-                        <a:srgbClr val="94A3B8"/>
-                      </a:solidFill>
-                      <a:prstDash val="solid"/>
-                      <a:round/>
-                      <a:headEnd type="none" w="med" len="med"/>
-                      <a:tailEnd type="none" w="med" len="med"/>
-                    </a:lnL>
-                    <a:lnR w="12700" cap="flat" cmpd="sng" algn="ctr">
-                      <a:solidFill>
-                        <a:srgbClr val="94A3B8"/>
-                      </a:solidFill>
-                      <a:prstDash val="solid"/>
-                      <a:round/>
-                      <a:headEnd type="none" w="med" len="med"/>
-                      <a:tailEnd type="none" w="med" len="med"/>
-                    </a:lnR>
-                    <a:lnT w="12700" cap="flat" cmpd="sng" algn="ctr">
-                      <a:solidFill>
-                        <a:srgbClr val="94A3B8"/>
-                      </a:solidFill>
-                      <a:prstDash val="solid"/>
-                      <a:round/>
-                      <a:headEnd type="none" w="med" len="med"/>
-                      <a:tailEnd type="none" w="med" len="med"/>
-                    </a:lnT>
-                    <a:lnB w="12700" cap="flat" cmpd="sng" algn="ctr">
-                      <a:solidFill>
-                        <a:srgbClr val="94A3B8"/>
-                      </a:solidFill>
-                      <a:prstDash val="solid"/>
-                      <a:round/>
-                      <a:headEnd type="none" w="med" len="med"/>
-                      <a:tailEnd type="none" w="med" len="med"/>
-                    </a:lnB>
-                    <a:solidFill>
-                      <a:srgbClr val="FFFFFF"/>
-                    </a:solidFill>
-                  </a:tcPr>
-                </a:tc>
-                <a:tc>
-                  <a:txBody>
-                    <a:bodyPr/>
-                    <a:lstStyle/>
-                    <a:p>
-                      <a:pPr eaLnBrk="0" algn="ctr" indent="0" marL="0">
-                        <a:buNone/>
-                      </a:pPr>
-                      <a:r>
-                        <a:rPr lang="en-US" sz="2400" dirty="0">
-                          <a:solidFill>
-                            <a:srgbClr val="1F2937"/>
-                          </a:solidFill>
-                          <a:latin typeface="맑은 고딕" pitchFamily="34" charset="0"/>
-                          <a:ea typeface="맑은 고딕" pitchFamily="34" charset="-122"/>
-                          <a:cs typeface="맑은 고딕" pitchFamily="34" charset="-120"/>
-                        </a:rPr>
-                        <a:t>5</a:t>
-                      </a:r>
-                      <a:endParaRPr lang="en-US" sz="2400" dirty="0">
-                        <a:latin typeface="맑은 고딕" charset="0"/>
-                        <a:ea typeface="맑은 고딕" charset="0"/>
-                        <a:cs typeface="맑은 고딕" charset="0"/>
-                      </a:endParaRPr>
-                    </a:p>
-                  </a:txBody>
-                  <a:tcPr marL="38100" marR="38100" marT="38100" marB="38100" anchor="ctr">
-                    <a:lnL w="12700" cap="flat" cmpd="sng" algn="ctr">
-                      <a:solidFill>
-                        <a:srgbClr val="94A3B8"/>
-                      </a:solidFill>
-                      <a:prstDash val="solid"/>
-                      <a:round/>
-                      <a:headEnd type="none" w="med" len="med"/>
-                      <a:tailEnd type="none" w="med" len="med"/>
-                    </a:lnL>
-                    <a:lnR w="12700" cap="flat" cmpd="sng" algn="ctr">
-                      <a:solidFill>
-                        <a:srgbClr val="94A3B8"/>
-                      </a:solidFill>
-                      <a:prstDash val="solid"/>
-                      <a:round/>
-                      <a:headEnd type="none" w="med" len="med"/>
-                      <a:tailEnd type="none" w="med" len="med"/>
-                    </a:lnR>
-                    <a:lnT w="12700" cap="flat" cmpd="sng" algn="ctr">
-                      <a:solidFill>
-                        <a:srgbClr val="94A3B8"/>
-                      </a:solidFill>
-                      <a:prstDash val="solid"/>
-                      <a:round/>
-                      <a:headEnd type="none" w="med" len="med"/>
-                      <a:tailEnd type="none" w="med" len="med"/>
-                    </a:lnT>
-                    <a:lnB w="12700" cap="flat" cmpd="sng" algn="ctr">
-                      <a:solidFill>
-                        <a:srgbClr val="94A3B8"/>
-                      </a:solidFill>
-                      <a:prstDash val="solid"/>
-                      <a:round/>
-                      <a:headEnd type="none" w="med" len="med"/>
-                      <a:tailEnd type="none" w="med" len="med"/>
-                    </a:lnB>
-                    <a:solidFill>
-                      <a:srgbClr val="FFFFFF"/>
-                    </a:solidFill>
-                  </a:tcPr>
-                </a:tc>
-                <a:tc>
-                  <a:txBody>
-                    <a:bodyPr/>
-                    <a:lstStyle/>
-                    <a:p>
-                      <a:pPr eaLnBrk="0" algn="ctr" indent="0" marL="0">
-                        <a:buNone/>
-                      </a:pPr>
-                      <a:r>
-                        <a:rPr lang="en-US" sz="2400" dirty="0">
-                          <a:solidFill>
-                            <a:srgbClr val="1F2937"/>
-                          </a:solidFill>
-                          <a:latin typeface="맑은 고딕" pitchFamily="34" charset="0"/>
-                          <a:ea typeface="맑은 고딕" pitchFamily="34" charset="-122"/>
-                          <a:cs typeface="맑은 고딕" pitchFamily="34" charset="-120"/>
-                        </a:rPr>
-                        <a:t>6</a:t>
-                      </a:r>
-                      <a:endParaRPr lang="en-US" sz="2400" dirty="0">
-                        <a:latin typeface="맑은 고딕" charset="0"/>
-                        <a:ea typeface="맑은 고딕" charset="0"/>
-                        <a:cs typeface="맑은 고딕" charset="0"/>
-                      </a:endParaRPr>
-                    </a:p>
-                  </a:txBody>
-                  <a:tcPr marL="38100" marR="38100" marT="38100" marB="38100" anchor="ctr">
-                    <a:lnL w="12700" cap="flat" cmpd="sng" algn="ctr">
-                      <a:solidFill>
-                        <a:srgbClr val="94A3B8"/>
-                      </a:solidFill>
-                      <a:prstDash val="solid"/>
-                      <a:round/>
-                      <a:headEnd type="none" w="med" len="med"/>
-                      <a:tailEnd type="none" w="med" len="med"/>
-                    </a:lnL>
-                    <a:lnR w="12700" cap="flat" cmpd="sng" algn="ctr">
-                      <a:solidFill>
-                        <a:srgbClr val="94A3B8"/>
-                      </a:solidFill>
-                      <a:prstDash val="solid"/>
-                      <a:round/>
-                      <a:headEnd type="none" w="med" len="med"/>
-                      <a:tailEnd type="none" w="med" len="med"/>
-                    </a:lnR>
-                    <a:lnT w="12700" cap="flat" cmpd="sng" algn="ctr">
-                      <a:solidFill>
-                        <a:srgbClr val="94A3B8"/>
-                      </a:solidFill>
-                      <a:prstDash val="solid"/>
-                      <a:round/>
-                      <a:headEnd type="none" w="med" len="med"/>
-                      <a:tailEnd type="none" w="med" len="med"/>
-                    </a:lnT>
-                    <a:lnB w="12700" cap="flat" cmpd="sng" algn="ctr">
-                      <a:solidFill>
-                        <a:srgbClr val="94A3B8"/>
-                      </a:solidFill>
-                      <a:prstDash val="solid"/>
-                      <a:round/>
-                      <a:headEnd type="none" w="med" len="med"/>
-                      <a:tailEnd type="none" w="med" len="med"/>
-                    </a:lnB>
-                    <a:solidFill>
-                      <a:srgbClr val="FFFFFF"/>
-                    </a:solidFill>
-                  </a:tcPr>
-                </a:tc>
-              </a:tr>
-              <a:tr h="487680">
-                <a:tc>
-                  <a:txBody>
-                    <a:bodyPr/>
-                    <a:lstStyle/>
-                    <a:p>
-                      <a:pPr eaLnBrk="0" algn="ctr" indent="0" marL="0">
-                        <a:buNone/>
-                      </a:pPr>
-                      <a:r>
-                        <a:rPr lang="en-US" sz="2400" b="1" dirty="0">
-                          <a:solidFill>
-                            <a:srgbClr val="1F2937"/>
-                          </a:solidFill>
-                          <a:latin typeface="맑은 고딕" pitchFamily="34" charset="0"/>
-                          <a:ea typeface="맑은 고딕" pitchFamily="34" charset="-122"/>
-                          <a:cs typeface="맑은 고딕" pitchFamily="34" charset="-120"/>
-                        </a:rPr>
-                        <a:t>2</a:t>
-                      </a:r>
-                      <a:endParaRPr lang="en-US" sz="2400" dirty="0">
-                        <a:latin typeface="맑은 고딕" charset="0"/>
-                        <a:ea typeface="맑은 고딕" charset="0"/>
-                        <a:cs typeface="맑은 고딕" charset="0"/>
-                      </a:endParaRPr>
-                    </a:p>
-                  </a:txBody>
-                  <a:tcPr marL="38100" marR="38100" marT="38100" marB="38100" anchor="ctr">
-                    <a:lnL w="12700" cap="flat" cmpd="sng" algn="ctr">
-                      <a:solidFill>
-                        <a:srgbClr val="94A3B8"/>
-                      </a:solidFill>
-                      <a:prstDash val="solid"/>
-                      <a:round/>
-                      <a:headEnd type="none" w="med" len="med"/>
-                      <a:tailEnd type="none" w="med" len="med"/>
-                    </a:lnL>
-                    <a:lnR w="12700" cap="flat" cmpd="sng" algn="ctr">
-                      <a:solidFill>
-                        <a:srgbClr val="94A3B8"/>
-                      </a:solidFill>
-                      <a:prstDash val="solid"/>
-                      <a:round/>
-                      <a:headEnd type="none" w="med" len="med"/>
-                      <a:tailEnd type="none" w="med" len="med"/>
-                    </a:lnR>
-                    <a:lnT w="12700" cap="flat" cmpd="sng" algn="ctr">
-                      <a:solidFill>
-                        <a:srgbClr val="94A3B8"/>
-                      </a:solidFill>
-                      <a:prstDash val="solid"/>
-                      <a:round/>
-                      <a:headEnd type="none" w="med" len="med"/>
-                      <a:tailEnd type="none" w="med" len="med"/>
-                    </a:lnT>
-                    <a:lnB w="12700" cap="flat" cmpd="sng" algn="ctr">
-                      <a:solidFill>
-                        <a:srgbClr val="94A3B8"/>
-                      </a:solidFill>
-                      <a:prstDash val="solid"/>
-                      <a:round/>
-                      <a:headEnd type="none" w="med" len="med"/>
-                      <a:tailEnd type="none" w="med" len="med"/>
-                    </a:lnB>
-                    <a:solidFill>
-                      <a:srgbClr val="EAF3F1"/>
-                    </a:solidFill>
-                  </a:tcPr>
-                </a:tc>
-                <a:tc>
-                  <a:txBody>
-                    <a:bodyPr/>
-                    <a:lstStyle/>
-                    <a:p>
-                      <a:pPr eaLnBrk="0" algn="ctr" indent="0" marL="0">
-                        <a:buNone/>
-                      </a:pPr>
-                      <a:r>
-                        <a:rPr lang="en-US" sz="2400" dirty="0">
-                          <a:solidFill>
-                            <a:srgbClr val="1F2937"/>
-                          </a:solidFill>
-                          <a:latin typeface="맑은 고딕" pitchFamily="34" charset="0"/>
-                          <a:ea typeface="맑은 고딕" pitchFamily="34" charset="-122"/>
-                          <a:cs typeface="맑은 고딕" pitchFamily="34" charset="-120"/>
-                        </a:rPr>
-                        <a:t>3</a:t>
-                      </a:r>
-                      <a:endParaRPr lang="en-US" sz="2400" dirty="0">
-                        <a:latin typeface="맑은 고딕" charset="0"/>
-                        <a:ea typeface="맑은 고딕" charset="0"/>
-                        <a:cs typeface="맑은 고딕" charset="0"/>
-                      </a:endParaRPr>
-                    </a:p>
-                  </a:txBody>
-                  <a:tcPr marL="38100" marR="38100" marT="38100" marB="38100" anchor="ctr">
-                    <a:lnL w="12700" cap="flat" cmpd="sng" algn="ctr">
-                      <a:solidFill>
-                        <a:srgbClr val="94A3B8"/>
-                      </a:solidFill>
-                      <a:prstDash val="solid"/>
-                      <a:round/>
-                      <a:headEnd type="none" w="med" len="med"/>
-                      <a:tailEnd type="none" w="med" len="med"/>
-                    </a:lnL>
-                    <a:lnR w="12700" cap="flat" cmpd="sng" algn="ctr">
-                      <a:solidFill>
-                        <a:srgbClr val="94A3B8"/>
-                      </a:solidFill>
-                      <a:prstDash val="solid"/>
-                      <a:round/>
-                      <a:headEnd type="none" w="med" len="med"/>
-                      <a:tailEnd type="none" w="med" len="med"/>
-                    </a:lnR>
-                    <a:lnT w="12700" cap="flat" cmpd="sng" algn="ctr">
-                      <a:solidFill>
-                        <a:srgbClr val="94A3B8"/>
-                      </a:solidFill>
-                      <a:prstDash val="solid"/>
-                      <a:round/>
-                      <a:headEnd type="none" w="med" len="med"/>
-                      <a:tailEnd type="none" w="med" len="med"/>
-                    </a:lnT>
-                    <a:lnB w="12700" cap="flat" cmpd="sng" algn="ctr">
-                      <a:solidFill>
-                        <a:srgbClr val="94A3B8"/>
-                      </a:solidFill>
-                      <a:prstDash val="solid"/>
-                      <a:round/>
-                      <a:headEnd type="none" w="med" len="med"/>
-                      <a:tailEnd type="none" w="med" len="med"/>
-                    </a:lnB>
-                    <a:solidFill>
-                      <a:srgbClr val="FFFFFF"/>
-                    </a:solidFill>
-                  </a:tcPr>
-                </a:tc>
-                <a:tc>
-                  <a:txBody>
-                    <a:bodyPr/>
-                    <a:lstStyle/>
-                    <a:p>
-                      <a:pPr eaLnBrk="0" algn="ctr" indent="0" marL="0">
-                        <a:buNone/>
-                      </a:pPr>
-                      <a:r>
-                        <a:rPr lang="en-US" sz="2400" dirty="0">
-                          <a:solidFill>
-                            <a:srgbClr val="1F2937"/>
-                          </a:solidFill>
-                          <a:latin typeface="맑은 고딕" pitchFamily="34" charset="0"/>
-                          <a:ea typeface="맑은 고딕" pitchFamily="34" charset="-122"/>
-                          <a:cs typeface="맑은 고딕" pitchFamily="34" charset="-120"/>
-                        </a:rPr>
-                        <a:t>4</a:t>
-                      </a:r>
-                      <a:endParaRPr lang="en-US" sz="2400" dirty="0">
-                        <a:latin typeface="맑은 고딕" charset="0"/>
-                        <a:ea typeface="맑은 고딕" charset="0"/>
-                        <a:cs typeface="맑은 고딕" charset="0"/>
-                      </a:endParaRPr>
-                    </a:p>
-                  </a:txBody>
-                  <a:tcPr marL="38100" marR="38100" marT="38100" marB="38100" anchor="ctr">
-                    <a:lnL w="12700" cap="flat" cmpd="sng" algn="ctr">
-                      <a:solidFill>
-                        <a:srgbClr val="94A3B8"/>
-                      </a:solidFill>
-                      <a:prstDash val="solid"/>
-                      <a:round/>
-                      <a:headEnd type="none" w="med" len="med"/>
-                      <a:tailEnd type="none" w="med" len="med"/>
-                    </a:lnL>
-                    <a:lnR w="12700" cap="flat" cmpd="sng" algn="ctr">
-                      <a:solidFill>
-                        <a:srgbClr val="94A3B8"/>
-                      </a:solidFill>
-                      <a:prstDash val="solid"/>
-                      <a:round/>
-                      <a:headEnd type="none" w="med" len="med"/>
-                      <a:tailEnd type="none" w="med" len="med"/>
-                    </a:lnR>
-                    <a:lnT w="12700" cap="flat" cmpd="sng" algn="ctr">
-                      <a:solidFill>
-                        <a:srgbClr val="94A3B8"/>
-                      </a:solidFill>
-                      <a:prstDash val="solid"/>
-                      <a:round/>
-                      <a:headEnd type="none" w="med" len="med"/>
-                      <a:tailEnd type="none" w="med" len="med"/>
-                    </a:lnT>
-                    <a:lnB w="12700" cap="flat" cmpd="sng" algn="ctr">
-                      <a:solidFill>
-                        <a:srgbClr val="94A3B8"/>
-                      </a:solidFill>
-                      <a:prstDash val="solid"/>
-                      <a:round/>
-                      <a:headEnd type="none" w="med" len="med"/>
-                      <a:tailEnd type="none" w="med" len="med"/>
-                    </a:lnB>
-                    <a:solidFill>
-                      <a:srgbClr val="FFFFFF"/>
-                    </a:solidFill>
-                  </a:tcPr>
-                </a:tc>
-                <a:tc>
-                  <a:txBody>
-                    <a:bodyPr/>
-                    <a:lstStyle/>
-                    <a:p>
-                      <a:pPr eaLnBrk="0" algn="ctr" indent="0" marL="0">
-                        <a:buNone/>
-                      </a:pPr>
-                      <a:r>
-                        <a:rPr lang="en-US" sz="2400" dirty="0">
-                          <a:solidFill>
-                            <a:srgbClr val="1F2937"/>
-                          </a:solidFill>
-                          <a:latin typeface="맑은 고딕" pitchFamily="34" charset="0"/>
-                          <a:ea typeface="맑은 고딕" pitchFamily="34" charset="-122"/>
-                          <a:cs typeface="맑은 고딕" pitchFamily="34" charset="-120"/>
-                        </a:rPr>
-                        <a:t>5</a:t>
-                      </a:r>
-                      <a:endParaRPr lang="en-US" sz="2400" dirty="0">
-                        <a:latin typeface="맑은 고딕" charset="0"/>
-                        <a:ea typeface="맑은 고딕" charset="0"/>
-                        <a:cs typeface="맑은 고딕" charset="0"/>
-                      </a:endParaRPr>
-                    </a:p>
-                  </a:txBody>
-                  <a:tcPr marL="38100" marR="38100" marT="38100" marB="38100" anchor="ctr">
-                    <a:lnL w="12700" cap="flat" cmpd="sng" algn="ctr">
-                      <a:solidFill>
-                        <a:srgbClr val="94A3B8"/>
-                      </a:solidFill>
-                      <a:prstDash val="solid"/>
-                      <a:round/>
-                      <a:headEnd type="none" w="med" len="med"/>
-                      <a:tailEnd type="none" w="med" len="med"/>
-                    </a:lnL>
-                    <a:lnR w="12700" cap="flat" cmpd="sng" algn="ctr">
-                      <a:solidFill>
-                        <a:srgbClr val="94A3B8"/>
-                      </a:solidFill>
-                      <a:prstDash val="solid"/>
-                      <a:round/>
-                      <a:headEnd type="none" w="med" len="med"/>
-                      <a:tailEnd type="none" w="med" len="med"/>
-                    </a:lnR>
-                    <a:lnT w="12700" cap="flat" cmpd="sng" algn="ctr">
-                      <a:solidFill>
-                        <a:srgbClr val="94A3B8"/>
-                      </a:solidFill>
-                      <a:prstDash val="solid"/>
-                      <a:round/>
-                      <a:headEnd type="none" w="med" len="med"/>
-                      <a:tailEnd type="none" w="med" len="med"/>
-                    </a:lnT>
-                    <a:lnB w="12700" cap="flat" cmpd="sng" algn="ctr">
-                      <a:solidFill>
-                        <a:srgbClr val="94A3B8"/>
-                      </a:solidFill>
-                      <a:prstDash val="solid"/>
-                      <a:round/>
-                      <a:headEnd type="none" w="med" len="med"/>
-                      <a:tailEnd type="none" w="med" len="med"/>
-                    </a:lnB>
-                    <a:solidFill>
-                      <a:srgbClr val="FFFFFF"/>
-                    </a:solidFill>
-                  </a:tcPr>
-                </a:tc>
-                <a:tc>
-                  <a:txBody>
-                    <a:bodyPr/>
-                    <a:lstStyle/>
-                    <a:p>
-                      <a:pPr eaLnBrk="0" algn="ctr" indent="0" marL="0">
-                        <a:buNone/>
-                      </a:pPr>
-                      <a:r>
-                        <a:rPr lang="en-US" sz="2400" dirty="0">
-                          <a:solidFill>
-                            <a:srgbClr val="1F2937"/>
-                          </a:solidFill>
-                          <a:latin typeface="맑은 고딕" pitchFamily="34" charset="0"/>
-                          <a:ea typeface="맑은 고딕" pitchFamily="34" charset="-122"/>
-                          <a:cs typeface="맑은 고딕" pitchFamily="34" charset="-120"/>
-                        </a:rPr>
-                        <a:t>6</a:t>
-                      </a:r>
-                      <a:endParaRPr lang="en-US" sz="2400" dirty="0">
-                        <a:latin typeface="맑은 고딕" charset="0"/>
-                        <a:ea typeface="맑은 고딕" charset="0"/>
-                        <a:cs typeface="맑은 고딕" charset="0"/>
-                      </a:endParaRPr>
-                    </a:p>
-                  </a:txBody>
-                  <a:tcPr marL="38100" marR="38100" marT="38100" marB="38100" anchor="ctr">
-                    <a:lnL w="12700" cap="flat" cmpd="sng" algn="ctr">
-                      <a:solidFill>
-                        <a:srgbClr val="94A3B8"/>
-                      </a:solidFill>
-                      <a:prstDash val="solid"/>
-                      <a:round/>
-                      <a:headEnd type="none" w="med" len="med"/>
-                      <a:tailEnd type="none" w="med" len="med"/>
-                    </a:lnL>
-                    <a:lnR w="12700" cap="flat" cmpd="sng" algn="ctr">
-                      <a:solidFill>
-                        <a:srgbClr val="94A3B8"/>
-                      </a:solidFill>
-                      <a:prstDash val="solid"/>
-                      <a:round/>
-                      <a:headEnd type="none" w="med" len="med"/>
-                      <a:tailEnd type="none" w="med" len="med"/>
-                    </a:lnR>
-                    <a:lnT w="12700" cap="flat" cmpd="sng" algn="ctr">
-                      <a:solidFill>
-                        <a:srgbClr val="94A3B8"/>
-                      </a:solidFill>
-                      <a:prstDash val="solid"/>
-                      <a:round/>
-                      <a:headEnd type="none" w="med" len="med"/>
-                      <a:tailEnd type="none" w="med" len="med"/>
-                    </a:lnT>
-                    <a:lnB w="12700" cap="flat" cmpd="sng" algn="ctr">
-                      <a:solidFill>
-                        <a:srgbClr val="94A3B8"/>
-                      </a:solidFill>
-                      <a:prstDash val="solid"/>
-                      <a:round/>
-                      <a:headEnd type="none" w="med" len="med"/>
-                      <a:tailEnd type="none" w="med" len="med"/>
-                    </a:lnB>
-                    <a:solidFill>
-                      <a:srgbClr val="FFFFFF"/>
-                    </a:solidFill>
-                  </a:tcPr>
-                </a:tc>
-                <a:tc>
-                  <a:txBody>
-                    <a:bodyPr/>
-                    <a:lstStyle/>
-                    <a:p>
-                      <a:pPr eaLnBrk="0" algn="ctr" indent="0" marL="0">
-                        <a:buNone/>
-                      </a:pPr>
-                      <a:r>
-                        <a:rPr lang="en-US" sz="2400" dirty="0">
-                          <a:solidFill>
-                            <a:srgbClr val="1F2937"/>
-                          </a:solidFill>
-                          <a:latin typeface="맑은 고딕" pitchFamily="34" charset="0"/>
-                          <a:ea typeface="맑은 고딕" pitchFamily="34" charset="-122"/>
-                          <a:cs typeface="맑은 고딕" pitchFamily="34" charset="-120"/>
-                        </a:rPr>
-                        <a:t>7</a:t>
-                      </a:r>
-                      <a:endParaRPr lang="en-US" sz="2400" dirty="0">
-                        <a:latin typeface="맑은 고딕" charset="0"/>
-                        <a:ea typeface="맑은 고딕" charset="0"/>
-                        <a:cs typeface="맑은 고딕" charset="0"/>
-                      </a:endParaRPr>
-                    </a:p>
-                  </a:txBody>
-                  <a:tcPr marL="38100" marR="38100" marT="38100" marB="38100" anchor="ctr">
-                    <a:lnL w="12700" cap="flat" cmpd="sng" algn="ctr">
-                      <a:solidFill>
-                        <a:srgbClr val="94A3B8"/>
-                      </a:solidFill>
-                      <a:prstDash val="solid"/>
-                      <a:round/>
-                      <a:headEnd type="none" w="med" len="med"/>
-                      <a:tailEnd type="none" w="med" len="med"/>
-                    </a:lnL>
-                    <a:lnR w="12700" cap="flat" cmpd="sng" algn="ctr">
-                      <a:solidFill>
-                        <a:srgbClr val="94A3B8"/>
-                      </a:solidFill>
-                      <a:prstDash val="solid"/>
-                      <a:round/>
-                      <a:headEnd type="none" w="med" len="med"/>
-                      <a:tailEnd type="none" w="med" len="med"/>
-                    </a:lnR>
-                    <a:lnT w="12700" cap="flat" cmpd="sng" algn="ctr">
-                      <a:solidFill>
-                        <a:srgbClr val="94A3B8"/>
-                      </a:solidFill>
-                      <a:prstDash val="solid"/>
-                      <a:round/>
-                      <a:headEnd type="none" w="med" len="med"/>
-                      <a:tailEnd type="none" w="med" len="med"/>
-                    </a:lnT>
-                    <a:lnB w="12700" cap="flat" cmpd="sng" algn="ctr">
-                      <a:solidFill>
-                        <a:srgbClr val="94A3B8"/>
-                      </a:solidFill>
-                      <a:prstDash val="solid"/>
-                      <a:round/>
-                      <a:headEnd type="none" w="med" len="med"/>
-                      <a:tailEnd type="none" w="med" len="med"/>
-                    </a:lnB>
-                    <a:solidFill>
-                      <a:srgbClr val="FFFFFF"/>
-                    </a:solidFill>
-                  </a:tcPr>
-                </a:tc>
-              </a:tr>
-              <a:tr h="487680">
-                <a:tc>
-                  <a:txBody>
-                    <a:bodyPr/>
-                    <a:lstStyle/>
-                    <a:p>
-                      <a:pPr eaLnBrk="0" algn="ctr" indent="0" marL="0">
-                        <a:buNone/>
-                      </a:pPr>
-                      <a:r>
-                        <a:rPr lang="en-US" sz="2400" b="1" dirty="0">
-                          <a:solidFill>
-                            <a:srgbClr val="1F2937"/>
-                          </a:solidFill>
-                          <a:latin typeface="맑은 고딕" pitchFamily="34" charset="0"/>
-                          <a:ea typeface="맑은 고딕" pitchFamily="34" charset="-122"/>
-                          <a:cs typeface="맑은 고딕" pitchFamily="34" charset="-120"/>
-                        </a:rPr>
-                        <a:t>3</a:t>
-                      </a:r>
-                      <a:endParaRPr lang="en-US" sz="2400" dirty="0">
-                        <a:latin typeface="맑은 고딕" charset="0"/>
-                        <a:ea typeface="맑은 고딕" charset="0"/>
-                        <a:cs typeface="맑은 고딕" charset="0"/>
-                      </a:endParaRPr>
-                    </a:p>
-                  </a:txBody>
-                  <a:tcPr marL="38100" marR="38100" marT="38100" marB="38100" anchor="ctr">
-                    <a:lnL w="12700" cap="flat" cmpd="sng" algn="ctr">
-                      <a:solidFill>
-                        <a:srgbClr val="94A3B8"/>
-                      </a:solidFill>
-                      <a:prstDash val="solid"/>
-                      <a:round/>
-                      <a:headEnd type="none" w="med" len="med"/>
-                      <a:tailEnd type="none" w="med" len="med"/>
-                    </a:lnL>
-                    <a:lnR w="12700" cap="flat" cmpd="sng" algn="ctr">
-                      <a:solidFill>
-                        <a:srgbClr val="94A3B8"/>
-                      </a:solidFill>
-                      <a:prstDash val="solid"/>
-                      <a:round/>
-                      <a:headEnd type="none" w="med" len="med"/>
-                      <a:tailEnd type="none" w="med" len="med"/>
-                    </a:lnR>
-                    <a:lnT w="12700" cap="flat" cmpd="sng" algn="ctr">
-                      <a:solidFill>
-                        <a:srgbClr val="94A3B8"/>
-                      </a:solidFill>
-                      <a:prstDash val="solid"/>
-                      <a:round/>
-                      <a:headEnd type="none" w="med" len="med"/>
-                      <a:tailEnd type="none" w="med" len="med"/>
-                    </a:lnT>
-                    <a:lnB w="12700" cap="flat" cmpd="sng" algn="ctr">
-                      <a:solidFill>
-                        <a:srgbClr val="94A3B8"/>
-                      </a:solidFill>
-                      <a:prstDash val="solid"/>
-                      <a:round/>
-                      <a:headEnd type="none" w="med" len="med"/>
-                      <a:tailEnd type="none" w="med" len="med"/>
-                    </a:lnB>
-                    <a:solidFill>
-                      <a:srgbClr val="EAF3F1"/>
-                    </a:solidFill>
-                  </a:tcPr>
-                </a:tc>
-                <a:tc>
-                  <a:txBody>
-                    <a:bodyPr/>
-                    <a:lstStyle/>
-                    <a:p>
-                      <a:pPr eaLnBrk="0" algn="ctr" indent="0" marL="0">
-                        <a:buNone/>
-                      </a:pPr>
-                      <a:r>
-                        <a:rPr lang="en-US" sz="2400" dirty="0">
-                          <a:solidFill>
-                            <a:srgbClr val="1F2937"/>
-                          </a:solidFill>
-                          <a:latin typeface="맑은 고딕" pitchFamily="34" charset="0"/>
-                          <a:ea typeface="맑은 고딕" pitchFamily="34" charset="-122"/>
-                          <a:cs typeface="맑은 고딕" pitchFamily="34" charset="-120"/>
-                        </a:rPr>
-                        <a:t>4</a:t>
-                      </a:r>
-                      <a:endParaRPr lang="en-US" sz="2400" dirty="0">
-                        <a:latin typeface="맑은 고딕" charset="0"/>
-                        <a:ea typeface="맑은 고딕" charset="0"/>
-                        <a:cs typeface="맑은 고딕" charset="0"/>
-                      </a:endParaRPr>
-                    </a:p>
-                  </a:txBody>
-                  <a:tcPr marL="38100" marR="38100" marT="38100" marB="38100" anchor="ctr">
-                    <a:lnL w="12700" cap="flat" cmpd="sng" algn="ctr">
-                      <a:solidFill>
-                        <a:srgbClr val="94A3B8"/>
-                      </a:solidFill>
-                      <a:prstDash val="solid"/>
-                      <a:round/>
-                      <a:headEnd type="none" w="med" len="med"/>
-                      <a:tailEnd type="none" w="med" len="med"/>
-                    </a:lnL>
-                    <a:lnR w="12700" cap="flat" cmpd="sng" algn="ctr">
-                      <a:solidFill>
-                        <a:srgbClr val="94A3B8"/>
-                      </a:solidFill>
-                      <a:prstDash val="solid"/>
-                      <a:round/>
-                      <a:headEnd type="none" w="med" len="med"/>
-                      <a:tailEnd type="none" w="med" len="med"/>
-                    </a:lnR>
-                    <a:lnT w="12700" cap="flat" cmpd="sng" algn="ctr">
-                      <a:solidFill>
-                        <a:srgbClr val="94A3B8"/>
-                      </a:solidFill>
-                      <a:prstDash val="solid"/>
-                      <a:round/>
-                      <a:headEnd type="none" w="med" len="med"/>
-                      <a:tailEnd type="none" w="med" len="med"/>
-                    </a:lnT>
-                    <a:lnB w="12700" cap="flat" cmpd="sng" algn="ctr">
-                      <a:solidFill>
-                        <a:srgbClr val="94A3B8"/>
-                      </a:solidFill>
-                      <a:prstDash val="solid"/>
-                      <a:round/>
-                      <a:headEnd type="none" w="med" len="med"/>
-                      <a:tailEnd type="none" w="med" len="med"/>
-                    </a:lnB>
-                    <a:solidFill>
-                      <a:srgbClr val="FFFFFF"/>
-                    </a:solidFill>
-                  </a:tcPr>
-                </a:tc>
-                <a:tc>
-                  <a:txBody>
-                    <a:bodyPr/>
-                    <a:lstStyle/>
-                    <a:p>
-                      <a:pPr eaLnBrk="0" algn="ctr" indent="0" marL="0">
-                        <a:buNone/>
-                      </a:pPr>
-                      <a:r>
-                        <a:rPr lang="en-US" sz="2400" dirty="0">
-                          <a:solidFill>
-                            <a:srgbClr val="1F2937"/>
-                          </a:solidFill>
-                          <a:latin typeface="맑은 고딕" pitchFamily="34" charset="0"/>
-                          <a:ea typeface="맑은 고딕" pitchFamily="34" charset="-122"/>
-                          <a:cs typeface="맑은 고딕" pitchFamily="34" charset="-120"/>
-                        </a:rPr>
-                        <a:t>5</a:t>
-                      </a:r>
-                      <a:endParaRPr lang="en-US" sz="2400" dirty="0">
-                        <a:latin typeface="맑은 고딕" charset="0"/>
-                        <a:ea typeface="맑은 고딕" charset="0"/>
-                        <a:cs typeface="맑은 고딕" charset="0"/>
-                      </a:endParaRPr>
-                    </a:p>
-                  </a:txBody>
-                  <a:tcPr marL="38100" marR="38100" marT="38100" marB="38100" anchor="ctr">
-                    <a:lnL w="12700" cap="flat" cmpd="sng" algn="ctr">
-                      <a:solidFill>
-                        <a:srgbClr val="94A3B8"/>
-                      </a:solidFill>
-                      <a:prstDash val="solid"/>
-                      <a:round/>
-                      <a:headEnd type="none" w="med" len="med"/>
-                      <a:tailEnd type="none" w="med" len="med"/>
-                    </a:lnL>
-                    <a:lnR w="12700" cap="flat" cmpd="sng" algn="ctr">
-                      <a:solidFill>
-                        <a:srgbClr val="94A3B8"/>
-                      </a:solidFill>
-                      <a:prstDash val="solid"/>
-                      <a:round/>
-                      <a:headEnd type="none" w="med" len="med"/>
-                      <a:tailEnd type="none" w="med" len="med"/>
-                    </a:lnR>
-                    <a:lnT w="12700" cap="flat" cmpd="sng" algn="ctr">
-                      <a:solidFill>
-                        <a:srgbClr val="94A3B8"/>
-                      </a:solidFill>
-                      <a:prstDash val="solid"/>
-                      <a:round/>
-                      <a:headEnd type="none" w="med" len="med"/>
-                      <a:tailEnd type="none" w="med" len="med"/>
-                    </a:lnT>
-                    <a:lnB w="12700" cap="flat" cmpd="sng" algn="ctr">
-                      <a:solidFill>
-                        <a:srgbClr val="94A3B8"/>
-                      </a:solidFill>
-                      <a:prstDash val="solid"/>
-                      <a:round/>
-                      <a:headEnd type="none" w="med" len="med"/>
-                      <a:tailEnd type="none" w="med" len="med"/>
-                    </a:lnB>
-                    <a:solidFill>
-                      <a:srgbClr val="FFFFFF"/>
-                    </a:solidFill>
-                  </a:tcPr>
-                </a:tc>
-                <a:tc>
-                  <a:txBody>
-                    <a:bodyPr/>
-                    <a:lstStyle/>
-                    <a:p>
-                      <a:pPr eaLnBrk="0" algn="ctr" indent="0" marL="0">
-                        <a:buNone/>
-                      </a:pPr>
-                      <a:r>
-                        <a:rPr lang="en-US" sz="2400" dirty="0">
-                          <a:solidFill>
-                            <a:srgbClr val="1F2937"/>
-                          </a:solidFill>
-                          <a:latin typeface="맑은 고딕" pitchFamily="34" charset="0"/>
-                          <a:ea typeface="맑은 고딕" pitchFamily="34" charset="-122"/>
-                          <a:cs typeface="맑은 고딕" pitchFamily="34" charset="-120"/>
-                        </a:rPr>
-                        <a:t>6</a:t>
-                      </a:r>
-                      <a:endParaRPr lang="en-US" sz="2400" dirty="0">
-                        <a:latin typeface="맑은 고딕" charset="0"/>
-                        <a:ea typeface="맑은 고딕" charset="0"/>
-                        <a:cs typeface="맑은 고딕" charset="0"/>
-                      </a:endParaRPr>
-                    </a:p>
-                  </a:txBody>
-                  <a:tcPr marL="38100" marR="38100" marT="38100" marB="38100" anchor="ctr">
-                    <a:lnL w="12700" cap="flat" cmpd="sng" algn="ctr">
-                      <a:solidFill>
-                        <a:srgbClr val="94A3B8"/>
-                      </a:solidFill>
-                      <a:prstDash val="solid"/>
-                      <a:round/>
-                      <a:headEnd type="none" w="med" len="med"/>
-                      <a:tailEnd type="none" w="med" len="med"/>
-                    </a:lnL>
-                    <a:lnR w="12700" cap="flat" cmpd="sng" algn="ctr">
-                      <a:solidFill>
-                        <a:srgbClr val="94A3B8"/>
-                      </a:solidFill>
-                      <a:prstDash val="solid"/>
-                      <a:round/>
-                      <a:headEnd type="none" w="med" len="med"/>
-                      <a:tailEnd type="none" w="med" len="med"/>
-                    </a:lnR>
-                    <a:lnT w="12700" cap="flat" cmpd="sng" algn="ctr">
-                      <a:solidFill>
-                        <a:srgbClr val="94A3B8"/>
-                      </a:solidFill>
-                      <a:prstDash val="solid"/>
-                      <a:round/>
-                      <a:headEnd type="none" w="med" len="med"/>
-                      <a:tailEnd type="none" w="med" len="med"/>
-                    </a:lnT>
-                    <a:lnB w="12700" cap="flat" cmpd="sng" algn="ctr">
-                      <a:solidFill>
-                        <a:srgbClr val="94A3B8"/>
-                      </a:solidFill>
-                      <a:prstDash val="solid"/>
-                      <a:round/>
-                      <a:headEnd type="none" w="med" len="med"/>
-                      <a:tailEnd type="none" w="med" len="med"/>
-                    </a:lnB>
-                    <a:solidFill>
-                      <a:srgbClr val="FFFFFF"/>
-                    </a:solidFill>
-                  </a:tcPr>
-                </a:tc>
-                <a:tc>
-                  <a:txBody>
-                    <a:bodyPr/>
-                    <a:lstStyle/>
-                    <a:p>
-                      <a:pPr eaLnBrk="0" algn="ctr" indent="0" marL="0">
-                        <a:buNone/>
-                      </a:pPr>
-                      <a:r>
-                        <a:rPr lang="en-US" sz="2400" dirty="0">
-                          <a:solidFill>
-                            <a:srgbClr val="1F2937"/>
-                          </a:solidFill>
-                          <a:latin typeface="맑은 고딕" pitchFamily="34" charset="0"/>
-                          <a:ea typeface="맑은 고딕" pitchFamily="34" charset="-122"/>
-                          <a:cs typeface="맑은 고딕" pitchFamily="34" charset="-120"/>
-                        </a:rPr>
-                        <a:t>7</a:t>
-                      </a:r>
-                      <a:endParaRPr lang="en-US" sz="2400" dirty="0">
-                        <a:latin typeface="맑은 고딕" charset="0"/>
-                        <a:ea typeface="맑은 고딕" charset="0"/>
-                        <a:cs typeface="맑은 고딕" charset="0"/>
-                      </a:endParaRPr>
-                    </a:p>
-                  </a:txBody>
-                  <a:tcPr marL="38100" marR="38100" marT="38100" marB="38100" anchor="ctr">
-                    <a:lnL w="12700" cap="flat" cmpd="sng" algn="ctr">
-                      <a:solidFill>
-                        <a:srgbClr val="94A3B8"/>
-                      </a:solidFill>
-                      <a:prstDash val="solid"/>
-                      <a:round/>
-                      <a:headEnd type="none" w="med" len="med"/>
-                      <a:tailEnd type="none" w="med" len="med"/>
-                    </a:lnL>
-                    <a:lnR w="12700" cap="flat" cmpd="sng" algn="ctr">
-                      <a:solidFill>
-                        <a:srgbClr val="94A3B8"/>
-                      </a:solidFill>
-                      <a:prstDash val="solid"/>
-                      <a:round/>
-                      <a:headEnd type="none" w="med" len="med"/>
-                      <a:tailEnd type="none" w="med" len="med"/>
-                    </a:lnR>
-                    <a:lnT w="12700" cap="flat" cmpd="sng" algn="ctr">
-                      <a:solidFill>
-                        <a:srgbClr val="94A3B8"/>
-                      </a:solidFill>
-                      <a:prstDash val="solid"/>
-                      <a:round/>
-                      <a:headEnd type="none" w="med" len="med"/>
-                      <a:tailEnd type="none" w="med" len="med"/>
-                    </a:lnT>
-                    <a:lnB w="12700" cap="flat" cmpd="sng" algn="ctr">
-                      <a:solidFill>
-                        <a:srgbClr val="94A3B8"/>
-                      </a:solidFill>
-                      <a:prstDash val="solid"/>
-                      <a:round/>
-                      <a:headEnd type="none" w="med" len="med"/>
-                      <a:tailEnd type="none" w="med" len="med"/>
-                    </a:lnB>
-                    <a:solidFill>
-                      <a:srgbClr val="FFFFFF"/>
-                    </a:solidFill>
-                  </a:tcPr>
-                </a:tc>
-                <a:tc>
-                  <a:txBody>
-                    <a:bodyPr/>
-                    <a:lstStyle/>
-                    <a:p>
-                      <a:pPr eaLnBrk="0" algn="ctr" indent="0" marL="0">
-                        <a:buNone/>
-                      </a:pPr>
-                      <a:r>
-                        <a:rPr lang="en-US" sz="2400" dirty="0">
-                          <a:solidFill>
-                            <a:srgbClr val="1F2937"/>
-                          </a:solidFill>
-                          <a:latin typeface="맑은 고딕" pitchFamily="34" charset="0"/>
-                          <a:ea typeface="맑은 고딕" pitchFamily="34" charset="-122"/>
-                          <a:cs typeface="맑은 고딕" pitchFamily="34" charset="-120"/>
-                        </a:rPr>
-                        <a:t>8</a:t>
-                      </a:r>
-                      <a:endParaRPr lang="en-US" sz="2400" dirty="0">
-                        <a:latin typeface="맑은 고딕" charset="0"/>
-                        <a:ea typeface="맑은 고딕" charset="0"/>
-                        <a:cs typeface="맑은 고딕" charset="0"/>
-                      </a:endParaRPr>
-                    </a:p>
-                  </a:txBody>
-                  <a:tcPr marL="38100" marR="38100" marT="38100" marB="38100" anchor="ctr">
-                    <a:lnL w="12700" cap="flat" cmpd="sng" algn="ctr">
-                      <a:solidFill>
-                        <a:srgbClr val="94A3B8"/>
-                      </a:solidFill>
-                      <a:prstDash val="solid"/>
-                      <a:round/>
-                      <a:headEnd type="none" w="med" len="med"/>
-                      <a:tailEnd type="none" w="med" len="med"/>
-                    </a:lnL>
-                    <a:lnR w="12700" cap="flat" cmpd="sng" algn="ctr">
-                      <a:solidFill>
-                        <a:srgbClr val="94A3B8"/>
-                      </a:solidFill>
-                      <a:prstDash val="solid"/>
-                      <a:round/>
-                      <a:headEnd type="none" w="med" len="med"/>
-                      <a:tailEnd type="none" w="med" len="med"/>
-                    </a:lnR>
-                    <a:lnT w="12700" cap="flat" cmpd="sng" algn="ctr">
-                      <a:solidFill>
-                        <a:srgbClr val="94A3B8"/>
-                      </a:solidFill>
-                      <a:prstDash val="solid"/>
-                      <a:round/>
-                      <a:headEnd type="none" w="med" len="med"/>
-                      <a:tailEnd type="none" w="med" len="med"/>
-                    </a:lnT>
-                    <a:lnB w="12700" cap="flat" cmpd="sng" algn="ctr">
-                      <a:solidFill>
-                        <a:srgbClr val="94A3B8"/>
-                      </a:solidFill>
-                      <a:prstDash val="solid"/>
-                      <a:round/>
-                      <a:headEnd type="none" w="med" len="med"/>
-                      <a:tailEnd type="none" w="med" len="med"/>
-                    </a:lnB>
-                    <a:solidFill>
-                      <a:srgbClr val="FFFFFF"/>
-                    </a:solidFill>
-                  </a:tcPr>
-                </a:tc>
-              </a:tr>
-              <a:tr h="487680">
-                <a:tc>
-                  <a:txBody>
-                    <a:bodyPr/>
-                    <a:lstStyle/>
-                    <a:p>
-                      <a:pPr eaLnBrk="0" algn="ctr" indent="0" marL="0">
-                        <a:buNone/>
-                      </a:pPr>
-                      <a:r>
-                        <a:rPr lang="en-US" sz="2400" b="1" dirty="0">
-                          <a:solidFill>
-                            <a:srgbClr val="1F2937"/>
-                          </a:solidFill>
-                          <a:latin typeface="맑은 고딕" pitchFamily="34" charset="0"/>
-                          <a:ea typeface="맑은 고딕" pitchFamily="34" charset="-122"/>
-                          <a:cs typeface="맑은 고딕" pitchFamily="34" charset="-120"/>
-                        </a:rPr>
-                        <a:t>4</a:t>
-                      </a:r>
-                      <a:endParaRPr lang="en-US" sz="2400" dirty="0">
-                        <a:latin typeface="맑은 고딕" charset="0"/>
-                        <a:ea typeface="맑은 고딕" charset="0"/>
-                        <a:cs typeface="맑은 고딕" charset="0"/>
-                      </a:endParaRPr>
-                    </a:p>
-                  </a:txBody>
-                  <a:tcPr marL="38100" marR="38100" marT="38100" marB="38100" anchor="ctr">
-                    <a:lnL w="12700" cap="flat" cmpd="sng" algn="ctr">
-                      <a:solidFill>
-                        <a:srgbClr val="94A3B8"/>
-                      </a:solidFill>
-                      <a:prstDash val="solid"/>
-                      <a:round/>
-                      <a:headEnd type="none" w="med" len="med"/>
-                      <a:tailEnd type="none" w="med" len="med"/>
-                    </a:lnL>
-                    <a:lnR w="12700" cap="flat" cmpd="sng" algn="ctr">
-                      <a:solidFill>
-                        <a:srgbClr val="94A3B8"/>
-                      </a:solidFill>
-                      <a:prstDash val="solid"/>
-                      <a:round/>
-                      <a:headEnd type="none" w="med" len="med"/>
-                      <a:tailEnd type="none" w="med" len="med"/>
-                    </a:lnR>
-                    <a:lnT w="12700" cap="flat" cmpd="sng" algn="ctr">
-                      <a:solidFill>
-                        <a:srgbClr val="94A3B8"/>
-                      </a:solidFill>
-                      <a:prstDash val="solid"/>
-                      <a:round/>
-                      <a:headEnd type="none" w="med" len="med"/>
-                      <a:tailEnd type="none" w="med" len="med"/>
-                    </a:lnT>
-                    <a:lnB w="12700" cap="flat" cmpd="sng" algn="ctr">
-                      <a:solidFill>
-                        <a:srgbClr val="94A3B8"/>
-                      </a:solidFill>
-                      <a:prstDash val="solid"/>
-                      <a:round/>
-                      <a:headEnd type="none" w="med" len="med"/>
-                      <a:tailEnd type="none" w="med" len="med"/>
-                    </a:lnB>
-                    <a:solidFill>
-                      <a:srgbClr val="EAF3F1"/>
-                    </a:solidFill>
-                  </a:tcPr>
-                </a:tc>
-                <a:tc>
-                  <a:txBody>
-                    <a:bodyPr/>
-                    <a:lstStyle/>
-                    <a:p>
-                      <a:pPr eaLnBrk="0" algn="ctr" indent="0" marL="0">
-                        <a:buNone/>
-                      </a:pPr>
-                      <a:r>
-                        <a:rPr lang="en-US" sz="2400" dirty="0">
-                          <a:solidFill>
-                            <a:srgbClr val="1F2937"/>
-                          </a:solidFill>
-                          <a:latin typeface="맑은 고딕" pitchFamily="34" charset="0"/>
-                          <a:ea typeface="맑은 고딕" pitchFamily="34" charset="-122"/>
-                          <a:cs typeface="맑은 고딕" pitchFamily="34" charset="-120"/>
-                        </a:rPr>
-                        <a:t>5</a:t>
-                      </a:r>
-                      <a:endParaRPr lang="en-US" sz="2400" dirty="0">
-                        <a:latin typeface="맑은 고딕" charset="0"/>
-                        <a:ea typeface="맑은 고딕" charset="0"/>
-                        <a:cs typeface="맑은 고딕" charset="0"/>
-                      </a:endParaRPr>
-                    </a:p>
-                  </a:txBody>
-                  <a:tcPr marL="38100" marR="38100" marT="38100" marB="38100" anchor="ctr">
-                    <a:lnL w="12700" cap="flat" cmpd="sng" algn="ctr">
-                      <a:solidFill>
-                        <a:srgbClr val="94A3B8"/>
-                      </a:solidFill>
-                      <a:prstDash val="solid"/>
-                      <a:round/>
-                      <a:headEnd type="none" w="med" len="med"/>
-                      <a:tailEnd type="none" w="med" len="med"/>
-                    </a:lnL>
-                    <a:lnR w="12700" cap="flat" cmpd="sng" algn="ctr">
-                      <a:solidFill>
-                        <a:srgbClr val="94A3B8"/>
-                      </a:solidFill>
-                      <a:prstDash val="solid"/>
-                      <a:round/>
-                      <a:headEnd type="none" w="med" len="med"/>
-                      <a:tailEnd type="none" w="med" len="med"/>
-                    </a:lnR>
-                    <a:lnT w="12700" cap="flat" cmpd="sng" algn="ctr">
-                      <a:solidFill>
-                        <a:srgbClr val="94A3B8"/>
-                      </a:solidFill>
-                      <a:prstDash val="solid"/>
-                      <a:round/>
-                      <a:headEnd type="none" w="med" len="med"/>
-                      <a:tailEnd type="none" w="med" len="med"/>
-                    </a:lnT>
-                    <a:lnB w="12700" cap="flat" cmpd="sng" algn="ctr">
-                      <a:solidFill>
-                        <a:srgbClr val="94A3B8"/>
-                      </a:solidFill>
-                      <a:prstDash val="solid"/>
-                      <a:round/>
-                      <a:headEnd type="none" w="med" len="med"/>
-                      <a:tailEnd type="none" w="med" len="med"/>
-                    </a:lnB>
-                    <a:solidFill>
-                      <a:srgbClr val="FFFFFF"/>
-                    </a:solidFill>
-                  </a:tcPr>
-                </a:tc>
-                <a:tc>
-                  <a:txBody>
-                    <a:bodyPr/>
-                    <a:lstStyle/>
-                    <a:p>
-                      <a:pPr eaLnBrk="0" algn="ctr" indent="0" marL="0">
-                        <a:buNone/>
-                      </a:pPr>
-                      <a:r>
-                        <a:rPr lang="en-US" sz="2400" dirty="0">
-                          <a:solidFill>
-                            <a:srgbClr val="1F2937"/>
-                          </a:solidFill>
-                          <a:latin typeface="맑은 고딕" pitchFamily="34" charset="0"/>
-                          <a:ea typeface="맑은 고딕" pitchFamily="34" charset="-122"/>
-                          <a:cs typeface="맑은 고딕" pitchFamily="34" charset="-120"/>
-                        </a:rPr>
-                        <a:t>6</a:t>
-                      </a:r>
-                      <a:endParaRPr lang="en-US" sz="2400" dirty="0">
-                        <a:latin typeface="맑은 고딕" charset="0"/>
-                        <a:ea typeface="맑은 고딕" charset="0"/>
-                        <a:cs typeface="맑은 고딕" charset="0"/>
-                      </a:endParaRPr>
-                    </a:p>
-                  </a:txBody>
-                  <a:tcPr marL="38100" marR="38100" marT="38100" marB="38100" anchor="ctr">
-                    <a:lnL w="12700" cap="flat" cmpd="sng" algn="ctr">
-                      <a:solidFill>
-                        <a:srgbClr val="94A3B8"/>
-                      </a:solidFill>
-                      <a:prstDash val="solid"/>
-                      <a:round/>
-                      <a:headEnd type="none" w="med" len="med"/>
-                      <a:tailEnd type="none" w="med" len="med"/>
-                    </a:lnL>
-                    <a:lnR w="12700" cap="flat" cmpd="sng" algn="ctr">
-                      <a:solidFill>
-                        <a:srgbClr val="94A3B8"/>
-                      </a:solidFill>
-                      <a:prstDash val="solid"/>
-                      <a:round/>
-                      <a:headEnd type="none" w="med" len="med"/>
-                      <a:tailEnd type="none" w="med" len="med"/>
-                    </a:lnR>
-                    <a:lnT w="12700" cap="flat" cmpd="sng" algn="ctr">
-                      <a:solidFill>
-                        <a:srgbClr val="94A3B8"/>
-                      </a:solidFill>
-                      <a:prstDash val="solid"/>
-                      <a:round/>
-                      <a:headEnd type="none" w="med" len="med"/>
-                      <a:tailEnd type="none" w="med" len="med"/>
-                    </a:lnT>
-                    <a:lnB w="12700" cap="flat" cmpd="sng" algn="ctr">
-                      <a:solidFill>
-                        <a:srgbClr val="94A3B8"/>
-                      </a:solidFill>
-                      <a:prstDash val="solid"/>
-                      <a:round/>
-                      <a:headEnd type="none" w="med" len="med"/>
-                      <a:tailEnd type="none" w="med" len="med"/>
-                    </a:lnB>
-                    <a:solidFill>
-                      <a:srgbClr val="FFFFFF"/>
-                    </a:solidFill>
-                  </a:tcPr>
-                </a:tc>
-                <a:tc>
-                  <a:txBody>
-                    <a:bodyPr/>
-                    <a:lstStyle/>
-                    <a:p>
-                      <a:pPr eaLnBrk="0" algn="ctr" indent="0" marL="0">
-                        <a:buNone/>
-                      </a:pPr>
-                      <a:r>
-                        <a:rPr lang="en-US" sz="2400" dirty="0">
-                          <a:solidFill>
-                            <a:srgbClr val="1F2937"/>
-                          </a:solidFill>
-                          <a:latin typeface="맑은 고딕" pitchFamily="34" charset="0"/>
-                          <a:ea typeface="맑은 고딕" pitchFamily="34" charset="-122"/>
-                          <a:cs typeface="맑은 고딕" pitchFamily="34" charset="-120"/>
-                        </a:rPr>
-                        <a:t>7</a:t>
-                      </a:r>
-                      <a:endParaRPr lang="en-US" sz="2400" dirty="0">
-                        <a:latin typeface="맑은 고딕" charset="0"/>
-                        <a:ea typeface="맑은 고딕" charset="0"/>
-                        <a:cs typeface="맑은 고딕" charset="0"/>
-                      </a:endParaRPr>
-                    </a:p>
-                  </a:txBody>
-                  <a:tcPr marL="38100" marR="38100" marT="38100" marB="38100" anchor="ctr">
-                    <a:lnL w="12700" cap="flat" cmpd="sng" algn="ctr">
-                      <a:solidFill>
-                        <a:srgbClr val="94A3B8"/>
-                      </a:solidFill>
-                      <a:prstDash val="solid"/>
-                      <a:round/>
-                      <a:headEnd type="none" w="med" len="med"/>
-                      <a:tailEnd type="none" w="med" len="med"/>
-                    </a:lnL>
-                    <a:lnR w="12700" cap="flat" cmpd="sng" algn="ctr">
-                      <a:solidFill>
-                        <a:srgbClr val="94A3B8"/>
-                      </a:solidFill>
-                      <a:prstDash val="solid"/>
-                      <a:round/>
-                      <a:headEnd type="none" w="med" len="med"/>
-                      <a:tailEnd type="none" w="med" len="med"/>
-                    </a:lnR>
-                    <a:lnT w="12700" cap="flat" cmpd="sng" algn="ctr">
-                      <a:solidFill>
-                        <a:srgbClr val="94A3B8"/>
-                      </a:solidFill>
-                      <a:prstDash val="solid"/>
-                      <a:round/>
-                      <a:headEnd type="none" w="med" len="med"/>
-                      <a:tailEnd type="none" w="med" len="med"/>
-                    </a:lnT>
-                    <a:lnB w="12700" cap="flat" cmpd="sng" algn="ctr">
-                      <a:solidFill>
-                        <a:srgbClr val="94A3B8"/>
-                      </a:solidFill>
-                      <a:prstDash val="solid"/>
-                      <a:round/>
-                      <a:headEnd type="none" w="med" len="med"/>
-                      <a:tailEnd type="none" w="med" len="med"/>
-                    </a:lnB>
-                    <a:solidFill>
-                      <a:srgbClr val="FFFFFF"/>
-                    </a:solidFill>
-                  </a:tcPr>
-                </a:tc>
-                <a:tc>
-                  <a:txBody>
-                    <a:bodyPr/>
-                    <a:lstStyle/>
-                    <a:p>
-                      <a:pPr eaLnBrk="0" algn="ctr" indent="0" marL="0">
-                        <a:buNone/>
-                      </a:pPr>
-                      <a:r>
-                        <a:rPr lang="en-US" sz="2400" dirty="0">
-                          <a:solidFill>
-                            <a:srgbClr val="1F2937"/>
-                          </a:solidFill>
-                          <a:latin typeface="맑은 고딕" pitchFamily="34" charset="0"/>
-                          <a:ea typeface="맑은 고딕" pitchFamily="34" charset="-122"/>
-                          <a:cs typeface="맑은 고딕" pitchFamily="34" charset="-120"/>
-                        </a:rPr>
-                        <a:t>8</a:t>
-                      </a:r>
-                      <a:endParaRPr lang="en-US" sz="2400" dirty="0">
-                        <a:latin typeface="맑은 고딕" charset="0"/>
-                        <a:ea typeface="맑은 고딕" charset="0"/>
-                        <a:cs typeface="맑은 고딕" charset="0"/>
-                      </a:endParaRPr>
-                    </a:p>
-                  </a:txBody>
-                  <a:tcPr marL="38100" marR="38100" marT="38100" marB="38100" anchor="ctr">
-                    <a:lnL w="12700" cap="flat" cmpd="sng" algn="ctr">
-                      <a:solidFill>
-                        <a:srgbClr val="94A3B8"/>
-                      </a:solidFill>
-                      <a:prstDash val="solid"/>
-                      <a:round/>
-                      <a:headEnd type="none" w="med" len="med"/>
-                      <a:tailEnd type="none" w="med" len="med"/>
-                    </a:lnL>
-                    <a:lnR w="12700" cap="flat" cmpd="sng" algn="ctr">
-                      <a:solidFill>
-                        <a:srgbClr val="94A3B8"/>
-                      </a:solidFill>
-                      <a:prstDash val="solid"/>
-                      <a:round/>
-                      <a:headEnd type="none" w="med" len="med"/>
-                      <a:tailEnd type="none" w="med" len="med"/>
-                    </a:lnR>
-                    <a:lnT w="12700" cap="flat" cmpd="sng" algn="ctr">
-                      <a:solidFill>
-                        <a:srgbClr val="94A3B8"/>
-                      </a:solidFill>
-                      <a:prstDash val="solid"/>
-                      <a:round/>
-                      <a:headEnd type="none" w="med" len="med"/>
-                      <a:tailEnd type="none" w="med" len="med"/>
-                    </a:lnT>
-                    <a:lnB w="12700" cap="flat" cmpd="sng" algn="ctr">
-                      <a:solidFill>
-                        <a:srgbClr val="94A3B8"/>
-                      </a:solidFill>
-                      <a:prstDash val="solid"/>
-                      <a:round/>
-                      <a:headEnd type="none" w="med" len="med"/>
-                      <a:tailEnd type="none" w="med" len="med"/>
-                    </a:lnB>
-                    <a:solidFill>
-                      <a:srgbClr val="FFFFFF"/>
-                    </a:solidFill>
-                  </a:tcPr>
-                </a:tc>
-                <a:tc>
-                  <a:txBody>
-                    <a:bodyPr/>
-                    <a:lstStyle/>
-                    <a:p>
-                      <a:pPr eaLnBrk="0" algn="ctr" indent="0" marL="0">
-                        <a:buNone/>
-                      </a:pPr>
-                      <a:r>
-                        <a:rPr lang="en-US" sz="2400" dirty="0">
-                          <a:solidFill>
-                            <a:srgbClr val="1F2937"/>
-                          </a:solidFill>
-                          <a:latin typeface="맑은 고딕" pitchFamily="34" charset="0"/>
-                          <a:ea typeface="맑은 고딕" pitchFamily="34" charset="-122"/>
-                          <a:cs typeface="맑은 고딕" pitchFamily="34" charset="-120"/>
-                        </a:rPr>
-                        <a:t>9</a:t>
-                      </a:r>
-                      <a:endParaRPr lang="en-US" sz="2400" dirty="0">
-                        <a:latin typeface="맑은 고딕" charset="0"/>
-                        <a:ea typeface="맑은 고딕" charset="0"/>
-                        <a:cs typeface="맑은 고딕" charset="0"/>
-                      </a:endParaRPr>
-                    </a:p>
-                  </a:txBody>
-                  <a:tcPr marL="38100" marR="38100" marT="38100" marB="38100" anchor="ctr">
-                    <a:lnL w="12700" cap="flat" cmpd="sng" algn="ctr">
-                      <a:solidFill>
-                        <a:srgbClr val="94A3B8"/>
-                      </a:solidFill>
-                      <a:prstDash val="solid"/>
-                      <a:round/>
-                      <a:headEnd type="none" w="med" len="med"/>
-                      <a:tailEnd type="none" w="med" len="med"/>
-                    </a:lnL>
-                    <a:lnR w="12700" cap="flat" cmpd="sng" algn="ctr">
-                      <a:solidFill>
-                        <a:srgbClr val="94A3B8"/>
-                      </a:solidFill>
-                      <a:prstDash val="solid"/>
-                      <a:round/>
-                      <a:headEnd type="none" w="med" len="med"/>
-                      <a:tailEnd type="none" w="med" len="med"/>
-                    </a:lnR>
-                    <a:lnT w="12700" cap="flat" cmpd="sng" algn="ctr">
-                      <a:solidFill>
-                        <a:srgbClr val="94A3B8"/>
-                      </a:solidFill>
-                      <a:prstDash val="solid"/>
-                      <a:round/>
-                      <a:headEnd type="none" w="med" len="med"/>
-                      <a:tailEnd type="none" w="med" len="med"/>
-                    </a:lnT>
-                    <a:lnB w="12700" cap="flat" cmpd="sng" algn="ctr">
-                      <a:solidFill>
-                        <a:srgbClr val="94A3B8"/>
-                      </a:solidFill>
-                      <a:prstDash val="solid"/>
-                      <a:round/>
-                      <a:headEnd type="none" w="med" len="med"/>
-                      <a:tailEnd type="none" w="med" len="med"/>
-                    </a:lnB>
-                    <a:solidFill>
-                      <a:srgbClr val="FFFFFF"/>
-                    </a:solidFill>
-                  </a:tcPr>
-                </a:tc>
-              </a:tr>
-              <a:tr h="487680">
-                <a:tc>
-                  <a:txBody>
-                    <a:bodyPr/>
-                    <a:lstStyle/>
-                    <a:p>
-                      <a:pPr eaLnBrk="0" algn="ctr" indent="0" marL="0">
-                        <a:buNone/>
-                      </a:pPr>
-                      <a:r>
-                        <a:rPr lang="en-US" sz="2400" b="1" dirty="0">
-                          <a:solidFill>
-                            <a:srgbClr val="1F2937"/>
-                          </a:solidFill>
-                          <a:latin typeface="맑은 고딕" pitchFamily="34" charset="0"/>
-                          <a:ea typeface="맑은 고딕" pitchFamily="34" charset="-122"/>
-                          <a:cs typeface="맑은 고딕" pitchFamily="34" charset="-120"/>
-                        </a:rPr>
-                        <a:t>5</a:t>
-                      </a:r>
-                      <a:endParaRPr lang="en-US" sz="2400" dirty="0">
-                        <a:latin typeface="맑은 고딕" charset="0"/>
-                        <a:ea typeface="맑은 고딕" charset="0"/>
-                        <a:cs typeface="맑은 고딕" charset="0"/>
-                      </a:endParaRPr>
-                    </a:p>
-                  </a:txBody>
-                  <a:tcPr marL="38100" marR="38100" marT="38100" marB="38100" anchor="ctr">
-                    <a:lnL w="12700" cap="flat" cmpd="sng" algn="ctr">
-                      <a:solidFill>
-                        <a:srgbClr val="94A3B8"/>
-                      </a:solidFill>
-                      <a:prstDash val="solid"/>
-                      <a:round/>
-                      <a:headEnd type="none" w="med" len="med"/>
-                      <a:tailEnd type="none" w="med" len="med"/>
-                    </a:lnL>
-                    <a:lnR w="12700" cap="flat" cmpd="sng" algn="ctr">
-                      <a:solidFill>
-                        <a:srgbClr val="94A3B8"/>
-                      </a:solidFill>
-                      <a:prstDash val="solid"/>
-                      <a:round/>
-                      <a:headEnd type="none" w="med" len="med"/>
-                      <a:tailEnd type="none" w="med" len="med"/>
-                    </a:lnR>
-                    <a:lnT w="12700" cap="flat" cmpd="sng" algn="ctr">
-                      <a:solidFill>
-                        <a:srgbClr val="94A3B8"/>
-                      </a:solidFill>
-                      <a:prstDash val="solid"/>
-                      <a:round/>
-                      <a:headEnd type="none" w="med" len="med"/>
-                      <a:tailEnd type="none" w="med" len="med"/>
-                    </a:lnT>
-                    <a:lnB w="12700" cap="flat" cmpd="sng" algn="ctr">
-                      <a:solidFill>
-                        <a:srgbClr val="94A3B8"/>
-                      </a:solidFill>
-                      <a:prstDash val="solid"/>
-                      <a:round/>
-                      <a:headEnd type="none" w="med" len="med"/>
-                      <a:tailEnd type="none" w="med" len="med"/>
-                    </a:lnB>
-                    <a:solidFill>
-                      <a:srgbClr val="EAF3F1"/>
-                    </a:solidFill>
-                  </a:tcPr>
-                </a:tc>
-                <a:tc>
-                  <a:txBody>
-                    <a:bodyPr/>
-                    <a:lstStyle/>
-                    <a:p>
-                      <a:pPr eaLnBrk="0" algn="ctr" indent="0" marL="0">
-                        <a:buNone/>
-                      </a:pPr>
-                      <a:r>
-                        <a:rPr lang="en-US" sz="2400" dirty="0">
-                          <a:solidFill>
-                            <a:srgbClr val="1F2937"/>
-                          </a:solidFill>
-                          <a:latin typeface="맑은 고딕" pitchFamily="34" charset="0"/>
-                          <a:ea typeface="맑은 고딕" pitchFamily="34" charset="-122"/>
-                          <a:cs typeface="맑은 고딕" pitchFamily="34" charset="-120"/>
-                        </a:rPr>
-                        <a:t>6</a:t>
-                      </a:r>
-                      <a:endParaRPr lang="en-US" sz="2400" dirty="0">
-                        <a:latin typeface="맑은 고딕" charset="0"/>
-                        <a:ea typeface="맑은 고딕" charset="0"/>
-                        <a:cs typeface="맑은 고딕" charset="0"/>
-                      </a:endParaRPr>
-                    </a:p>
-                  </a:txBody>
-                  <a:tcPr marL="38100" marR="38100" marT="38100" marB="38100" anchor="ctr">
-                    <a:lnL w="12700" cap="flat" cmpd="sng" algn="ctr">
-                      <a:solidFill>
-                        <a:srgbClr val="94A3B8"/>
-                      </a:solidFill>
-                      <a:prstDash val="solid"/>
-                      <a:round/>
-                      <a:headEnd type="none" w="med" len="med"/>
-                      <a:tailEnd type="none" w="med" len="med"/>
-                    </a:lnL>
-                    <a:lnR w="12700" cap="flat" cmpd="sng" algn="ctr">
-                      <a:solidFill>
-                        <a:srgbClr val="94A3B8"/>
-                      </a:solidFill>
-                      <a:prstDash val="solid"/>
-                      <a:round/>
-                      <a:headEnd type="none" w="med" len="med"/>
-                      <a:tailEnd type="none" w="med" len="med"/>
-                    </a:lnR>
-                    <a:lnT w="12700" cap="flat" cmpd="sng" algn="ctr">
-                      <a:solidFill>
-                        <a:srgbClr val="94A3B8"/>
-                      </a:solidFill>
-                      <a:prstDash val="solid"/>
-                      <a:round/>
-                      <a:headEnd type="none" w="med" len="med"/>
-                      <a:tailEnd type="none" w="med" len="med"/>
-                    </a:lnT>
-                    <a:lnB w="12700" cap="flat" cmpd="sng" algn="ctr">
-                      <a:solidFill>
-                        <a:srgbClr val="94A3B8"/>
-                      </a:solidFill>
-                      <a:prstDash val="solid"/>
-                      <a:round/>
-                      <a:headEnd type="none" w="med" len="med"/>
-                      <a:tailEnd type="none" w="med" len="med"/>
-                    </a:lnB>
-                    <a:solidFill>
-                      <a:srgbClr val="FFFFFF"/>
-                    </a:solidFill>
-                  </a:tcPr>
-                </a:tc>
-                <a:tc>
-                  <a:txBody>
-                    <a:bodyPr/>
-                    <a:lstStyle/>
-                    <a:p>
-                      <a:pPr eaLnBrk="0" algn="ctr" indent="0" marL="0">
-                        <a:buNone/>
-                      </a:pPr>
-                      <a:r>
-                        <a:rPr lang="en-US" sz="2400" dirty="0">
-                          <a:solidFill>
-                            <a:srgbClr val="1F2937"/>
-                          </a:solidFill>
-                          <a:latin typeface="맑은 고딕" pitchFamily="34" charset="0"/>
-                          <a:ea typeface="맑은 고딕" pitchFamily="34" charset="-122"/>
-                          <a:cs typeface="맑은 고딕" pitchFamily="34" charset="-120"/>
-                        </a:rPr>
-                        <a:t>7</a:t>
-                      </a:r>
-                      <a:endParaRPr lang="en-US" sz="2400" dirty="0">
-                        <a:latin typeface="맑은 고딕" charset="0"/>
-                        <a:ea typeface="맑은 고딕" charset="0"/>
-                        <a:cs typeface="맑은 고딕" charset="0"/>
-                      </a:endParaRPr>
-                    </a:p>
-                  </a:txBody>
-                  <a:tcPr marL="38100" marR="38100" marT="38100" marB="38100" anchor="ctr">
-                    <a:lnL w="12700" cap="flat" cmpd="sng" algn="ctr">
-                      <a:solidFill>
-                        <a:srgbClr val="94A3B8"/>
-                      </a:solidFill>
-                      <a:prstDash val="solid"/>
-                      <a:round/>
-                      <a:headEnd type="none" w="med" len="med"/>
-                      <a:tailEnd type="none" w="med" len="med"/>
-                    </a:lnL>
-                    <a:lnR w="12700" cap="flat" cmpd="sng" algn="ctr">
-                      <a:solidFill>
-                        <a:srgbClr val="94A3B8"/>
-                      </a:solidFill>
-                      <a:prstDash val="solid"/>
-                      <a:round/>
-                      <a:headEnd type="none" w="med" len="med"/>
-                      <a:tailEnd type="none" w="med" len="med"/>
-                    </a:lnR>
-                    <a:lnT w="12700" cap="flat" cmpd="sng" algn="ctr">
-                      <a:solidFill>
-                        <a:srgbClr val="94A3B8"/>
-                      </a:solidFill>
-                      <a:prstDash val="solid"/>
-                      <a:round/>
-                      <a:headEnd type="none" w="med" len="med"/>
-                      <a:tailEnd type="none" w="med" len="med"/>
-                    </a:lnT>
-                    <a:lnB w="12700" cap="flat" cmpd="sng" algn="ctr">
-                      <a:solidFill>
-                        <a:srgbClr val="94A3B8"/>
-                      </a:solidFill>
-                      <a:prstDash val="solid"/>
-                      <a:round/>
-                      <a:headEnd type="none" w="med" len="med"/>
-                      <a:tailEnd type="none" w="med" len="med"/>
-                    </a:lnB>
-                    <a:solidFill>
-                      <a:srgbClr val="FFFFFF"/>
-                    </a:solidFill>
-                  </a:tcPr>
-                </a:tc>
-                <a:tc>
-                  <a:txBody>
-                    <a:bodyPr/>
-                    <a:lstStyle/>
-                    <a:p>
-                      <a:pPr eaLnBrk="0" algn="ctr" indent="0" marL="0">
-                        <a:buNone/>
-                      </a:pPr>
-                      <a:r>
-                        <a:rPr lang="en-US" sz="2400" dirty="0">
-                          <a:solidFill>
-                            <a:srgbClr val="1F2937"/>
-                          </a:solidFill>
-                          <a:latin typeface="맑은 고딕" pitchFamily="34" charset="0"/>
-                          <a:ea typeface="맑은 고딕" pitchFamily="34" charset="-122"/>
-                          <a:cs typeface="맑은 고딕" pitchFamily="34" charset="-120"/>
-                        </a:rPr>
-                        <a:t>8</a:t>
-                      </a:r>
-                      <a:endParaRPr lang="en-US" sz="2400" dirty="0">
-                        <a:latin typeface="맑은 고딕" charset="0"/>
-                        <a:ea typeface="맑은 고딕" charset="0"/>
-                        <a:cs typeface="맑은 고딕" charset="0"/>
-                      </a:endParaRPr>
-                    </a:p>
-                  </a:txBody>
-                  <a:tcPr marL="38100" marR="38100" marT="38100" marB="38100" anchor="ctr">
-                    <a:lnL w="12700" cap="flat" cmpd="sng" algn="ctr">
-                      <a:solidFill>
-                        <a:srgbClr val="94A3B8"/>
-                      </a:solidFill>
-                      <a:prstDash val="solid"/>
-                      <a:round/>
-                      <a:headEnd type="none" w="med" len="med"/>
-                      <a:tailEnd type="none" w="med" len="med"/>
-                    </a:lnL>
-                    <a:lnR w="12700" cap="flat" cmpd="sng" algn="ctr">
-                      <a:solidFill>
-                        <a:srgbClr val="94A3B8"/>
-                      </a:solidFill>
-                      <a:prstDash val="solid"/>
-                      <a:round/>
-                      <a:headEnd type="none" w="med" len="med"/>
-                      <a:tailEnd type="none" w="med" len="med"/>
-                    </a:lnR>
-                    <a:lnT w="12700" cap="flat" cmpd="sng" algn="ctr">
-                      <a:solidFill>
-                        <a:srgbClr val="94A3B8"/>
-                      </a:solidFill>
-                      <a:prstDash val="solid"/>
-                      <a:round/>
-                      <a:headEnd type="none" w="med" len="med"/>
-                      <a:tailEnd type="none" w="med" len="med"/>
-                    </a:lnT>
-                    <a:lnB w="12700" cap="flat" cmpd="sng" algn="ctr">
-                      <a:solidFill>
-                        <a:srgbClr val="94A3B8"/>
-                      </a:solidFill>
-                      <a:prstDash val="solid"/>
-                      <a:round/>
-                      <a:headEnd type="none" w="med" len="med"/>
-                      <a:tailEnd type="none" w="med" len="med"/>
-                    </a:lnB>
-                    <a:solidFill>
-                      <a:srgbClr val="FFFFFF"/>
-                    </a:solidFill>
-                  </a:tcPr>
-                </a:tc>
-                <a:tc>
-                  <a:txBody>
-                    <a:bodyPr/>
-                    <a:lstStyle/>
-                    <a:p>
-                      <a:pPr eaLnBrk="0" algn="ctr" indent="0" marL="0">
-                        <a:buNone/>
-                      </a:pPr>
-                      <a:r>
-                        <a:rPr lang="en-US" sz="2400" dirty="0">
-                          <a:solidFill>
-                            <a:srgbClr val="1F2937"/>
-                          </a:solidFill>
-                          <a:latin typeface="맑은 고딕" pitchFamily="34" charset="0"/>
-                          <a:ea typeface="맑은 고딕" pitchFamily="34" charset="-122"/>
-                          <a:cs typeface="맑은 고딕" pitchFamily="34" charset="-120"/>
-                        </a:rPr>
-                        <a:t>9</a:t>
-                      </a:r>
-                      <a:endParaRPr lang="en-US" sz="2400" dirty="0">
-                        <a:latin typeface="맑은 고딕" charset="0"/>
-                        <a:ea typeface="맑은 고딕" charset="0"/>
-                        <a:cs typeface="맑은 고딕" charset="0"/>
-                      </a:endParaRPr>
-                    </a:p>
-                  </a:txBody>
-                  <a:tcPr marL="38100" marR="38100" marT="38100" marB="38100" anchor="ctr">
-                    <a:lnL w="12700" cap="flat" cmpd="sng" algn="ctr">
-                      <a:solidFill>
-                        <a:srgbClr val="94A3B8"/>
-                      </a:solidFill>
-                      <a:prstDash val="solid"/>
-                      <a:round/>
-                      <a:headEnd type="none" w="med" len="med"/>
-                      <a:tailEnd type="none" w="med" len="med"/>
-                    </a:lnL>
-                    <a:lnR w="12700" cap="flat" cmpd="sng" algn="ctr">
-                      <a:solidFill>
-                        <a:srgbClr val="94A3B8"/>
-                      </a:solidFill>
-                      <a:prstDash val="solid"/>
-                      <a:round/>
-                      <a:headEnd type="none" w="med" len="med"/>
-                      <a:tailEnd type="none" w="med" len="med"/>
-                    </a:lnR>
-                    <a:lnT w="12700" cap="flat" cmpd="sng" algn="ctr">
-                      <a:solidFill>
-                        <a:srgbClr val="94A3B8"/>
-                      </a:solidFill>
-                      <a:prstDash val="solid"/>
-                      <a:round/>
-                      <a:headEnd type="none" w="med" len="med"/>
-                      <a:tailEnd type="none" w="med" len="med"/>
-                    </a:lnT>
-                    <a:lnB w="12700" cap="flat" cmpd="sng" algn="ctr">
-                      <a:solidFill>
-                        <a:srgbClr val="94A3B8"/>
-                      </a:solidFill>
-                      <a:prstDash val="solid"/>
-                      <a:round/>
-                      <a:headEnd type="none" w="med" len="med"/>
-                      <a:tailEnd type="none" w="med" len="med"/>
-                    </a:lnB>
-                    <a:solidFill>
-                      <a:srgbClr val="FFFFFF"/>
-                    </a:solidFill>
-                  </a:tcPr>
-                </a:tc>
-                <a:tc>
-                  <a:txBody>
-                    <a:bodyPr/>
-                    <a:lstStyle/>
-                    <a:p>
-                      <a:pPr eaLnBrk="0" algn="ctr" indent="0" marL="0">
-                        <a:buNone/>
-                      </a:pPr>
-                      <a:r>
-                        <a:rPr lang="en-US" sz="2400" dirty="0">
-                          <a:solidFill>
-                            <a:srgbClr val="1F2937"/>
-                          </a:solidFill>
-                          <a:latin typeface="맑은 고딕" pitchFamily="34" charset="0"/>
-                          <a:ea typeface="맑은 고딕" pitchFamily="34" charset="-122"/>
-                          <a:cs typeface="맑은 고딕" pitchFamily="34" charset="-120"/>
-                        </a:rPr>
-                        <a:t>10</a:t>
-                      </a:r>
-                      <a:endParaRPr lang="en-US" sz="2400" dirty="0">
-                        <a:latin typeface="맑은 고딕" charset="0"/>
-                        <a:ea typeface="맑은 고딕" charset="0"/>
-                        <a:cs typeface="맑은 고딕" charset="0"/>
-                      </a:endParaRPr>
-                    </a:p>
-                  </a:txBody>
-                  <a:tcPr marL="38100" marR="38100" marT="38100" marB="38100" anchor="ctr">
-                    <a:lnL w="12700" cap="flat" cmpd="sng" algn="ctr">
-                      <a:solidFill>
-                        <a:srgbClr val="94A3B8"/>
-                      </a:solidFill>
-                      <a:prstDash val="solid"/>
-                      <a:round/>
-                      <a:headEnd type="none" w="med" len="med"/>
-                      <a:tailEnd type="none" w="med" len="med"/>
-                    </a:lnL>
-                    <a:lnR w="12700" cap="flat" cmpd="sng" algn="ctr">
-                      <a:solidFill>
-                        <a:srgbClr val="94A3B8"/>
-                      </a:solidFill>
-                      <a:prstDash val="solid"/>
-                      <a:round/>
-                      <a:headEnd type="none" w="med" len="med"/>
-                      <a:tailEnd type="none" w="med" len="med"/>
-                    </a:lnR>
-                    <a:lnT w="12700" cap="flat" cmpd="sng" algn="ctr">
-                      <a:solidFill>
-                        <a:srgbClr val="94A3B8"/>
-                      </a:solidFill>
-                      <a:prstDash val="solid"/>
-                      <a:round/>
-                      <a:headEnd type="none" w="med" len="med"/>
-                      <a:tailEnd type="none" w="med" len="med"/>
-                    </a:lnT>
-                    <a:lnB w="12700" cap="flat" cmpd="sng" algn="ctr">
-                      <a:solidFill>
-                        <a:srgbClr val="94A3B8"/>
-                      </a:solidFill>
-                      <a:prstDash val="solid"/>
-                      <a:round/>
-                      <a:headEnd type="none" w="med" len="med"/>
-                      <a:tailEnd type="none" w="med" len="med"/>
-                    </a:lnB>
-                    <a:solidFill>
-                      <a:srgbClr val="FFFFFF"/>
-                    </a:solidFill>
-                  </a:tcPr>
-                </a:tc>
-              </a:tr>
-            </a:tbl>
-          </a:graphicData>
-        </a:graphic>
-      </p:graphicFrame>
-      <p:sp>
-        <p:nvSpPr>
-          <p:cNvPr id="25" name="Slide Number Placeholder 0"/>
-          <p:cNvSpPr>
-            <a:spLocks noGrp="1"/>
-          </p:cNvSpPr>
-          <p:nvPr>
-            <p:ph type="sldNum" sz="quarter" idx="4294967295"/>
-          </p:nvPr>
-        </p:nvSpPr>
-        <p:spPr>
-          <a:xfrm>
-            <a:off x="10881360" y="6382512"/>
-            <a:ext cx="731520" cy="320040"/>
-          </a:xfrm>
-          <a:prstGeom prst="rect">
-            <a:avLst/>
-          </a:prstGeom>
-          <a:extLst>
-            <a:ext uri="{C572A759-6A51-4108-AA02-DFA0A04FC94B}">
-              <ma14:wrappingTextBoxFlag xmlns:ma14="http://schemas.microsoft.com/office/mac/drawingml/2011/main" val="0"/>
-            </a:ext>
-          </a:extLst>
-        </p:spPr>
-        <p:txBody>
-          <a:bodyPr/>
-          <a:lstStyle>
-            <a:lvl1pPr>
-              <a:defRPr sz="1200">
-                <a:solidFill>
-                  <a:srgbClr val="4B5563"/>
-                </a:solidFill>
-                <a:latin typeface="맑은 고딕"/>
-                <a:ea typeface="맑은 고딕"/>
-                <a:cs typeface="맑은 고딕"/>
-              </a:defRPr>
-            </a:lvl1pPr>
-          </a:lstStyle>
-          <a:p>
-            <a:pPr eaLnBrk="0" algn="r"/>
-            <a:fld id="{F7021451-1387-4CA6-816F-3879F97B5CBC}" type="slidenum">
-              <a:rPr b="0" lang="en-US"/>
-              <a:t>8</a:t>
-            </a:fld>
-            <a:endParaRPr lang="en-US"/>
-          </a:p>
-        </p:txBody>
-      </p:sp>
-    </p:spTree>
-  </p:cSld>
-  <p:clrMapOvr>
-    <a:masterClrMapping/>
-  </p:clrMapOvr>
-</p:sld>
-</file>
-
-<file path=ppt/slides/slide9.xml><?xml version="1.0" encoding="utf-8"?>
-<p:sld xmlns:a="http://schemas.openxmlformats.org/drawingml/2006/main" xmlns:r="http://schemas.openxmlformats.org/officeDocument/2006/relationships" xmlns:p="http://schemas.openxmlformats.org/presentationml/2006/main">
-  <p:cSld name="Slide 9">
-    <p:spTree>
-      <p:nvGrpSpPr>
-        <p:cNvPr id="1" name=""/>
-        <p:cNvGrpSpPr/>
-        <p:nvPr/>
-      </p:nvGrpSpPr>
-      <p:grpSpPr>
-        <a:xfrm>
-          <a:off x="0" y="0"/>
-          <a:ext cx="0" cy="0"/>
-          <a:chOff x="0" y="0"/>
-          <a:chExt cx="0" cy="0"/>
-        </a:xfrm>
-      </p:grpSpPr>
-      <p:sp>
-        <p:nvSpPr>
-          <p:cNvPr id="2" name="Text 0"/>
-          <p:cNvSpPr/>
-          <p:nvPr>
-            <p:ph idx="100" type="title" hasCustomPrompt="1"/>
-          </p:nvPr>
-        </p:nvSpPr>
-        <p:spPr>
-          <a:xfrm>
-            <a:off x="548640" y="320040"/>
-            <a:ext cx="11064240" cy="868680"/>
-          </a:xfrm>
-          <a:prstGeom prst="rect">
-            <a:avLst/>
-          </a:prstGeom>
-          <a:noFill/>
-          <a:ln/>
-        </p:spPr>
-        <p:txBody>
-          <a:bodyPr wrap="square" lIns="0" tIns="0" rIns="0" bIns="0" rtlCol="0" anchor="ctr"/>
-          <a:lstStyle/>
-          <a:p>
-            <a:pPr eaLnBrk="0" algn="l" indent="0" marL="0">
-              <a:buNone/>
-            </a:pPr>
-            <a:r>
-              <a:rPr lang="ko-KR" altLang="en-US" sz="4400" b="1" dirty="0">
-                <a:solidFill>
-                  <a:srgbClr val="1F2937"/>
-                </a:solidFill>
-                <a:latin typeface="맑은 고딕" pitchFamily="34" charset="0"/>
-                <a:ea typeface="맑은 고딕" pitchFamily="34" charset="-122"/>
-                <a:cs typeface="맑은 고딕" pitchFamily="34" charset="-120"/>
-              </a:rPr>
-              <a:t>비스듬히 보면</a:t>
-            </a:r>
-            <a:endParaRPr lang="ko-KR" sz="4400" dirty="0"/>
-          </a:p>
-        </p:txBody>
-      </p:sp>
-      <p:sp>
-        <p:nvSpPr>
-          <p:cNvPr id="3" name="S09-card104"/>
-          <p:cNvSpPr/>
-          <p:nvPr/>
-        </p:nvSpPr>
-        <p:spPr>
-          <a:xfrm>
-            <a:off x="548640" y="4897120"/>
-            <a:ext cx="5431536" cy="1320800"/>
-          </a:xfrm>
-          <a:prstGeom prst="roundRect">
-            <a:avLst>
-              <a:gd name="adj" fmla="val 8308"/>
-            </a:avLst>
-          </a:prstGeom>
-          <a:solidFill>
-            <a:srgbClr val="EAF3F1"/>
-          </a:solidFill>
-          <a:ln w="12700">
-            <a:solidFill>
-              <a:srgbClr val="EAF3F1"/>
-            </a:solidFill>
-            <a:prstDash val="solid"/>
-          </a:ln>
-        </p:spPr>
-      </p:sp>
-      <p:sp>
-        <p:nvSpPr>
-          <p:cNvPr id="4" name="S09-cardtext105"/>
-          <p:cNvSpPr txBox="1"/>
-          <p:nvPr/>
-        </p:nvSpPr>
-        <p:spPr>
-          <a:xfrm>
-            <a:off x="822960" y="5034280"/>
-            <a:ext cx="4882896" cy="1046480"/>
-          </a:xfrm>
-          <a:prstGeom prst="rect">
-            <a:avLst/>
-          </a:prstGeom>
-          <a:noFill/>
-          <a:ln/>
-        </p:spPr>
-        <p:txBody>
-          <a:bodyPr wrap="square" lIns="0" tIns="0" rIns="0" bIns="0" rtlCol="0" anchor="ctr"/>
-          <a:lstStyle/>
-          <a:p>
-            <a:pPr eaLnBrk="0" indent="0" marL="0">
-              <a:spcAft>
-                <a:spcPts val="600"/>
-              </a:spcAft>
-              <a:buNone/>
-            </a:pPr>
-            <a:r>
-              <a:rPr lang="ko-KR" altLang="en-US" sz="3200" dirty="0">
-                <a:solidFill>
-                  <a:srgbClr val="1F2937"/>
-                </a:solidFill>
-                <a:latin typeface="맑은 고딕" pitchFamily="34" charset="0"/>
-                <a:ea typeface="맑은 고딕" pitchFamily="34" charset="-122"/>
-                <a:cs typeface="맑은 고딕" pitchFamily="34" charset="-120"/>
-              </a:rPr>
-              <a:t>↘ 2, 4, 6, 8, 10: 2씩 커져요.</a:t>
-            </a:r>
-            <a:endParaRPr lang="ko-KR" sz="3200" dirty="0"/>
-          </a:p>
-        </p:txBody>
-      </p:sp>
-      <p:sp>
-        <p:nvSpPr>
-          <p:cNvPr id="5" name="S09-card106"/>
-          <p:cNvSpPr/>
-          <p:nvPr/>
-        </p:nvSpPr>
-        <p:spPr>
-          <a:xfrm>
-            <a:off x="6208776" y="4897120"/>
-            <a:ext cx="5431536" cy="1320800"/>
-          </a:xfrm>
-          <a:prstGeom prst="roundRect">
-            <a:avLst>
-              <a:gd name="adj" fmla="val 8308"/>
-            </a:avLst>
-          </a:prstGeom>
-          <a:solidFill>
-            <a:srgbClr val="EAF3F1"/>
-          </a:solidFill>
-          <a:ln w="12700">
-            <a:solidFill>
-              <a:srgbClr val="EAF3F1"/>
-            </a:solidFill>
-            <a:prstDash val="solid"/>
-          </a:ln>
-        </p:spPr>
-      </p:sp>
-      <p:sp>
-        <p:nvSpPr>
-          <p:cNvPr id="6" name="S09-cardtext107"/>
-          <p:cNvSpPr txBox="1"/>
-          <p:nvPr/>
-        </p:nvSpPr>
-        <p:spPr>
-          <a:xfrm>
-            <a:off x="6483096" y="5034280"/>
-            <a:ext cx="4882896" cy="1046480"/>
-          </a:xfrm>
-          <a:prstGeom prst="rect">
-            <a:avLst/>
-          </a:prstGeom>
-          <a:noFill/>
-          <a:ln/>
-        </p:spPr>
-        <p:txBody>
-          <a:bodyPr wrap="square" lIns="0" tIns="0" rIns="0" bIns="0" rtlCol="0" anchor="ctr"/>
-          <a:lstStyle/>
-          <a:p>
-            <a:pPr eaLnBrk="0" indent="0" marL="0">
-              <a:spcAft>
-                <a:spcPts val="600"/>
-              </a:spcAft>
-              <a:buNone/>
-            </a:pPr>
-            <a:r>
-              <a:rPr lang="ko-KR" altLang="en-US" sz="3200" dirty="0">
-                <a:solidFill>
-                  <a:srgbClr val="1F2937"/>
-                </a:solidFill>
-                <a:latin typeface="맑은 고딕" pitchFamily="34" charset="0"/>
-                <a:ea typeface="맑은 고딕" pitchFamily="34" charset="-122"/>
-                <a:cs typeface="맑은 고딕" pitchFamily="34" charset="-120"/>
-              </a:rPr>
-              <a:t>↙ 6, 6, 6, 6, 6: 모두 같아요.</a:t>
-            </a:r>
-            <a:endParaRPr lang="ko-KR" sz="3200" dirty="0"/>
-          </a:p>
-        </p:txBody>
-      </p:sp>
-      <p:graphicFrame>
-        <p:nvGraphicFramePr>
-          <p:cNvPr id="10" name="S09-table108"/>
-          <p:cNvGraphicFramePr>
-            <a:graphicFrameLocks noGrp="1"/>
-          </p:cNvGraphicFramePr>
-          <p:nvPr>
-            <p:extLst>
-              <p:ext uri="{D42A27DB-BD31-4B8C-83A1-F6EECF244321}">
-                <p14:modId xmlns:p14="http://schemas.microsoft.com/office/powerpoint/2010/main" val="1579011935"/>
-              </p:ext>
-            </p:extLst>
-          </p:nvPr>
-        </p:nvGraphicFramePr>
-        <p:xfrm>
-          <a:off x="1156716" y="1412240"/>
-          <a:ext cx="9875520" cy="914400"/>
-        </p:xfrm>
-        <a:graphic>
-          <a:graphicData uri="http://schemas.openxmlformats.org/drawingml/2006/table">
-            <a:tbl>
-              <a:tblPr/>
-              <a:tblGrid>
-                <a:gridCol w="1645920"/>
-                <a:gridCol w="1645920"/>
-                <a:gridCol w="1645920"/>
-                <a:gridCol w="1645920"/>
-                <a:gridCol w="1645920"/>
-                <a:gridCol w="1645920"/>
-              </a:tblGrid>
-              <a:tr h="528320">
+              <a:tr h="511810">
                 <a:tc>
                   <a:txBody>
                     <a:bodyPr/>
@@ -21372,7 +18626,7 @@
                   </a:tcPr>
                 </a:tc>
               </a:tr>
-              <a:tr h="528320">
+              <a:tr h="511810">
                 <a:tc>
                   <a:txBody>
                     <a:bodyPr/>
@@ -21782,7 +19036,7 @@
                   </a:tcPr>
                 </a:tc>
               </a:tr>
-              <a:tr h="528320">
+              <a:tr h="511810">
                 <a:tc>
                   <a:txBody>
                     <a:bodyPr/>
@@ -22192,7 +19446,7 @@
                   </a:tcPr>
                 </a:tc>
               </a:tr>
-              <a:tr h="528320">
+              <a:tr h="511810">
                 <a:tc>
                   <a:txBody>
                     <a:bodyPr/>
@@ -22602,7 +19856,7 @@
                   </a:tcPr>
                 </a:tc>
               </a:tr>
-              <a:tr h="528320">
+              <a:tr h="511810">
                 <a:tc>
                   <a:txBody>
                     <a:bodyPr/>
@@ -23012,7 +20266,2753 @@
                   </a:tcPr>
                 </a:tc>
               </a:tr>
-              <a:tr h="528320">
+              <a:tr h="511810">
+                <a:tc>
+                  <a:txBody>
+                    <a:bodyPr/>
+                    <a:lstStyle/>
+                    <a:p>
+                      <a:pPr eaLnBrk="0" algn="ctr" indent="0" marL="0">
+                        <a:buNone/>
+                      </a:pPr>
+                      <a:r>
+                        <a:rPr lang="en-US" sz="2600" b="1" dirty="0">
+                          <a:solidFill>
+                            <a:srgbClr val="1F2937"/>
+                          </a:solidFill>
+                          <a:latin typeface="맑은 고딕" pitchFamily="34" charset="0"/>
+                          <a:ea typeface="맑은 고딕" pitchFamily="34" charset="-122"/>
+                          <a:cs typeface="맑은 고딕" pitchFamily="34" charset="-120"/>
+                        </a:rPr>
+                        <a:t>5</a:t>
+                      </a:r>
+                      <a:endParaRPr lang="en-US" sz="2600" dirty="0">
+                        <a:latin typeface="맑은 고딕" charset="0"/>
+                        <a:ea typeface="맑은 고딕" charset="0"/>
+                        <a:cs typeface="맑은 고딕" charset="0"/>
+                      </a:endParaRPr>
+                    </a:p>
+                  </a:txBody>
+                  <a:tcPr marL="38100" marR="38100" marT="38100" marB="38100" anchor="ctr">
+                    <a:lnL w="12700" cap="flat" cmpd="sng" algn="ctr">
+                      <a:solidFill>
+                        <a:srgbClr val="94A3B8"/>
+                      </a:solidFill>
+                      <a:prstDash val="solid"/>
+                      <a:round/>
+                      <a:headEnd type="none" w="med" len="med"/>
+                      <a:tailEnd type="none" w="med" len="med"/>
+                    </a:lnL>
+                    <a:lnR w="12700" cap="flat" cmpd="sng" algn="ctr">
+                      <a:solidFill>
+                        <a:srgbClr val="94A3B8"/>
+                      </a:solidFill>
+                      <a:prstDash val="solid"/>
+                      <a:round/>
+                      <a:headEnd type="none" w="med" len="med"/>
+                      <a:tailEnd type="none" w="med" len="med"/>
+                    </a:lnR>
+                    <a:lnT w="12700" cap="flat" cmpd="sng" algn="ctr">
+                      <a:solidFill>
+                        <a:srgbClr val="94A3B8"/>
+                      </a:solidFill>
+                      <a:prstDash val="solid"/>
+                      <a:round/>
+                      <a:headEnd type="none" w="med" len="med"/>
+                      <a:tailEnd type="none" w="med" len="med"/>
+                    </a:lnT>
+                    <a:lnB w="12700" cap="flat" cmpd="sng" algn="ctr">
+                      <a:solidFill>
+                        <a:srgbClr val="94A3B8"/>
+                      </a:solidFill>
+                      <a:prstDash val="solid"/>
+                      <a:round/>
+                      <a:headEnd type="none" w="med" len="med"/>
+                      <a:tailEnd type="none" w="med" len="med"/>
+                    </a:lnB>
+                    <a:solidFill>
+                      <a:srgbClr val="EAF3F1"/>
+                    </a:solidFill>
+                  </a:tcPr>
+                </a:tc>
+                <a:tc>
+                  <a:txBody>
+                    <a:bodyPr/>
+                    <a:lstStyle/>
+                    <a:p>
+                      <a:pPr eaLnBrk="0" algn="ctr" indent="0" marL="0">
+                        <a:buNone/>
+                      </a:pPr>
+                      <a:r>
+                        <a:rPr lang="en-US" sz="2600" dirty="0">
+                          <a:solidFill>
+                            <a:srgbClr val="1F2937"/>
+                          </a:solidFill>
+                          <a:latin typeface="맑은 고딕" pitchFamily="34" charset="0"/>
+                          <a:ea typeface="맑은 고딕" pitchFamily="34" charset="-122"/>
+                          <a:cs typeface="맑은 고딕" pitchFamily="34" charset="-120"/>
+                        </a:rPr>
+                        <a:t>6</a:t>
+                      </a:r>
+                      <a:endParaRPr lang="en-US" sz="2600" dirty="0">
+                        <a:latin typeface="맑은 고딕" charset="0"/>
+                        <a:ea typeface="맑은 고딕" charset="0"/>
+                        <a:cs typeface="맑은 고딕" charset="0"/>
+                      </a:endParaRPr>
+                    </a:p>
+                  </a:txBody>
+                  <a:tcPr marL="38100" marR="38100" marT="38100" marB="38100" anchor="ctr">
+                    <a:lnL w="12700" cap="flat" cmpd="sng" algn="ctr">
+                      <a:solidFill>
+                        <a:srgbClr val="94A3B8"/>
+                      </a:solidFill>
+                      <a:prstDash val="solid"/>
+                      <a:round/>
+                      <a:headEnd type="none" w="med" len="med"/>
+                      <a:tailEnd type="none" w="med" len="med"/>
+                    </a:lnL>
+                    <a:lnR w="12700" cap="flat" cmpd="sng" algn="ctr">
+                      <a:solidFill>
+                        <a:srgbClr val="94A3B8"/>
+                      </a:solidFill>
+                      <a:prstDash val="solid"/>
+                      <a:round/>
+                      <a:headEnd type="none" w="med" len="med"/>
+                      <a:tailEnd type="none" w="med" len="med"/>
+                    </a:lnR>
+                    <a:lnT w="12700" cap="flat" cmpd="sng" algn="ctr">
+                      <a:solidFill>
+                        <a:srgbClr val="94A3B8"/>
+                      </a:solidFill>
+                      <a:prstDash val="solid"/>
+                      <a:round/>
+                      <a:headEnd type="none" w="med" len="med"/>
+                      <a:tailEnd type="none" w="med" len="med"/>
+                    </a:lnT>
+                    <a:lnB w="12700" cap="flat" cmpd="sng" algn="ctr">
+                      <a:solidFill>
+                        <a:srgbClr val="94A3B8"/>
+                      </a:solidFill>
+                      <a:prstDash val="solid"/>
+                      <a:round/>
+                      <a:headEnd type="none" w="med" len="med"/>
+                      <a:tailEnd type="none" w="med" len="med"/>
+                    </a:lnB>
+                    <a:solidFill>
+                      <a:srgbClr val="FFFFFF"/>
+                    </a:solidFill>
+                  </a:tcPr>
+                </a:tc>
+                <a:tc>
+                  <a:txBody>
+                    <a:bodyPr/>
+                    <a:lstStyle/>
+                    <a:p>
+                      <a:pPr eaLnBrk="0" algn="ctr" indent="0" marL="0">
+                        <a:buNone/>
+                      </a:pPr>
+                      <a:r>
+                        <a:rPr lang="en-US" sz="2600" dirty="0">
+                          <a:solidFill>
+                            <a:srgbClr val="1F2937"/>
+                          </a:solidFill>
+                          <a:latin typeface="맑은 고딕" pitchFamily="34" charset="0"/>
+                          <a:ea typeface="맑은 고딕" pitchFamily="34" charset="-122"/>
+                          <a:cs typeface="맑은 고딕" pitchFamily="34" charset="-120"/>
+                        </a:rPr>
+                        <a:t>7</a:t>
+                      </a:r>
+                      <a:endParaRPr lang="en-US" sz="2600" dirty="0">
+                        <a:latin typeface="맑은 고딕" charset="0"/>
+                        <a:ea typeface="맑은 고딕" charset="0"/>
+                        <a:cs typeface="맑은 고딕" charset="0"/>
+                      </a:endParaRPr>
+                    </a:p>
+                  </a:txBody>
+                  <a:tcPr marL="38100" marR="38100" marT="38100" marB="38100" anchor="ctr">
+                    <a:lnL w="12700" cap="flat" cmpd="sng" algn="ctr">
+                      <a:solidFill>
+                        <a:srgbClr val="94A3B8"/>
+                      </a:solidFill>
+                      <a:prstDash val="solid"/>
+                      <a:round/>
+                      <a:headEnd type="none" w="med" len="med"/>
+                      <a:tailEnd type="none" w="med" len="med"/>
+                    </a:lnL>
+                    <a:lnR w="12700" cap="flat" cmpd="sng" algn="ctr">
+                      <a:solidFill>
+                        <a:srgbClr val="94A3B8"/>
+                      </a:solidFill>
+                      <a:prstDash val="solid"/>
+                      <a:round/>
+                      <a:headEnd type="none" w="med" len="med"/>
+                      <a:tailEnd type="none" w="med" len="med"/>
+                    </a:lnR>
+                    <a:lnT w="12700" cap="flat" cmpd="sng" algn="ctr">
+                      <a:solidFill>
+                        <a:srgbClr val="94A3B8"/>
+                      </a:solidFill>
+                      <a:prstDash val="solid"/>
+                      <a:round/>
+                      <a:headEnd type="none" w="med" len="med"/>
+                      <a:tailEnd type="none" w="med" len="med"/>
+                    </a:lnT>
+                    <a:lnB w="12700" cap="flat" cmpd="sng" algn="ctr">
+                      <a:solidFill>
+                        <a:srgbClr val="94A3B8"/>
+                      </a:solidFill>
+                      <a:prstDash val="solid"/>
+                      <a:round/>
+                      <a:headEnd type="none" w="med" len="med"/>
+                      <a:tailEnd type="none" w="med" len="med"/>
+                    </a:lnB>
+                    <a:solidFill>
+                      <a:srgbClr val="FFFFFF"/>
+                    </a:solidFill>
+                  </a:tcPr>
+                </a:tc>
+                <a:tc>
+                  <a:txBody>
+                    <a:bodyPr/>
+                    <a:lstStyle/>
+                    <a:p>
+                      <a:pPr eaLnBrk="0" algn="ctr" indent="0" marL="0">
+                        <a:buNone/>
+                      </a:pPr>
+                      <a:r>
+                        <a:rPr lang="en-US" sz="2600" dirty="0">
+                          <a:solidFill>
+                            <a:srgbClr val="1F2937"/>
+                          </a:solidFill>
+                          <a:latin typeface="맑은 고딕" pitchFamily="34" charset="0"/>
+                          <a:ea typeface="맑은 고딕" pitchFamily="34" charset="-122"/>
+                          <a:cs typeface="맑은 고딕" pitchFamily="34" charset="-120"/>
+                        </a:rPr>
+                        <a:t>8</a:t>
+                      </a:r>
+                      <a:endParaRPr lang="en-US" sz="2600" dirty="0">
+                        <a:latin typeface="맑은 고딕" charset="0"/>
+                        <a:ea typeface="맑은 고딕" charset="0"/>
+                        <a:cs typeface="맑은 고딕" charset="0"/>
+                      </a:endParaRPr>
+                    </a:p>
+                  </a:txBody>
+                  <a:tcPr marL="38100" marR="38100" marT="38100" marB="38100" anchor="ctr">
+                    <a:lnL w="12700" cap="flat" cmpd="sng" algn="ctr">
+                      <a:solidFill>
+                        <a:srgbClr val="94A3B8"/>
+                      </a:solidFill>
+                      <a:prstDash val="solid"/>
+                      <a:round/>
+                      <a:headEnd type="none" w="med" len="med"/>
+                      <a:tailEnd type="none" w="med" len="med"/>
+                    </a:lnL>
+                    <a:lnR w="12700" cap="flat" cmpd="sng" algn="ctr">
+                      <a:solidFill>
+                        <a:srgbClr val="94A3B8"/>
+                      </a:solidFill>
+                      <a:prstDash val="solid"/>
+                      <a:round/>
+                      <a:headEnd type="none" w="med" len="med"/>
+                      <a:tailEnd type="none" w="med" len="med"/>
+                    </a:lnR>
+                    <a:lnT w="12700" cap="flat" cmpd="sng" algn="ctr">
+                      <a:solidFill>
+                        <a:srgbClr val="94A3B8"/>
+                      </a:solidFill>
+                      <a:prstDash val="solid"/>
+                      <a:round/>
+                      <a:headEnd type="none" w="med" len="med"/>
+                      <a:tailEnd type="none" w="med" len="med"/>
+                    </a:lnT>
+                    <a:lnB w="12700" cap="flat" cmpd="sng" algn="ctr">
+                      <a:solidFill>
+                        <a:srgbClr val="94A3B8"/>
+                      </a:solidFill>
+                      <a:prstDash val="solid"/>
+                      <a:round/>
+                      <a:headEnd type="none" w="med" len="med"/>
+                      <a:tailEnd type="none" w="med" len="med"/>
+                    </a:lnB>
+                    <a:solidFill>
+                      <a:srgbClr val="FFFFFF"/>
+                    </a:solidFill>
+                  </a:tcPr>
+                </a:tc>
+                <a:tc>
+                  <a:txBody>
+                    <a:bodyPr/>
+                    <a:lstStyle/>
+                    <a:p>
+                      <a:pPr eaLnBrk="0" algn="ctr" indent="0" marL="0">
+                        <a:buNone/>
+                      </a:pPr>
+                      <a:r>
+                        <a:rPr lang="en-US" sz="2600" dirty="0">
+                          <a:solidFill>
+                            <a:srgbClr val="1F2937"/>
+                          </a:solidFill>
+                          <a:latin typeface="맑은 고딕" pitchFamily="34" charset="0"/>
+                          <a:ea typeface="맑은 고딕" pitchFamily="34" charset="-122"/>
+                          <a:cs typeface="맑은 고딕" pitchFamily="34" charset="-120"/>
+                        </a:rPr>
+                        <a:t>9</a:t>
+                      </a:r>
+                      <a:endParaRPr lang="en-US" sz="2600" dirty="0">
+                        <a:latin typeface="맑은 고딕" charset="0"/>
+                        <a:ea typeface="맑은 고딕" charset="0"/>
+                        <a:cs typeface="맑은 고딕" charset="0"/>
+                      </a:endParaRPr>
+                    </a:p>
+                  </a:txBody>
+                  <a:tcPr marL="38100" marR="38100" marT="38100" marB="38100" anchor="ctr">
+                    <a:lnL w="12700" cap="flat" cmpd="sng" algn="ctr">
+                      <a:solidFill>
+                        <a:srgbClr val="94A3B8"/>
+                      </a:solidFill>
+                      <a:prstDash val="solid"/>
+                      <a:round/>
+                      <a:headEnd type="none" w="med" len="med"/>
+                      <a:tailEnd type="none" w="med" len="med"/>
+                    </a:lnL>
+                    <a:lnR w="12700" cap="flat" cmpd="sng" algn="ctr">
+                      <a:solidFill>
+                        <a:srgbClr val="94A3B8"/>
+                      </a:solidFill>
+                      <a:prstDash val="solid"/>
+                      <a:round/>
+                      <a:headEnd type="none" w="med" len="med"/>
+                      <a:tailEnd type="none" w="med" len="med"/>
+                    </a:lnR>
+                    <a:lnT w="12700" cap="flat" cmpd="sng" algn="ctr">
+                      <a:solidFill>
+                        <a:srgbClr val="94A3B8"/>
+                      </a:solidFill>
+                      <a:prstDash val="solid"/>
+                      <a:round/>
+                      <a:headEnd type="none" w="med" len="med"/>
+                      <a:tailEnd type="none" w="med" len="med"/>
+                    </a:lnT>
+                    <a:lnB w="12700" cap="flat" cmpd="sng" algn="ctr">
+                      <a:solidFill>
+                        <a:srgbClr val="94A3B8"/>
+                      </a:solidFill>
+                      <a:prstDash val="solid"/>
+                      <a:round/>
+                      <a:headEnd type="none" w="med" len="med"/>
+                      <a:tailEnd type="none" w="med" len="med"/>
+                    </a:lnB>
+                    <a:solidFill>
+                      <a:srgbClr val="FFFFFF"/>
+                    </a:solidFill>
+                  </a:tcPr>
+                </a:tc>
+                <a:tc>
+                  <a:txBody>
+                    <a:bodyPr/>
+                    <a:lstStyle/>
+                    <a:p>
+                      <a:pPr eaLnBrk="0" algn="ctr" indent="0" marL="0">
+                        <a:buNone/>
+                      </a:pPr>
+                      <a:r>
+                        <a:rPr lang="en-US" sz="2600" dirty="0">
+                          <a:solidFill>
+                            <a:srgbClr val="1F2937"/>
+                          </a:solidFill>
+                          <a:latin typeface="맑은 고딕" pitchFamily="34" charset="0"/>
+                          <a:ea typeface="맑은 고딕" pitchFamily="34" charset="-122"/>
+                          <a:cs typeface="맑은 고딕" pitchFamily="34" charset="-120"/>
+                        </a:rPr>
+                        <a:t>10</a:t>
+                      </a:r>
+                      <a:endParaRPr lang="en-US" sz="2600" dirty="0">
+                        <a:latin typeface="맑은 고딕" charset="0"/>
+                        <a:ea typeface="맑은 고딕" charset="0"/>
+                        <a:cs typeface="맑은 고딕" charset="0"/>
+                      </a:endParaRPr>
+                    </a:p>
+                  </a:txBody>
+                  <a:tcPr marL="38100" marR="38100" marT="38100" marB="38100" anchor="ctr">
+                    <a:lnL w="12700" cap="flat" cmpd="sng" algn="ctr">
+                      <a:solidFill>
+                        <a:srgbClr val="94A3B8"/>
+                      </a:solidFill>
+                      <a:prstDash val="solid"/>
+                      <a:round/>
+                      <a:headEnd type="none" w="med" len="med"/>
+                      <a:tailEnd type="none" w="med" len="med"/>
+                    </a:lnL>
+                    <a:lnR w="12700" cap="flat" cmpd="sng" algn="ctr">
+                      <a:solidFill>
+                        <a:srgbClr val="94A3B8"/>
+                      </a:solidFill>
+                      <a:prstDash val="solid"/>
+                      <a:round/>
+                      <a:headEnd type="none" w="med" len="med"/>
+                      <a:tailEnd type="none" w="med" len="med"/>
+                    </a:lnR>
+                    <a:lnT w="12700" cap="flat" cmpd="sng" algn="ctr">
+                      <a:solidFill>
+                        <a:srgbClr val="94A3B8"/>
+                      </a:solidFill>
+                      <a:prstDash val="solid"/>
+                      <a:round/>
+                      <a:headEnd type="none" w="med" len="med"/>
+                      <a:tailEnd type="none" w="med" len="med"/>
+                    </a:lnT>
+                    <a:lnB w="12700" cap="flat" cmpd="sng" algn="ctr">
+                      <a:solidFill>
+                        <a:srgbClr val="94A3B8"/>
+                      </a:solidFill>
+                      <a:prstDash val="solid"/>
+                      <a:round/>
+                      <a:headEnd type="none" w="med" len="med"/>
+                      <a:tailEnd type="none" w="med" len="med"/>
+                    </a:lnB>
+                    <a:solidFill>
+                      <a:srgbClr val="FFFFFF"/>
+                    </a:solidFill>
+                  </a:tcPr>
+                </a:tc>
+              </a:tr>
+            </a:tbl>
+          </a:graphicData>
+        </a:graphic>
+      </p:graphicFrame>
+      <p:sp>
+        <p:nvSpPr>
+          <p:cNvPr id="25" name="Slide Number Placeholder 0"/>
+          <p:cNvSpPr>
+            <a:spLocks noGrp="1"/>
+          </p:cNvSpPr>
+          <p:nvPr>
+            <p:ph type="sldNum" sz="quarter" idx="4294967295"/>
+          </p:nvPr>
+        </p:nvSpPr>
+        <p:spPr>
+          <a:xfrm>
+            <a:off x="10881360" y="6382512"/>
+            <a:ext cx="731520" cy="320040"/>
+          </a:xfrm>
+          <a:prstGeom prst="rect">
+            <a:avLst/>
+          </a:prstGeom>
+          <a:extLst>
+            <a:ext uri="{C572A759-6A51-4108-AA02-DFA0A04FC94B}">
+              <ma14:wrappingTextBoxFlag xmlns:ma14="http://schemas.microsoft.com/office/mac/drawingml/2011/main" val="0"/>
+            </a:ext>
+          </a:extLst>
+        </p:spPr>
+        <p:txBody>
+          <a:bodyPr/>
+          <a:lstStyle>
+            <a:lvl1pPr>
+              <a:defRPr sz="1200">
+                <a:solidFill>
+                  <a:srgbClr val="4B5563"/>
+                </a:solidFill>
+                <a:latin typeface="맑은 고딕"/>
+                <a:ea typeface="맑은 고딕"/>
+                <a:cs typeface="맑은 고딕"/>
+              </a:defRPr>
+            </a:lvl1pPr>
+          </a:lstStyle>
+          <a:p>
+            <a:pPr eaLnBrk="0" algn="r"/>
+            <a:fld id="{F7021451-1387-4CA6-816F-3879F97B5CBC}" type="slidenum">
+              <a:rPr b="0" lang="en-US"/>
+              <a:t>8</a:t>
+            </a:fld>
+            <a:endParaRPr lang="en-US"/>
+          </a:p>
+        </p:txBody>
+      </p:sp>
+    </p:spTree>
+  </p:cSld>
+  <p:clrMapOvr>
+    <a:masterClrMapping/>
+  </p:clrMapOvr>
+</p:sld>
+</file>
+
+<file path=ppt/slides/slide9.xml><?xml version="1.0" encoding="utf-8"?>
+<p:sld xmlns:a="http://schemas.openxmlformats.org/drawingml/2006/main" xmlns:r="http://schemas.openxmlformats.org/officeDocument/2006/relationships" xmlns:p="http://schemas.openxmlformats.org/presentationml/2006/main">
+  <p:cSld name="Slide 9">
+    <p:spTree>
+      <p:nvGrpSpPr>
+        <p:cNvPr id="1" name=""/>
+        <p:cNvGrpSpPr/>
+        <p:nvPr/>
+      </p:nvGrpSpPr>
+      <p:grpSpPr>
+        <a:xfrm>
+          <a:off x="0" y="0"/>
+          <a:ext cx="0" cy="0"/>
+          <a:chOff x="0" y="0"/>
+          <a:chExt cx="0" cy="0"/>
+        </a:xfrm>
+      </p:grpSpPr>
+      <p:sp>
+        <p:nvSpPr>
+          <p:cNvPr id="2" name="Text 0"/>
+          <p:cNvSpPr/>
+          <p:nvPr>
+            <p:ph idx="100" type="title" hasCustomPrompt="1"/>
+          </p:nvPr>
+        </p:nvSpPr>
+        <p:spPr>
+          <a:xfrm>
+            <a:off x="548640" y="320040"/>
+            <a:ext cx="11064240" cy="868680"/>
+          </a:xfrm>
+          <a:prstGeom prst="rect">
+            <a:avLst/>
+          </a:prstGeom>
+          <a:noFill/>
+          <a:ln/>
+        </p:spPr>
+        <p:txBody>
+          <a:bodyPr wrap="square" lIns="0" tIns="0" rIns="0" bIns="0" rtlCol="0" anchor="ctr"/>
+          <a:lstStyle/>
+          <a:p>
+            <a:pPr eaLnBrk="0" algn="l" indent="0" marL="0">
+              <a:buNone/>
+            </a:pPr>
+            <a:r>
+              <a:rPr lang="ko-KR" altLang="en-US" sz="4400" b="1" dirty="0">
+                <a:solidFill>
+                  <a:srgbClr val="1F2937"/>
+                </a:solidFill>
+                <a:latin typeface="맑은 고딕" pitchFamily="34" charset="0"/>
+                <a:ea typeface="맑은 고딕" pitchFamily="34" charset="-122"/>
+                <a:cs typeface="맑은 고딕" pitchFamily="34" charset="-120"/>
+              </a:rPr>
+              <a:t>비스듬히 보면</a:t>
+            </a:r>
+            <a:endParaRPr lang="ko-KR" sz="4400" dirty="0"/>
+          </a:p>
+        </p:txBody>
+      </p:sp>
+      <p:sp>
+        <p:nvSpPr>
+          <p:cNvPr id="3" name="S09-card104"/>
+          <p:cNvSpPr/>
+          <p:nvPr/>
+        </p:nvSpPr>
+        <p:spPr>
+          <a:xfrm>
+            <a:off x="548640" y="4897120"/>
+            <a:ext cx="5431536" cy="1320800"/>
+          </a:xfrm>
+          <a:prstGeom prst="roundRect">
+            <a:avLst>
+              <a:gd name="adj" fmla="val 8308"/>
+            </a:avLst>
+          </a:prstGeom>
+          <a:solidFill>
+            <a:srgbClr val="EAF3F1"/>
+          </a:solidFill>
+          <a:ln w="12700">
+            <a:solidFill>
+              <a:srgbClr val="EAF3F1"/>
+            </a:solidFill>
+            <a:prstDash val="solid"/>
+          </a:ln>
+        </p:spPr>
+      </p:sp>
+      <p:sp>
+        <p:nvSpPr>
+          <p:cNvPr id="4" name="S09-cardtext105"/>
+          <p:cNvSpPr txBox="1"/>
+          <p:nvPr/>
+        </p:nvSpPr>
+        <p:spPr>
+          <a:xfrm>
+            <a:off x="822960" y="5034280"/>
+            <a:ext cx="4882896" cy="1046480"/>
+          </a:xfrm>
+          <a:prstGeom prst="rect">
+            <a:avLst/>
+          </a:prstGeom>
+          <a:noFill/>
+          <a:ln/>
+        </p:spPr>
+        <p:txBody>
+          <a:bodyPr wrap="square" lIns="0" tIns="0" rIns="0" bIns="0" rtlCol="0" anchor="ctr"/>
+          <a:lstStyle/>
+          <a:p>
+            <a:pPr eaLnBrk="0" indent="0" marL="0">
+              <a:spcAft>
+                <a:spcPts val="600"/>
+              </a:spcAft>
+              <a:buNone/>
+            </a:pPr>
+            <a:r>
+              <a:rPr lang="ko-KR" altLang="en-US" sz="3200" dirty="0">
+                <a:solidFill>
+                  <a:srgbClr val="1F2937"/>
+                </a:solidFill>
+                <a:latin typeface="맑은 고딕" pitchFamily="34" charset="0"/>
+                <a:ea typeface="맑은 고딕" pitchFamily="34" charset="-122"/>
+                <a:cs typeface="맑은 고딕" pitchFamily="34" charset="-120"/>
+              </a:rPr>
+              <a:t>↘ 2, 4, 6, 8, 10: 2씩 커져요.</a:t>
+            </a:r>
+            <a:endParaRPr lang="ko-KR" sz="3200" dirty="0"/>
+          </a:p>
+        </p:txBody>
+      </p:sp>
+      <p:sp>
+        <p:nvSpPr>
+          <p:cNvPr id="5" name="S09-card106"/>
+          <p:cNvSpPr/>
+          <p:nvPr/>
+        </p:nvSpPr>
+        <p:spPr>
+          <a:xfrm>
+            <a:off x="6208776" y="4897120"/>
+            <a:ext cx="5431536" cy="1320800"/>
+          </a:xfrm>
+          <a:prstGeom prst="roundRect">
+            <a:avLst>
+              <a:gd name="adj" fmla="val 8308"/>
+            </a:avLst>
+          </a:prstGeom>
+          <a:solidFill>
+            <a:srgbClr val="EAF3F1"/>
+          </a:solidFill>
+          <a:ln w="12700">
+            <a:solidFill>
+              <a:srgbClr val="EAF3F1"/>
+            </a:solidFill>
+            <a:prstDash val="solid"/>
+          </a:ln>
+        </p:spPr>
+      </p:sp>
+      <p:sp>
+        <p:nvSpPr>
+          <p:cNvPr id="6" name="S09-cardtext107"/>
+          <p:cNvSpPr txBox="1"/>
+          <p:nvPr/>
+        </p:nvSpPr>
+        <p:spPr>
+          <a:xfrm>
+            <a:off x="6483096" y="5034280"/>
+            <a:ext cx="4882896" cy="1046480"/>
+          </a:xfrm>
+          <a:prstGeom prst="rect">
+            <a:avLst/>
+          </a:prstGeom>
+          <a:noFill/>
+          <a:ln/>
+        </p:spPr>
+        <p:txBody>
+          <a:bodyPr wrap="square" lIns="0" tIns="0" rIns="0" bIns="0" rtlCol="0" anchor="ctr"/>
+          <a:lstStyle/>
+          <a:p>
+            <a:pPr eaLnBrk="0" indent="0" marL="0">
+              <a:spcAft>
+                <a:spcPts val="600"/>
+              </a:spcAft>
+              <a:buNone/>
+            </a:pPr>
+            <a:r>
+              <a:rPr lang="ko-KR" altLang="en-US" sz="3200" dirty="0">
+                <a:solidFill>
+                  <a:srgbClr val="1F2937"/>
+                </a:solidFill>
+                <a:latin typeface="맑은 고딕" pitchFamily="34" charset="0"/>
+                <a:ea typeface="맑은 고딕" pitchFamily="34" charset="-122"/>
+                <a:cs typeface="맑은 고딕" pitchFamily="34" charset="-120"/>
+              </a:rPr>
+              <a:t>↙ 6, 6, 6, 6, 6: 모두 같아요.</a:t>
+            </a:r>
+            <a:endParaRPr lang="ko-KR" sz="3200" dirty="0"/>
+          </a:p>
+        </p:txBody>
+      </p:sp>
+      <p:graphicFrame>
+        <p:nvGraphicFramePr>
+          <p:cNvPr id="10" name="S09-table108"/>
+          <p:cNvGraphicFramePr>
+            <a:graphicFrameLocks noGrp="1"/>
+          </p:cNvGraphicFramePr>
+          <p:nvPr>
+            <p:extLst>
+              <p:ext uri="{D42A27DB-BD31-4B8C-83A1-F6EECF244321}">
+                <p14:modId xmlns:p14="http://schemas.microsoft.com/office/powerpoint/2010/main" val="1579011935"/>
+              </p:ext>
+            </p:extLst>
+          </p:nvPr>
+        </p:nvGraphicFramePr>
+        <p:xfrm>
+          <a:off x="1156716" y="1461770"/>
+          <a:ext cx="9875520" cy="914400"/>
+        </p:xfrm>
+        <a:graphic>
+          <a:graphicData uri="http://schemas.openxmlformats.org/drawingml/2006/table">
+            <a:tbl>
+              <a:tblPr/>
+              <a:tblGrid>
+                <a:gridCol w="1645920"/>
+                <a:gridCol w="1645920"/>
+                <a:gridCol w="1645920"/>
+                <a:gridCol w="1645920"/>
+                <a:gridCol w="1645920"/>
+                <a:gridCol w="1645920"/>
+              </a:tblGrid>
+              <a:tr h="511810">
+                <a:tc>
+                  <a:txBody>
+                    <a:bodyPr/>
+                    <a:lstStyle/>
+                    <a:p>
+                      <a:pPr eaLnBrk="0" algn="ctr" indent="0" marL="0">
+                        <a:buNone/>
+                      </a:pPr>
+                      <a:r>
+                        <a:rPr lang="en-US" sz="2600" b="1" dirty="0">
+                          <a:solidFill>
+                            <a:srgbClr val="1F2937"/>
+                          </a:solidFill>
+                          <a:latin typeface="맑은 고딕" pitchFamily="34" charset="0"/>
+                          <a:ea typeface="맑은 고딕" pitchFamily="34" charset="-122"/>
+                          <a:cs typeface="맑은 고딕" pitchFamily="34" charset="-120"/>
+                        </a:rPr>
+                        <a:t>+</a:t>
+                      </a:r>
+                      <a:endParaRPr lang="en-US" sz="2600" dirty="0">
+                        <a:latin typeface="맑은 고딕" charset="0"/>
+                        <a:ea typeface="맑은 고딕" charset="0"/>
+                        <a:cs typeface="맑은 고딕" charset="0"/>
+                      </a:endParaRPr>
+                    </a:p>
+                  </a:txBody>
+                  <a:tcPr marL="38100" marR="38100" marT="38100" marB="38100" anchor="ctr">
+                    <a:lnL w="12700" cap="flat" cmpd="sng" algn="ctr">
+                      <a:solidFill>
+                        <a:srgbClr val="94A3B8"/>
+                      </a:solidFill>
+                      <a:prstDash val="solid"/>
+                      <a:round/>
+                      <a:headEnd type="none" w="med" len="med"/>
+                      <a:tailEnd type="none" w="med" len="med"/>
+                    </a:lnL>
+                    <a:lnR w="12700" cap="flat" cmpd="sng" algn="ctr">
+                      <a:solidFill>
+                        <a:srgbClr val="94A3B8"/>
+                      </a:solidFill>
+                      <a:prstDash val="solid"/>
+                      <a:round/>
+                      <a:headEnd type="none" w="med" len="med"/>
+                      <a:tailEnd type="none" w="med" len="med"/>
+                    </a:lnR>
+                    <a:lnT w="12700" cap="flat" cmpd="sng" algn="ctr">
+                      <a:solidFill>
+                        <a:srgbClr val="94A3B8"/>
+                      </a:solidFill>
+                      <a:prstDash val="solid"/>
+                      <a:round/>
+                      <a:headEnd type="none" w="med" len="med"/>
+                      <a:tailEnd type="none" w="med" len="med"/>
+                    </a:lnT>
+                    <a:lnB w="12700" cap="flat" cmpd="sng" algn="ctr">
+                      <a:solidFill>
+                        <a:srgbClr val="94A3B8"/>
+                      </a:solidFill>
+                      <a:prstDash val="solid"/>
+                      <a:round/>
+                      <a:headEnd type="none" w="med" len="med"/>
+                      <a:tailEnd type="none" w="med" len="med"/>
+                    </a:lnB>
+                    <a:solidFill>
+                      <a:srgbClr val="EAF3F1"/>
+                    </a:solidFill>
+                  </a:tcPr>
+                </a:tc>
+                <a:tc>
+                  <a:txBody>
+                    <a:bodyPr/>
+                    <a:lstStyle/>
+                    <a:p>
+                      <a:pPr eaLnBrk="0" algn="ctr" indent="0" marL="0">
+                        <a:buNone/>
+                      </a:pPr>
+                      <a:r>
+                        <a:rPr lang="en-US" sz="2600" b="1" dirty="0">
+                          <a:solidFill>
+                            <a:srgbClr val="1F2937"/>
+                          </a:solidFill>
+                          <a:latin typeface="맑은 고딕" pitchFamily="34" charset="0"/>
+                          <a:ea typeface="맑은 고딕" pitchFamily="34" charset="-122"/>
+                          <a:cs typeface="맑은 고딕" pitchFamily="34" charset="-120"/>
+                        </a:rPr>
+                        <a:t>1</a:t>
+                      </a:r>
+                      <a:endParaRPr lang="en-US" sz="2600" dirty="0">
+                        <a:latin typeface="맑은 고딕" charset="0"/>
+                        <a:ea typeface="맑은 고딕" charset="0"/>
+                        <a:cs typeface="맑은 고딕" charset="0"/>
+                      </a:endParaRPr>
+                    </a:p>
+                  </a:txBody>
+                  <a:tcPr marL="38100" marR="38100" marT="38100" marB="38100" anchor="ctr">
+                    <a:lnL w="12700" cap="flat" cmpd="sng" algn="ctr">
+                      <a:solidFill>
+                        <a:srgbClr val="94A3B8"/>
+                      </a:solidFill>
+                      <a:prstDash val="solid"/>
+                      <a:round/>
+                      <a:headEnd type="none" w="med" len="med"/>
+                      <a:tailEnd type="none" w="med" len="med"/>
+                    </a:lnL>
+                    <a:lnR w="12700" cap="flat" cmpd="sng" algn="ctr">
+                      <a:solidFill>
+                        <a:srgbClr val="94A3B8"/>
+                      </a:solidFill>
+                      <a:prstDash val="solid"/>
+                      <a:round/>
+                      <a:headEnd type="none" w="med" len="med"/>
+                      <a:tailEnd type="none" w="med" len="med"/>
+                    </a:lnR>
+                    <a:lnT w="12700" cap="flat" cmpd="sng" algn="ctr">
+                      <a:solidFill>
+                        <a:srgbClr val="94A3B8"/>
+                      </a:solidFill>
+                      <a:prstDash val="solid"/>
+                      <a:round/>
+                      <a:headEnd type="none" w="med" len="med"/>
+                      <a:tailEnd type="none" w="med" len="med"/>
+                    </a:lnT>
+                    <a:lnB w="12700" cap="flat" cmpd="sng" algn="ctr">
+                      <a:solidFill>
+                        <a:srgbClr val="94A3B8"/>
+                      </a:solidFill>
+                      <a:prstDash val="solid"/>
+                      <a:round/>
+                      <a:headEnd type="none" w="med" len="med"/>
+                      <a:tailEnd type="none" w="med" len="med"/>
+                    </a:lnB>
+                    <a:solidFill>
+                      <a:srgbClr val="EAF3F1"/>
+                    </a:solidFill>
+                  </a:tcPr>
+                </a:tc>
+                <a:tc>
+                  <a:txBody>
+                    <a:bodyPr/>
+                    <a:lstStyle/>
+                    <a:p>
+                      <a:pPr eaLnBrk="0" algn="ctr" indent="0" marL="0">
+                        <a:buNone/>
+                      </a:pPr>
+                      <a:r>
+                        <a:rPr lang="en-US" sz="2600" b="1" dirty="0">
+                          <a:solidFill>
+                            <a:srgbClr val="1F2937"/>
+                          </a:solidFill>
+                          <a:latin typeface="맑은 고딕" pitchFamily="34" charset="0"/>
+                          <a:ea typeface="맑은 고딕" pitchFamily="34" charset="-122"/>
+                          <a:cs typeface="맑은 고딕" pitchFamily="34" charset="-120"/>
+                        </a:rPr>
+                        <a:t>2</a:t>
+                      </a:r>
+                      <a:endParaRPr lang="en-US" sz="2600" dirty="0">
+                        <a:latin typeface="맑은 고딕" charset="0"/>
+                        <a:ea typeface="맑은 고딕" charset="0"/>
+                        <a:cs typeface="맑은 고딕" charset="0"/>
+                      </a:endParaRPr>
+                    </a:p>
+                  </a:txBody>
+                  <a:tcPr marL="38100" marR="38100" marT="38100" marB="38100" anchor="ctr">
+                    <a:lnL w="12700" cap="flat" cmpd="sng" algn="ctr">
+                      <a:solidFill>
+                        <a:srgbClr val="94A3B8"/>
+                      </a:solidFill>
+                      <a:prstDash val="solid"/>
+                      <a:round/>
+                      <a:headEnd type="none" w="med" len="med"/>
+                      <a:tailEnd type="none" w="med" len="med"/>
+                    </a:lnL>
+                    <a:lnR w="12700" cap="flat" cmpd="sng" algn="ctr">
+                      <a:solidFill>
+                        <a:srgbClr val="94A3B8"/>
+                      </a:solidFill>
+                      <a:prstDash val="solid"/>
+                      <a:round/>
+                      <a:headEnd type="none" w="med" len="med"/>
+                      <a:tailEnd type="none" w="med" len="med"/>
+                    </a:lnR>
+                    <a:lnT w="12700" cap="flat" cmpd="sng" algn="ctr">
+                      <a:solidFill>
+                        <a:srgbClr val="94A3B8"/>
+                      </a:solidFill>
+                      <a:prstDash val="solid"/>
+                      <a:round/>
+                      <a:headEnd type="none" w="med" len="med"/>
+                      <a:tailEnd type="none" w="med" len="med"/>
+                    </a:lnT>
+                    <a:lnB w="12700" cap="flat" cmpd="sng" algn="ctr">
+                      <a:solidFill>
+                        <a:srgbClr val="94A3B8"/>
+                      </a:solidFill>
+                      <a:prstDash val="solid"/>
+                      <a:round/>
+                      <a:headEnd type="none" w="med" len="med"/>
+                      <a:tailEnd type="none" w="med" len="med"/>
+                    </a:lnB>
+                    <a:solidFill>
+                      <a:srgbClr val="EAF3F1"/>
+                    </a:solidFill>
+                  </a:tcPr>
+                </a:tc>
+                <a:tc>
+                  <a:txBody>
+                    <a:bodyPr/>
+                    <a:lstStyle/>
+                    <a:p>
+                      <a:pPr eaLnBrk="0" algn="ctr" indent="0" marL="0">
+                        <a:buNone/>
+                      </a:pPr>
+                      <a:r>
+                        <a:rPr lang="en-US" sz="2600" b="1" dirty="0">
+                          <a:solidFill>
+                            <a:srgbClr val="1F2937"/>
+                          </a:solidFill>
+                          <a:latin typeface="맑은 고딕" pitchFamily="34" charset="0"/>
+                          <a:ea typeface="맑은 고딕" pitchFamily="34" charset="-122"/>
+                          <a:cs typeface="맑은 고딕" pitchFamily="34" charset="-120"/>
+                        </a:rPr>
+                        <a:t>3</a:t>
+                      </a:r>
+                      <a:endParaRPr lang="en-US" sz="2600" dirty="0">
+                        <a:latin typeface="맑은 고딕" charset="0"/>
+                        <a:ea typeface="맑은 고딕" charset="0"/>
+                        <a:cs typeface="맑은 고딕" charset="0"/>
+                      </a:endParaRPr>
+                    </a:p>
+                  </a:txBody>
+                  <a:tcPr marL="38100" marR="38100" marT="38100" marB="38100" anchor="ctr">
+                    <a:lnL w="12700" cap="flat" cmpd="sng" algn="ctr">
+                      <a:solidFill>
+                        <a:srgbClr val="94A3B8"/>
+                      </a:solidFill>
+                      <a:prstDash val="solid"/>
+                      <a:round/>
+                      <a:headEnd type="none" w="med" len="med"/>
+                      <a:tailEnd type="none" w="med" len="med"/>
+                    </a:lnL>
+                    <a:lnR w="12700" cap="flat" cmpd="sng" algn="ctr">
+                      <a:solidFill>
+                        <a:srgbClr val="94A3B8"/>
+                      </a:solidFill>
+                      <a:prstDash val="solid"/>
+                      <a:round/>
+                      <a:headEnd type="none" w="med" len="med"/>
+                      <a:tailEnd type="none" w="med" len="med"/>
+                    </a:lnR>
+                    <a:lnT w="12700" cap="flat" cmpd="sng" algn="ctr">
+                      <a:solidFill>
+                        <a:srgbClr val="94A3B8"/>
+                      </a:solidFill>
+                      <a:prstDash val="solid"/>
+                      <a:round/>
+                      <a:headEnd type="none" w="med" len="med"/>
+                      <a:tailEnd type="none" w="med" len="med"/>
+                    </a:lnT>
+                    <a:lnB w="12700" cap="flat" cmpd="sng" algn="ctr">
+                      <a:solidFill>
+                        <a:srgbClr val="94A3B8"/>
+                      </a:solidFill>
+                      <a:prstDash val="solid"/>
+                      <a:round/>
+                      <a:headEnd type="none" w="med" len="med"/>
+                      <a:tailEnd type="none" w="med" len="med"/>
+                    </a:lnB>
+                    <a:solidFill>
+                      <a:srgbClr val="EAF3F1"/>
+                    </a:solidFill>
+                  </a:tcPr>
+                </a:tc>
+                <a:tc>
+                  <a:txBody>
+                    <a:bodyPr/>
+                    <a:lstStyle/>
+                    <a:p>
+                      <a:pPr eaLnBrk="0" algn="ctr" indent="0" marL="0">
+                        <a:buNone/>
+                      </a:pPr>
+                      <a:r>
+                        <a:rPr lang="en-US" sz="2600" b="1" dirty="0">
+                          <a:solidFill>
+                            <a:srgbClr val="1F2937"/>
+                          </a:solidFill>
+                          <a:latin typeface="맑은 고딕" pitchFamily="34" charset="0"/>
+                          <a:ea typeface="맑은 고딕" pitchFamily="34" charset="-122"/>
+                          <a:cs typeface="맑은 고딕" pitchFamily="34" charset="-120"/>
+                        </a:rPr>
+                        <a:t>4</a:t>
+                      </a:r>
+                      <a:endParaRPr lang="en-US" sz="2600" dirty="0">
+                        <a:latin typeface="맑은 고딕" charset="0"/>
+                        <a:ea typeface="맑은 고딕" charset="0"/>
+                        <a:cs typeface="맑은 고딕" charset="0"/>
+                      </a:endParaRPr>
+                    </a:p>
+                  </a:txBody>
+                  <a:tcPr marL="38100" marR="38100" marT="38100" marB="38100" anchor="ctr">
+                    <a:lnL w="12700" cap="flat" cmpd="sng" algn="ctr">
+                      <a:solidFill>
+                        <a:srgbClr val="94A3B8"/>
+                      </a:solidFill>
+                      <a:prstDash val="solid"/>
+                      <a:round/>
+                      <a:headEnd type="none" w="med" len="med"/>
+                      <a:tailEnd type="none" w="med" len="med"/>
+                    </a:lnL>
+                    <a:lnR w="12700" cap="flat" cmpd="sng" algn="ctr">
+                      <a:solidFill>
+                        <a:srgbClr val="94A3B8"/>
+                      </a:solidFill>
+                      <a:prstDash val="solid"/>
+                      <a:round/>
+                      <a:headEnd type="none" w="med" len="med"/>
+                      <a:tailEnd type="none" w="med" len="med"/>
+                    </a:lnR>
+                    <a:lnT w="12700" cap="flat" cmpd="sng" algn="ctr">
+                      <a:solidFill>
+                        <a:srgbClr val="94A3B8"/>
+                      </a:solidFill>
+                      <a:prstDash val="solid"/>
+                      <a:round/>
+                      <a:headEnd type="none" w="med" len="med"/>
+                      <a:tailEnd type="none" w="med" len="med"/>
+                    </a:lnT>
+                    <a:lnB w="12700" cap="flat" cmpd="sng" algn="ctr">
+                      <a:solidFill>
+                        <a:srgbClr val="94A3B8"/>
+                      </a:solidFill>
+                      <a:prstDash val="solid"/>
+                      <a:round/>
+                      <a:headEnd type="none" w="med" len="med"/>
+                      <a:tailEnd type="none" w="med" len="med"/>
+                    </a:lnB>
+                    <a:solidFill>
+                      <a:srgbClr val="EAF3F1"/>
+                    </a:solidFill>
+                  </a:tcPr>
+                </a:tc>
+                <a:tc>
+                  <a:txBody>
+                    <a:bodyPr/>
+                    <a:lstStyle/>
+                    <a:p>
+                      <a:pPr eaLnBrk="0" algn="ctr" indent="0" marL="0">
+                        <a:buNone/>
+                      </a:pPr>
+                      <a:r>
+                        <a:rPr lang="en-US" sz="2600" b="1" dirty="0">
+                          <a:solidFill>
+                            <a:srgbClr val="1F2937"/>
+                          </a:solidFill>
+                          <a:latin typeface="맑은 고딕" pitchFamily="34" charset="0"/>
+                          <a:ea typeface="맑은 고딕" pitchFamily="34" charset="-122"/>
+                          <a:cs typeface="맑은 고딕" pitchFamily="34" charset="-120"/>
+                        </a:rPr>
+                        <a:t>5</a:t>
+                      </a:r>
+                      <a:endParaRPr lang="en-US" sz="2600" dirty="0">
+                        <a:latin typeface="맑은 고딕" charset="0"/>
+                        <a:ea typeface="맑은 고딕" charset="0"/>
+                        <a:cs typeface="맑은 고딕" charset="0"/>
+                      </a:endParaRPr>
+                    </a:p>
+                  </a:txBody>
+                  <a:tcPr marL="38100" marR="38100" marT="38100" marB="38100" anchor="ctr">
+                    <a:lnL w="12700" cap="flat" cmpd="sng" algn="ctr">
+                      <a:solidFill>
+                        <a:srgbClr val="94A3B8"/>
+                      </a:solidFill>
+                      <a:prstDash val="solid"/>
+                      <a:round/>
+                      <a:headEnd type="none" w="med" len="med"/>
+                      <a:tailEnd type="none" w="med" len="med"/>
+                    </a:lnL>
+                    <a:lnR w="12700" cap="flat" cmpd="sng" algn="ctr">
+                      <a:solidFill>
+                        <a:srgbClr val="94A3B8"/>
+                      </a:solidFill>
+                      <a:prstDash val="solid"/>
+                      <a:round/>
+                      <a:headEnd type="none" w="med" len="med"/>
+                      <a:tailEnd type="none" w="med" len="med"/>
+                    </a:lnR>
+                    <a:lnT w="12700" cap="flat" cmpd="sng" algn="ctr">
+                      <a:solidFill>
+                        <a:srgbClr val="94A3B8"/>
+                      </a:solidFill>
+                      <a:prstDash val="solid"/>
+                      <a:round/>
+                      <a:headEnd type="none" w="med" len="med"/>
+                      <a:tailEnd type="none" w="med" len="med"/>
+                    </a:lnT>
+                    <a:lnB w="12700" cap="flat" cmpd="sng" algn="ctr">
+                      <a:solidFill>
+                        <a:srgbClr val="94A3B8"/>
+                      </a:solidFill>
+                      <a:prstDash val="solid"/>
+                      <a:round/>
+                      <a:headEnd type="none" w="med" len="med"/>
+                      <a:tailEnd type="none" w="med" len="med"/>
+                    </a:lnB>
+                    <a:solidFill>
+                      <a:srgbClr val="EAF3F1"/>
+                    </a:solidFill>
+                  </a:tcPr>
+                </a:tc>
+              </a:tr>
+              <a:tr h="511810">
+                <a:tc>
+                  <a:txBody>
+                    <a:bodyPr/>
+                    <a:lstStyle/>
+                    <a:p>
+                      <a:pPr eaLnBrk="0" algn="ctr" indent="0" marL="0">
+                        <a:buNone/>
+                      </a:pPr>
+                      <a:r>
+                        <a:rPr lang="en-US" sz="2600" b="1" dirty="0">
+                          <a:solidFill>
+                            <a:srgbClr val="1F2937"/>
+                          </a:solidFill>
+                          <a:latin typeface="맑은 고딕" pitchFamily="34" charset="0"/>
+                          <a:ea typeface="맑은 고딕" pitchFamily="34" charset="-122"/>
+                          <a:cs typeface="맑은 고딕" pitchFamily="34" charset="-120"/>
+                        </a:rPr>
+                        <a:t>1</a:t>
+                      </a:r>
+                      <a:endParaRPr lang="en-US" sz="2600" dirty="0">
+                        <a:latin typeface="맑은 고딕" charset="0"/>
+                        <a:ea typeface="맑은 고딕" charset="0"/>
+                        <a:cs typeface="맑은 고딕" charset="0"/>
+                      </a:endParaRPr>
+                    </a:p>
+                  </a:txBody>
+                  <a:tcPr marL="38100" marR="38100" marT="38100" marB="38100" anchor="ctr">
+                    <a:lnL w="12700" cap="flat" cmpd="sng" algn="ctr">
+                      <a:solidFill>
+                        <a:srgbClr val="94A3B8"/>
+                      </a:solidFill>
+                      <a:prstDash val="solid"/>
+                      <a:round/>
+                      <a:headEnd type="none" w="med" len="med"/>
+                      <a:tailEnd type="none" w="med" len="med"/>
+                    </a:lnL>
+                    <a:lnR w="12700" cap="flat" cmpd="sng" algn="ctr">
+                      <a:solidFill>
+                        <a:srgbClr val="94A3B8"/>
+                      </a:solidFill>
+                      <a:prstDash val="solid"/>
+                      <a:round/>
+                      <a:headEnd type="none" w="med" len="med"/>
+                      <a:tailEnd type="none" w="med" len="med"/>
+                    </a:lnR>
+                    <a:lnT w="12700" cap="flat" cmpd="sng" algn="ctr">
+                      <a:solidFill>
+                        <a:srgbClr val="94A3B8"/>
+                      </a:solidFill>
+                      <a:prstDash val="solid"/>
+                      <a:round/>
+                      <a:headEnd type="none" w="med" len="med"/>
+                      <a:tailEnd type="none" w="med" len="med"/>
+                    </a:lnT>
+                    <a:lnB w="12700" cap="flat" cmpd="sng" algn="ctr">
+                      <a:solidFill>
+                        <a:srgbClr val="94A3B8"/>
+                      </a:solidFill>
+                      <a:prstDash val="solid"/>
+                      <a:round/>
+                      <a:headEnd type="none" w="med" len="med"/>
+                      <a:tailEnd type="none" w="med" len="med"/>
+                    </a:lnB>
+                    <a:solidFill>
+                      <a:srgbClr val="EAF3F1"/>
+                    </a:solidFill>
+                  </a:tcPr>
+                </a:tc>
+                <a:tc>
+                  <a:txBody>
+                    <a:bodyPr/>
+                    <a:lstStyle/>
+                    <a:p>
+                      <a:pPr eaLnBrk="0" algn="ctr" indent="0" marL="0">
+                        <a:buNone/>
+                      </a:pPr>
+                      <a:r>
+                        <a:rPr lang="en-US" sz="2600" dirty="0">
+                          <a:solidFill>
+                            <a:srgbClr val="1F2937"/>
+                          </a:solidFill>
+                          <a:latin typeface="맑은 고딕" pitchFamily="34" charset="0"/>
+                          <a:ea typeface="맑은 고딕" pitchFamily="34" charset="-122"/>
+                          <a:cs typeface="맑은 고딕" pitchFamily="34" charset="-120"/>
+                        </a:rPr>
+                        <a:t>2</a:t>
+                      </a:r>
+                      <a:endParaRPr lang="en-US" sz="2600" dirty="0">
+                        <a:latin typeface="맑은 고딕" charset="0"/>
+                        <a:ea typeface="맑은 고딕" charset="0"/>
+                        <a:cs typeface="맑은 고딕" charset="0"/>
+                      </a:endParaRPr>
+                    </a:p>
+                  </a:txBody>
+                  <a:tcPr marL="38100" marR="38100" marT="38100" marB="38100" anchor="ctr">
+                    <a:lnL w="12700" cap="flat" cmpd="sng" algn="ctr">
+                      <a:solidFill>
+                        <a:srgbClr val="94A3B8"/>
+                      </a:solidFill>
+                      <a:prstDash val="solid"/>
+                      <a:round/>
+                      <a:headEnd type="none" w="med" len="med"/>
+                      <a:tailEnd type="none" w="med" len="med"/>
+                    </a:lnL>
+                    <a:lnR w="12700" cap="flat" cmpd="sng" algn="ctr">
+                      <a:solidFill>
+                        <a:srgbClr val="94A3B8"/>
+                      </a:solidFill>
+                      <a:prstDash val="solid"/>
+                      <a:round/>
+                      <a:headEnd type="none" w="med" len="med"/>
+                      <a:tailEnd type="none" w="med" len="med"/>
+                    </a:lnR>
+                    <a:lnT w="12700" cap="flat" cmpd="sng" algn="ctr">
+                      <a:solidFill>
+                        <a:srgbClr val="94A3B8"/>
+                      </a:solidFill>
+                      <a:prstDash val="solid"/>
+                      <a:round/>
+                      <a:headEnd type="none" w="med" len="med"/>
+                      <a:tailEnd type="none" w="med" len="med"/>
+                    </a:lnT>
+                    <a:lnB w="12700" cap="flat" cmpd="sng" algn="ctr">
+                      <a:solidFill>
+                        <a:srgbClr val="94A3B8"/>
+                      </a:solidFill>
+                      <a:prstDash val="solid"/>
+                      <a:round/>
+                      <a:headEnd type="none" w="med" len="med"/>
+                      <a:tailEnd type="none" w="med" len="med"/>
+                    </a:lnB>
+                    <a:solidFill>
+                      <a:srgbClr val="FFFFFF"/>
+                    </a:solidFill>
+                  </a:tcPr>
+                </a:tc>
+                <a:tc>
+                  <a:txBody>
+                    <a:bodyPr/>
+                    <a:lstStyle/>
+                    <a:p>
+                      <a:pPr eaLnBrk="0" algn="ctr" indent="0" marL="0">
+                        <a:buNone/>
+                      </a:pPr>
+                      <a:r>
+                        <a:rPr lang="en-US" sz="2600" dirty="0">
+                          <a:solidFill>
+                            <a:srgbClr val="1F2937"/>
+                          </a:solidFill>
+                          <a:latin typeface="맑은 고딕" pitchFamily="34" charset="0"/>
+                          <a:ea typeface="맑은 고딕" pitchFamily="34" charset="-122"/>
+                          <a:cs typeface="맑은 고딕" pitchFamily="34" charset="-120"/>
+                        </a:rPr>
+                        <a:t>3</a:t>
+                      </a:r>
+                      <a:endParaRPr lang="en-US" sz="2600" dirty="0">
+                        <a:latin typeface="맑은 고딕" charset="0"/>
+                        <a:ea typeface="맑은 고딕" charset="0"/>
+                        <a:cs typeface="맑은 고딕" charset="0"/>
+                      </a:endParaRPr>
+                    </a:p>
+                  </a:txBody>
+                  <a:tcPr marL="38100" marR="38100" marT="38100" marB="38100" anchor="ctr">
+                    <a:lnL w="12700" cap="flat" cmpd="sng" algn="ctr">
+                      <a:solidFill>
+                        <a:srgbClr val="94A3B8"/>
+                      </a:solidFill>
+                      <a:prstDash val="solid"/>
+                      <a:round/>
+                      <a:headEnd type="none" w="med" len="med"/>
+                      <a:tailEnd type="none" w="med" len="med"/>
+                    </a:lnL>
+                    <a:lnR w="12700" cap="flat" cmpd="sng" algn="ctr">
+                      <a:solidFill>
+                        <a:srgbClr val="94A3B8"/>
+                      </a:solidFill>
+                      <a:prstDash val="solid"/>
+                      <a:round/>
+                      <a:headEnd type="none" w="med" len="med"/>
+                      <a:tailEnd type="none" w="med" len="med"/>
+                    </a:lnR>
+                    <a:lnT w="12700" cap="flat" cmpd="sng" algn="ctr">
+                      <a:solidFill>
+                        <a:srgbClr val="94A3B8"/>
+                      </a:solidFill>
+                      <a:prstDash val="solid"/>
+                      <a:round/>
+                      <a:headEnd type="none" w="med" len="med"/>
+                      <a:tailEnd type="none" w="med" len="med"/>
+                    </a:lnT>
+                    <a:lnB w="12700" cap="flat" cmpd="sng" algn="ctr">
+                      <a:solidFill>
+                        <a:srgbClr val="94A3B8"/>
+                      </a:solidFill>
+                      <a:prstDash val="solid"/>
+                      <a:round/>
+                      <a:headEnd type="none" w="med" len="med"/>
+                      <a:tailEnd type="none" w="med" len="med"/>
+                    </a:lnB>
+                    <a:solidFill>
+                      <a:srgbClr val="FFFFFF"/>
+                    </a:solidFill>
+                  </a:tcPr>
+                </a:tc>
+                <a:tc>
+                  <a:txBody>
+                    <a:bodyPr/>
+                    <a:lstStyle/>
+                    <a:p>
+                      <a:pPr eaLnBrk="0" algn="ctr" indent="0" marL="0">
+                        <a:buNone/>
+                      </a:pPr>
+                      <a:r>
+                        <a:rPr lang="en-US" sz="2600" dirty="0">
+                          <a:solidFill>
+                            <a:srgbClr val="1F2937"/>
+                          </a:solidFill>
+                          <a:latin typeface="맑은 고딕" pitchFamily="34" charset="0"/>
+                          <a:ea typeface="맑은 고딕" pitchFamily="34" charset="-122"/>
+                          <a:cs typeface="맑은 고딕" pitchFamily="34" charset="-120"/>
+                        </a:rPr>
+                        <a:t>4</a:t>
+                      </a:r>
+                      <a:endParaRPr lang="en-US" sz="2600" dirty="0">
+                        <a:latin typeface="맑은 고딕" charset="0"/>
+                        <a:ea typeface="맑은 고딕" charset="0"/>
+                        <a:cs typeface="맑은 고딕" charset="0"/>
+                      </a:endParaRPr>
+                    </a:p>
+                  </a:txBody>
+                  <a:tcPr marL="38100" marR="38100" marT="38100" marB="38100" anchor="ctr">
+                    <a:lnL w="12700" cap="flat" cmpd="sng" algn="ctr">
+                      <a:solidFill>
+                        <a:srgbClr val="94A3B8"/>
+                      </a:solidFill>
+                      <a:prstDash val="solid"/>
+                      <a:round/>
+                      <a:headEnd type="none" w="med" len="med"/>
+                      <a:tailEnd type="none" w="med" len="med"/>
+                    </a:lnL>
+                    <a:lnR w="12700" cap="flat" cmpd="sng" algn="ctr">
+                      <a:solidFill>
+                        <a:srgbClr val="94A3B8"/>
+                      </a:solidFill>
+                      <a:prstDash val="solid"/>
+                      <a:round/>
+                      <a:headEnd type="none" w="med" len="med"/>
+                      <a:tailEnd type="none" w="med" len="med"/>
+                    </a:lnR>
+                    <a:lnT w="12700" cap="flat" cmpd="sng" algn="ctr">
+                      <a:solidFill>
+                        <a:srgbClr val="94A3B8"/>
+                      </a:solidFill>
+                      <a:prstDash val="solid"/>
+                      <a:round/>
+                      <a:headEnd type="none" w="med" len="med"/>
+                      <a:tailEnd type="none" w="med" len="med"/>
+                    </a:lnT>
+                    <a:lnB w="12700" cap="flat" cmpd="sng" algn="ctr">
+                      <a:solidFill>
+                        <a:srgbClr val="94A3B8"/>
+                      </a:solidFill>
+                      <a:prstDash val="solid"/>
+                      <a:round/>
+                      <a:headEnd type="none" w="med" len="med"/>
+                      <a:tailEnd type="none" w="med" len="med"/>
+                    </a:lnB>
+                    <a:solidFill>
+                      <a:srgbClr val="FFFFFF"/>
+                    </a:solidFill>
+                  </a:tcPr>
+                </a:tc>
+                <a:tc>
+                  <a:txBody>
+                    <a:bodyPr/>
+                    <a:lstStyle/>
+                    <a:p>
+                      <a:pPr eaLnBrk="0" algn="ctr" indent="0" marL="0">
+                        <a:buNone/>
+                      </a:pPr>
+                      <a:r>
+                        <a:rPr lang="en-US" sz="2600" dirty="0">
+                          <a:solidFill>
+                            <a:srgbClr val="1F2937"/>
+                          </a:solidFill>
+                          <a:latin typeface="맑은 고딕" pitchFamily="34" charset="0"/>
+                          <a:ea typeface="맑은 고딕" pitchFamily="34" charset="-122"/>
+                          <a:cs typeface="맑은 고딕" pitchFamily="34" charset="-120"/>
+                        </a:rPr>
+                        <a:t>5</a:t>
+                      </a:r>
+                      <a:endParaRPr lang="en-US" sz="2600" dirty="0">
+                        <a:latin typeface="맑은 고딕" charset="0"/>
+                        <a:ea typeface="맑은 고딕" charset="0"/>
+                        <a:cs typeface="맑은 고딕" charset="0"/>
+                      </a:endParaRPr>
+                    </a:p>
+                  </a:txBody>
+                  <a:tcPr marL="38100" marR="38100" marT="38100" marB="38100" anchor="ctr">
+                    <a:lnL w="12700" cap="flat" cmpd="sng" algn="ctr">
+                      <a:solidFill>
+                        <a:srgbClr val="94A3B8"/>
+                      </a:solidFill>
+                      <a:prstDash val="solid"/>
+                      <a:round/>
+                      <a:headEnd type="none" w="med" len="med"/>
+                      <a:tailEnd type="none" w="med" len="med"/>
+                    </a:lnL>
+                    <a:lnR w="12700" cap="flat" cmpd="sng" algn="ctr">
+                      <a:solidFill>
+                        <a:srgbClr val="94A3B8"/>
+                      </a:solidFill>
+                      <a:prstDash val="solid"/>
+                      <a:round/>
+                      <a:headEnd type="none" w="med" len="med"/>
+                      <a:tailEnd type="none" w="med" len="med"/>
+                    </a:lnR>
+                    <a:lnT w="12700" cap="flat" cmpd="sng" algn="ctr">
+                      <a:solidFill>
+                        <a:srgbClr val="94A3B8"/>
+                      </a:solidFill>
+                      <a:prstDash val="solid"/>
+                      <a:round/>
+                      <a:headEnd type="none" w="med" len="med"/>
+                      <a:tailEnd type="none" w="med" len="med"/>
+                    </a:lnT>
+                    <a:lnB w="12700" cap="flat" cmpd="sng" algn="ctr">
+                      <a:solidFill>
+                        <a:srgbClr val="94A3B8"/>
+                      </a:solidFill>
+                      <a:prstDash val="solid"/>
+                      <a:round/>
+                      <a:headEnd type="none" w="med" len="med"/>
+                      <a:tailEnd type="none" w="med" len="med"/>
+                    </a:lnB>
+                    <a:solidFill>
+                      <a:srgbClr val="FFFFFF"/>
+                    </a:solidFill>
+                  </a:tcPr>
+                </a:tc>
+                <a:tc>
+                  <a:txBody>
+                    <a:bodyPr/>
+                    <a:lstStyle/>
+                    <a:p>
+                      <a:pPr eaLnBrk="0" algn="ctr" indent="0" marL="0">
+                        <a:buNone/>
+                      </a:pPr>
+                      <a:r>
+                        <a:rPr lang="en-US" sz="2600" dirty="0">
+                          <a:solidFill>
+                            <a:srgbClr val="1F2937"/>
+                          </a:solidFill>
+                          <a:latin typeface="맑은 고딕" pitchFamily="34" charset="0"/>
+                          <a:ea typeface="맑은 고딕" pitchFamily="34" charset="-122"/>
+                          <a:cs typeface="맑은 고딕" pitchFamily="34" charset="-120"/>
+                        </a:rPr>
+                        <a:t>6</a:t>
+                      </a:r>
+                      <a:endParaRPr lang="en-US" sz="2600" dirty="0">
+                        <a:latin typeface="맑은 고딕" charset="0"/>
+                        <a:ea typeface="맑은 고딕" charset="0"/>
+                        <a:cs typeface="맑은 고딕" charset="0"/>
+                      </a:endParaRPr>
+                    </a:p>
+                  </a:txBody>
+                  <a:tcPr marL="38100" marR="38100" marT="38100" marB="38100" anchor="ctr">
+                    <a:lnL w="12700" cap="flat" cmpd="sng" algn="ctr">
+                      <a:solidFill>
+                        <a:srgbClr val="94A3B8"/>
+                      </a:solidFill>
+                      <a:prstDash val="solid"/>
+                      <a:round/>
+                      <a:headEnd type="none" w="med" len="med"/>
+                      <a:tailEnd type="none" w="med" len="med"/>
+                    </a:lnL>
+                    <a:lnR w="12700" cap="flat" cmpd="sng" algn="ctr">
+                      <a:solidFill>
+                        <a:srgbClr val="94A3B8"/>
+                      </a:solidFill>
+                      <a:prstDash val="solid"/>
+                      <a:round/>
+                      <a:headEnd type="none" w="med" len="med"/>
+                      <a:tailEnd type="none" w="med" len="med"/>
+                    </a:lnR>
+                    <a:lnT w="12700" cap="flat" cmpd="sng" algn="ctr">
+                      <a:solidFill>
+                        <a:srgbClr val="94A3B8"/>
+                      </a:solidFill>
+                      <a:prstDash val="solid"/>
+                      <a:round/>
+                      <a:headEnd type="none" w="med" len="med"/>
+                      <a:tailEnd type="none" w="med" len="med"/>
+                    </a:lnT>
+                    <a:lnB w="12700" cap="flat" cmpd="sng" algn="ctr">
+                      <a:solidFill>
+                        <a:srgbClr val="94A3B8"/>
+                      </a:solidFill>
+                      <a:prstDash val="solid"/>
+                      <a:round/>
+                      <a:headEnd type="none" w="med" len="med"/>
+                      <a:tailEnd type="none" w="med" len="med"/>
+                    </a:lnB>
+                    <a:solidFill>
+                      <a:srgbClr val="FFFFFF"/>
+                    </a:solidFill>
+                  </a:tcPr>
+                </a:tc>
+              </a:tr>
+              <a:tr h="511810">
+                <a:tc>
+                  <a:txBody>
+                    <a:bodyPr/>
+                    <a:lstStyle/>
+                    <a:p>
+                      <a:pPr eaLnBrk="0" algn="ctr" indent="0" marL="0">
+                        <a:buNone/>
+                      </a:pPr>
+                      <a:r>
+                        <a:rPr lang="en-US" sz="2600" b="1" dirty="0">
+                          <a:solidFill>
+                            <a:srgbClr val="1F2937"/>
+                          </a:solidFill>
+                          <a:latin typeface="맑은 고딕" pitchFamily="34" charset="0"/>
+                          <a:ea typeface="맑은 고딕" pitchFamily="34" charset="-122"/>
+                          <a:cs typeface="맑은 고딕" pitchFamily="34" charset="-120"/>
+                        </a:rPr>
+                        <a:t>2</a:t>
+                      </a:r>
+                      <a:endParaRPr lang="en-US" sz="2600" dirty="0">
+                        <a:latin typeface="맑은 고딕" charset="0"/>
+                        <a:ea typeface="맑은 고딕" charset="0"/>
+                        <a:cs typeface="맑은 고딕" charset="0"/>
+                      </a:endParaRPr>
+                    </a:p>
+                  </a:txBody>
+                  <a:tcPr marL="38100" marR="38100" marT="38100" marB="38100" anchor="ctr">
+                    <a:lnL w="12700" cap="flat" cmpd="sng" algn="ctr">
+                      <a:solidFill>
+                        <a:srgbClr val="94A3B8"/>
+                      </a:solidFill>
+                      <a:prstDash val="solid"/>
+                      <a:round/>
+                      <a:headEnd type="none" w="med" len="med"/>
+                      <a:tailEnd type="none" w="med" len="med"/>
+                    </a:lnL>
+                    <a:lnR w="12700" cap="flat" cmpd="sng" algn="ctr">
+                      <a:solidFill>
+                        <a:srgbClr val="94A3B8"/>
+                      </a:solidFill>
+                      <a:prstDash val="solid"/>
+                      <a:round/>
+                      <a:headEnd type="none" w="med" len="med"/>
+                      <a:tailEnd type="none" w="med" len="med"/>
+                    </a:lnR>
+                    <a:lnT w="12700" cap="flat" cmpd="sng" algn="ctr">
+                      <a:solidFill>
+                        <a:srgbClr val="94A3B8"/>
+                      </a:solidFill>
+                      <a:prstDash val="solid"/>
+                      <a:round/>
+                      <a:headEnd type="none" w="med" len="med"/>
+                      <a:tailEnd type="none" w="med" len="med"/>
+                    </a:lnT>
+                    <a:lnB w="12700" cap="flat" cmpd="sng" algn="ctr">
+                      <a:solidFill>
+                        <a:srgbClr val="94A3B8"/>
+                      </a:solidFill>
+                      <a:prstDash val="solid"/>
+                      <a:round/>
+                      <a:headEnd type="none" w="med" len="med"/>
+                      <a:tailEnd type="none" w="med" len="med"/>
+                    </a:lnB>
+                    <a:solidFill>
+                      <a:srgbClr val="EAF3F1"/>
+                    </a:solidFill>
+                  </a:tcPr>
+                </a:tc>
+                <a:tc>
+                  <a:txBody>
+                    <a:bodyPr/>
+                    <a:lstStyle/>
+                    <a:p>
+                      <a:pPr eaLnBrk="0" algn="ctr" indent="0" marL="0">
+                        <a:buNone/>
+                      </a:pPr>
+                      <a:r>
+                        <a:rPr lang="en-US" sz="2600" dirty="0">
+                          <a:solidFill>
+                            <a:srgbClr val="1F2937"/>
+                          </a:solidFill>
+                          <a:latin typeface="맑은 고딕" pitchFamily="34" charset="0"/>
+                          <a:ea typeface="맑은 고딕" pitchFamily="34" charset="-122"/>
+                          <a:cs typeface="맑은 고딕" pitchFamily="34" charset="-120"/>
+                        </a:rPr>
+                        <a:t>3</a:t>
+                      </a:r>
+                      <a:endParaRPr lang="en-US" sz="2600" dirty="0">
+                        <a:latin typeface="맑은 고딕" charset="0"/>
+                        <a:ea typeface="맑은 고딕" charset="0"/>
+                        <a:cs typeface="맑은 고딕" charset="0"/>
+                      </a:endParaRPr>
+                    </a:p>
+                  </a:txBody>
+                  <a:tcPr marL="38100" marR="38100" marT="38100" marB="38100" anchor="ctr">
+                    <a:lnL w="12700" cap="flat" cmpd="sng" algn="ctr">
+                      <a:solidFill>
+                        <a:srgbClr val="94A3B8"/>
+                      </a:solidFill>
+                      <a:prstDash val="solid"/>
+                      <a:round/>
+                      <a:headEnd type="none" w="med" len="med"/>
+                      <a:tailEnd type="none" w="med" len="med"/>
+                    </a:lnL>
+                    <a:lnR w="12700" cap="flat" cmpd="sng" algn="ctr">
+                      <a:solidFill>
+                        <a:srgbClr val="94A3B8"/>
+                      </a:solidFill>
+                      <a:prstDash val="solid"/>
+                      <a:round/>
+                      <a:headEnd type="none" w="med" len="med"/>
+                      <a:tailEnd type="none" w="med" len="med"/>
+                    </a:lnR>
+                    <a:lnT w="12700" cap="flat" cmpd="sng" algn="ctr">
+                      <a:solidFill>
+                        <a:srgbClr val="94A3B8"/>
+                      </a:solidFill>
+                      <a:prstDash val="solid"/>
+                      <a:round/>
+                      <a:headEnd type="none" w="med" len="med"/>
+                      <a:tailEnd type="none" w="med" len="med"/>
+                    </a:lnT>
+                    <a:lnB w="12700" cap="flat" cmpd="sng" algn="ctr">
+                      <a:solidFill>
+                        <a:srgbClr val="94A3B8"/>
+                      </a:solidFill>
+                      <a:prstDash val="solid"/>
+                      <a:round/>
+                      <a:headEnd type="none" w="med" len="med"/>
+                      <a:tailEnd type="none" w="med" len="med"/>
+                    </a:lnB>
+                    <a:solidFill>
+                      <a:srgbClr val="FFFFFF"/>
+                    </a:solidFill>
+                  </a:tcPr>
+                </a:tc>
+                <a:tc>
+                  <a:txBody>
+                    <a:bodyPr/>
+                    <a:lstStyle/>
+                    <a:p>
+                      <a:pPr eaLnBrk="0" algn="ctr" indent="0" marL="0">
+                        <a:buNone/>
+                      </a:pPr>
+                      <a:r>
+                        <a:rPr lang="en-US" sz="2600" dirty="0">
+                          <a:solidFill>
+                            <a:srgbClr val="1F2937"/>
+                          </a:solidFill>
+                          <a:latin typeface="맑은 고딕" pitchFamily="34" charset="0"/>
+                          <a:ea typeface="맑은 고딕" pitchFamily="34" charset="-122"/>
+                          <a:cs typeface="맑은 고딕" pitchFamily="34" charset="-120"/>
+                        </a:rPr>
+                        <a:t>4</a:t>
+                      </a:r>
+                      <a:endParaRPr lang="en-US" sz="2600" dirty="0">
+                        <a:latin typeface="맑은 고딕" charset="0"/>
+                        <a:ea typeface="맑은 고딕" charset="0"/>
+                        <a:cs typeface="맑은 고딕" charset="0"/>
+                      </a:endParaRPr>
+                    </a:p>
+                  </a:txBody>
+                  <a:tcPr marL="38100" marR="38100" marT="38100" marB="38100" anchor="ctr">
+                    <a:lnL w="12700" cap="flat" cmpd="sng" algn="ctr">
+                      <a:solidFill>
+                        <a:srgbClr val="94A3B8"/>
+                      </a:solidFill>
+                      <a:prstDash val="solid"/>
+                      <a:round/>
+                      <a:headEnd type="none" w="med" len="med"/>
+                      <a:tailEnd type="none" w="med" len="med"/>
+                    </a:lnL>
+                    <a:lnR w="12700" cap="flat" cmpd="sng" algn="ctr">
+                      <a:solidFill>
+                        <a:srgbClr val="94A3B8"/>
+                      </a:solidFill>
+                      <a:prstDash val="solid"/>
+                      <a:round/>
+                      <a:headEnd type="none" w="med" len="med"/>
+                      <a:tailEnd type="none" w="med" len="med"/>
+                    </a:lnR>
+                    <a:lnT w="12700" cap="flat" cmpd="sng" algn="ctr">
+                      <a:solidFill>
+                        <a:srgbClr val="94A3B8"/>
+                      </a:solidFill>
+                      <a:prstDash val="solid"/>
+                      <a:round/>
+                      <a:headEnd type="none" w="med" len="med"/>
+                      <a:tailEnd type="none" w="med" len="med"/>
+                    </a:lnT>
+                    <a:lnB w="12700" cap="flat" cmpd="sng" algn="ctr">
+                      <a:solidFill>
+                        <a:srgbClr val="94A3B8"/>
+                      </a:solidFill>
+                      <a:prstDash val="solid"/>
+                      <a:round/>
+                      <a:headEnd type="none" w="med" len="med"/>
+                      <a:tailEnd type="none" w="med" len="med"/>
+                    </a:lnB>
+                    <a:solidFill>
+                      <a:srgbClr val="FFFFFF"/>
+                    </a:solidFill>
+                  </a:tcPr>
+                </a:tc>
+                <a:tc>
+                  <a:txBody>
+                    <a:bodyPr/>
+                    <a:lstStyle/>
+                    <a:p>
+                      <a:pPr eaLnBrk="0" algn="ctr" indent="0" marL="0">
+                        <a:buNone/>
+                      </a:pPr>
+                      <a:r>
+                        <a:rPr lang="en-US" sz="2600" dirty="0">
+                          <a:solidFill>
+                            <a:srgbClr val="1F2937"/>
+                          </a:solidFill>
+                          <a:latin typeface="맑은 고딕" pitchFamily="34" charset="0"/>
+                          <a:ea typeface="맑은 고딕" pitchFamily="34" charset="-122"/>
+                          <a:cs typeface="맑은 고딕" pitchFamily="34" charset="-120"/>
+                        </a:rPr>
+                        <a:t>5</a:t>
+                      </a:r>
+                      <a:endParaRPr lang="en-US" sz="2600" dirty="0">
+                        <a:latin typeface="맑은 고딕" charset="0"/>
+                        <a:ea typeface="맑은 고딕" charset="0"/>
+                        <a:cs typeface="맑은 고딕" charset="0"/>
+                      </a:endParaRPr>
+                    </a:p>
+                  </a:txBody>
+                  <a:tcPr marL="38100" marR="38100" marT="38100" marB="38100" anchor="ctr">
+                    <a:lnL w="12700" cap="flat" cmpd="sng" algn="ctr">
+                      <a:solidFill>
+                        <a:srgbClr val="94A3B8"/>
+                      </a:solidFill>
+                      <a:prstDash val="solid"/>
+                      <a:round/>
+                      <a:headEnd type="none" w="med" len="med"/>
+                      <a:tailEnd type="none" w="med" len="med"/>
+                    </a:lnL>
+                    <a:lnR w="12700" cap="flat" cmpd="sng" algn="ctr">
+                      <a:solidFill>
+                        <a:srgbClr val="94A3B8"/>
+                      </a:solidFill>
+                      <a:prstDash val="solid"/>
+                      <a:round/>
+                      <a:headEnd type="none" w="med" len="med"/>
+                      <a:tailEnd type="none" w="med" len="med"/>
+                    </a:lnR>
+                    <a:lnT w="12700" cap="flat" cmpd="sng" algn="ctr">
+                      <a:solidFill>
+                        <a:srgbClr val="94A3B8"/>
+                      </a:solidFill>
+                      <a:prstDash val="solid"/>
+                      <a:round/>
+                      <a:headEnd type="none" w="med" len="med"/>
+                      <a:tailEnd type="none" w="med" len="med"/>
+                    </a:lnT>
+                    <a:lnB w="12700" cap="flat" cmpd="sng" algn="ctr">
+                      <a:solidFill>
+                        <a:srgbClr val="94A3B8"/>
+                      </a:solidFill>
+                      <a:prstDash val="solid"/>
+                      <a:round/>
+                      <a:headEnd type="none" w="med" len="med"/>
+                      <a:tailEnd type="none" w="med" len="med"/>
+                    </a:lnB>
+                    <a:solidFill>
+                      <a:srgbClr val="FFFFFF"/>
+                    </a:solidFill>
+                  </a:tcPr>
+                </a:tc>
+                <a:tc>
+                  <a:txBody>
+                    <a:bodyPr/>
+                    <a:lstStyle/>
+                    <a:p>
+                      <a:pPr eaLnBrk="0" algn="ctr" indent="0" marL="0">
+                        <a:buNone/>
+                      </a:pPr>
+                      <a:r>
+                        <a:rPr lang="en-US" sz="2600" dirty="0">
+                          <a:solidFill>
+                            <a:srgbClr val="1F2937"/>
+                          </a:solidFill>
+                          <a:latin typeface="맑은 고딕" pitchFamily="34" charset="0"/>
+                          <a:ea typeface="맑은 고딕" pitchFamily="34" charset="-122"/>
+                          <a:cs typeface="맑은 고딕" pitchFamily="34" charset="-120"/>
+                        </a:rPr>
+                        <a:t>6</a:t>
+                      </a:r>
+                      <a:endParaRPr lang="en-US" sz="2600" dirty="0">
+                        <a:latin typeface="맑은 고딕" charset="0"/>
+                        <a:ea typeface="맑은 고딕" charset="0"/>
+                        <a:cs typeface="맑은 고딕" charset="0"/>
+                      </a:endParaRPr>
+                    </a:p>
+                  </a:txBody>
+                  <a:tcPr marL="38100" marR="38100" marT="38100" marB="38100" anchor="ctr">
+                    <a:lnL w="12700" cap="flat" cmpd="sng" algn="ctr">
+                      <a:solidFill>
+                        <a:srgbClr val="94A3B8"/>
+                      </a:solidFill>
+                      <a:prstDash val="solid"/>
+                      <a:round/>
+                      <a:headEnd type="none" w="med" len="med"/>
+                      <a:tailEnd type="none" w="med" len="med"/>
+                    </a:lnL>
+                    <a:lnR w="12700" cap="flat" cmpd="sng" algn="ctr">
+                      <a:solidFill>
+                        <a:srgbClr val="94A3B8"/>
+                      </a:solidFill>
+                      <a:prstDash val="solid"/>
+                      <a:round/>
+                      <a:headEnd type="none" w="med" len="med"/>
+                      <a:tailEnd type="none" w="med" len="med"/>
+                    </a:lnR>
+                    <a:lnT w="12700" cap="flat" cmpd="sng" algn="ctr">
+                      <a:solidFill>
+                        <a:srgbClr val="94A3B8"/>
+                      </a:solidFill>
+                      <a:prstDash val="solid"/>
+                      <a:round/>
+                      <a:headEnd type="none" w="med" len="med"/>
+                      <a:tailEnd type="none" w="med" len="med"/>
+                    </a:lnT>
+                    <a:lnB w="12700" cap="flat" cmpd="sng" algn="ctr">
+                      <a:solidFill>
+                        <a:srgbClr val="94A3B8"/>
+                      </a:solidFill>
+                      <a:prstDash val="solid"/>
+                      <a:round/>
+                      <a:headEnd type="none" w="med" len="med"/>
+                      <a:tailEnd type="none" w="med" len="med"/>
+                    </a:lnB>
+                    <a:solidFill>
+                      <a:srgbClr val="FFFFFF"/>
+                    </a:solidFill>
+                  </a:tcPr>
+                </a:tc>
+                <a:tc>
+                  <a:txBody>
+                    <a:bodyPr/>
+                    <a:lstStyle/>
+                    <a:p>
+                      <a:pPr eaLnBrk="0" algn="ctr" indent="0" marL="0">
+                        <a:buNone/>
+                      </a:pPr>
+                      <a:r>
+                        <a:rPr lang="en-US" sz="2600" dirty="0">
+                          <a:solidFill>
+                            <a:srgbClr val="1F2937"/>
+                          </a:solidFill>
+                          <a:latin typeface="맑은 고딕" pitchFamily="34" charset="0"/>
+                          <a:ea typeface="맑은 고딕" pitchFamily="34" charset="-122"/>
+                          <a:cs typeface="맑은 고딕" pitchFamily="34" charset="-120"/>
+                        </a:rPr>
+                        <a:t>7</a:t>
+                      </a:r>
+                      <a:endParaRPr lang="en-US" sz="2600" dirty="0">
+                        <a:latin typeface="맑은 고딕" charset="0"/>
+                        <a:ea typeface="맑은 고딕" charset="0"/>
+                        <a:cs typeface="맑은 고딕" charset="0"/>
+                      </a:endParaRPr>
+                    </a:p>
+                  </a:txBody>
+                  <a:tcPr marL="38100" marR="38100" marT="38100" marB="38100" anchor="ctr">
+                    <a:lnL w="12700" cap="flat" cmpd="sng" algn="ctr">
+                      <a:solidFill>
+                        <a:srgbClr val="94A3B8"/>
+                      </a:solidFill>
+                      <a:prstDash val="solid"/>
+                      <a:round/>
+                      <a:headEnd type="none" w="med" len="med"/>
+                      <a:tailEnd type="none" w="med" len="med"/>
+                    </a:lnL>
+                    <a:lnR w="12700" cap="flat" cmpd="sng" algn="ctr">
+                      <a:solidFill>
+                        <a:srgbClr val="94A3B8"/>
+                      </a:solidFill>
+                      <a:prstDash val="solid"/>
+                      <a:round/>
+                      <a:headEnd type="none" w="med" len="med"/>
+                      <a:tailEnd type="none" w="med" len="med"/>
+                    </a:lnR>
+                    <a:lnT w="12700" cap="flat" cmpd="sng" algn="ctr">
+                      <a:solidFill>
+                        <a:srgbClr val="94A3B8"/>
+                      </a:solidFill>
+                      <a:prstDash val="solid"/>
+                      <a:round/>
+                      <a:headEnd type="none" w="med" len="med"/>
+                      <a:tailEnd type="none" w="med" len="med"/>
+                    </a:lnT>
+                    <a:lnB w="12700" cap="flat" cmpd="sng" algn="ctr">
+                      <a:solidFill>
+                        <a:srgbClr val="94A3B8"/>
+                      </a:solidFill>
+                      <a:prstDash val="solid"/>
+                      <a:round/>
+                      <a:headEnd type="none" w="med" len="med"/>
+                      <a:tailEnd type="none" w="med" len="med"/>
+                    </a:lnB>
+                    <a:solidFill>
+                      <a:srgbClr val="FFFFFF"/>
+                    </a:solidFill>
+                  </a:tcPr>
+                </a:tc>
+              </a:tr>
+              <a:tr h="511810">
+                <a:tc>
+                  <a:txBody>
+                    <a:bodyPr/>
+                    <a:lstStyle/>
+                    <a:p>
+                      <a:pPr eaLnBrk="0" algn="ctr" indent="0" marL="0">
+                        <a:buNone/>
+                      </a:pPr>
+                      <a:r>
+                        <a:rPr lang="en-US" sz="2600" b="1" dirty="0">
+                          <a:solidFill>
+                            <a:srgbClr val="1F2937"/>
+                          </a:solidFill>
+                          <a:latin typeface="맑은 고딕" pitchFamily="34" charset="0"/>
+                          <a:ea typeface="맑은 고딕" pitchFamily="34" charset="-122"/>
+                          <a:cs typeface="맑은 고딕" pitchFamily="34" charset="-120"/>
+                        </a:rPr>
+                        <a:t>3</a:t>
+                      </a:r>
+                      <a:endParaRPr lang="en-US" sz="2600" dirty="0">
+                        <a:latin typeface="맑은 고딕" charset="0"/>
+                        <a:ea typeface="맑은 고딕" charset="0"/>
+                        <a:cs typeface="맑은 고딕" charset="0"/>
+                      </a:endParaRPr>
+                    </a:p>
+                  </a:txBody>
+                  <a:tcPr marL="38100" marR="38100" marT="38100" marB="38100" anchor="ctr">
+                    <a:lnL w="12700" cap="flat" cmpd="sng" algn="ctr">
+                      <a:solidFill>
+                        <a:srgbClr val="94A3B8"/>
+                      </a:solidFill>
+                      <a:prstDash val="solid"/>
+                      <a:round/>
+                      <a:headEnd type="none" w="med" len="med"/>
+                      <a:tailEnd type="none" w="med" len="med"/>
+                    </a:lnL>
+                    <a:lnR w="12700" cap="flat" cmpd="sng" algn="ctr">
+                      <a:solidFill>
+                        <a:srgbClr val="94A3B8"/>
+                      </a:solidFill>
+                      <a:prstDash val="solid"/>
+                      <a:round/>
+                      <a:headEnd type="none" w="med" len="med"/>
+                      <a:tailEnd type="none" w="med" len="med"/>
+                    </a:lnR>
+                    <a:lnT w="12700" cap="flat" cmpd="sng" algn="ctr">
+                      <a:solidFill>
+                        <a:srgbClr val="94A3B8"/>
+                      </a:solidFill>
+                      <a:prstDash val="solid"/>
+                      <a:round/>
+                      <a:headEnd type="none" w="med" len="med"/>
+                      <a:tailEnd type="none" w="med" len="med"/>
+                    </a:lnT>
+                    <a:lnB w="12700" cap="flat" cmpd="sng" algn="ctr">
+                      <a:solidFill>
+                        <a:srgbClr val="94A3B8"/>
+                      </a:solidFill>
+                      <a:prstDash val="solid"/>
+                      <a:round/>
+                      <a:headEnd type="none" w="med" len="med"/>
+                      <a:tailEnd type="none" w="med" len="med"/>
+                    </a:lnB>
+                    <a:solidFill>
+                      <a:srgbClr val="EAF3F1"/>
+                    </a:solidFill>
+                  </a:tcPr>
+                </a:tc>
+                <a:tc>
+                  <a:txBody>
+                    <a:bodyPr/>
+                    <a:lstStyle/>
+                    <a:p>
+                      <a:pPr eaLnBrk="0" algn="ctr" indent="0" marL="0">
+                        <a:buNone/>
+                      </a:pPr>
+                      <a:r>
+                        <a:rPr lang="en-US" sz="2600" dirty="0">
+                          <a:solidFill>
+                            <a:srgbClr val="1F2937"/>
+                          </a:solidFill>
+                          <a:latin typeface="맑은 고딕" pitchFamily="34" charset="0"/>
+                          <a:ea typeface="맑은 고딕" pitchFamily="34" charset="-122"/>
+                          <a:cs typeface="맑은 고딕" pitchFamily="34" charset="-120"/>
+                        </a:rPr>
+                        <a:t>4</a:t>
+                      </a:r>
+                      <a:endParaRPr lang="en-US" sz="2600" dirty="0">
+                        <a:latin typeface="맑은 고딕" charset="0"/>
+                        <a:ea typeface="맑은 고딕" charset="0"/>
+                        <a:cs typeface="맑은 고딕" charset="0"/>
+                      </a:endParaRPr>
+                    </a:p>
+                  </a:txBody>
+                  <a:tcPr marL="38100" marR="38100" marT="38100" marB="38100" anchor="ctr">
+                    <a:lnL w="12700" cap="flat" cmpd="sng" algn="ctr">
+                      <a:solidFill>
+                        <a:srgbClr val="94A3B8"/>
+                      </a:solidFill>
+                      <a:prstDash val="solid"/>
+                      <a:round/>
+                      <a:headEnd type="none" w="med" len="med"/>
+                      <a:tailEnd type="none" w="med" len="med"/>
+                    </a:lnL>
+                    <a:lnR w="12700" cap="flat" cmpd="sng" algn="ctr">
+                      <a:solidFill>
+                        <a:srgbClr val="94A3B8"/>
+                      </a:solidFill>
+                      <a:prstDash val="solid"/>
+                      <a:round/>
+                      <a:headEnd type="none" w="med" len="med"/>
+                      <a:tailEnd type="none" w="med" len="med"/>
+                    </a:lnR>
+                    <a:lnT w="12700" cap="flat" cmpd="sng" algn="ctr">
+                      <a:solidFill>
+                        <a:srgbClr val="94A3B8"/>
+                      </a:solidFill>
+                      <a:prstDash val="solid"/>
+                      <a:round/>
+                      <a:headEnd type="none" w="med" len="med"/>
+                      <a:tailEnd type="none" w="med" len="med"/>
+                    </a:lnT>
+                    <a:lnB w="12700" cap="flat" cmpd="sng" algn="ctr">
+                      <a:solidFill>
+                        <a:srgbClr val="94A3B8"/>
+                      </a:solidFill>
+                      <a:prstDash val="solid"/>
+                      <a:round/>
+                      <a:headEnd type="none" w="med" len="med"/>
+                      <a:tailEnd type="none" w="med" len="med"/>
+                    </a:lnB>
+                    <a:solidFill>
+                      <a:srgbClr val="FFFFFF"/>
+                    </a:solidFill>
+                  </a:tcPr>
+                </a:tc>
+                <a:tc>
+                  <a:txBody>
+                    <a:bodyPr/>
+                    <a:lstStyle/>
+                    <a:p>
+                      <a:pPr eaLnBrk="0" algn="ctr" indent="0" marL="0">
+                        <a:buNone/>
+                      </a:pPr>
+                      <a:r>
+                        <a:rPr lang="en-US" sz="2600" dirty="0">
+                          <a:solidFill>
+                            <a:srgbClr val="1F2937"/>
+                          </a:solidFill>
+                          <a:latin typeface="맑은 고딕" pitchFamily="34" charset="0"/>
+                          <a:ea typeface="맑은 고딕" pitchFamily="34" charset="-122"/>
+                          <a:cs typeface="맑은 고딕" pitchFamily="34" charset="-120"/>
+                        </a:rPr>
+                        <a:t>5</a:t>
+                      </a:r>
+                      <a:endParaRPr lang="en-US" sz="2600" dirty="0">
+                        <a:latin typeface="맑은 고딕" charset="0"/>
+                        <a:ea typeface="맑은 고딕" charset="0"/>
+                        <a:cs typeface="맑은 고딕" charset="0"/>
+                      </a:endParaRPr>
+                    </a:p>
+                  </a:txBody>
+                  <a:tcPr marL="38100" marR="38100" marT="38100" marB="38100" anchor="ctr">
+                    <a:lnL w="12700" cap="flat" cmpd="sng" algn="ctr">
+                      <a:solidFill>
+                        <a:srgbClr val="94A3B8"/>
+                      </a:solidFill>
+                      <a:prstDash val="solid"/>
+                      <a:round/>
+                      <a:headEnd type="none" w="med" len="med"/>
+                      <a:tailEnd type="none" w="med" len="med"/>
+                    </a:lnL>
+                    <a:lnR w="12700" cap="flat" cmpd="sng" algn="ctr">
+                      <a:solidFill>
+                        <a:srgbClr val="94A3B8"/>
+                      </a:solidFill>
+                      <a:prstDash val="solid"/>
+                      <a:round/>
+                      <a:headEnd type="none" w="med" len="med"/>
+                      <a:tailEnd type="none" w="med" len="med"/>
+                    </a:lnR>
+                    <a:lnT w="12700" cap="flat" cmpd="sng" algn="ctr">
+                      <a:solidFill>
+                        <a:srgbClr val="94A3B8"/>
+                      </a:solidFill>
+                      <a:prstDash val="solid"/>
+                      <a:round/>
+                      <a:headEnd type="none" w="med" len="med"/>
+                      <a:tailEnd type="none" w="med" len="med"/>
+                    </a:lnT>
+                    <a:lnB w="12700" cap="flat" cmpd="sng" algn="ctr">
+                      <a:solidFill>
+                        <a:srgbClr val="94A3B8"/>
+                      </a:solidFill>
+                      <a:prstDash val="solid"/>
+                      <a:round/>
+                      <a:headEnd type="none" w="med" len="med"/>
+                      <a:tailEnd type="none" w="med" len="med"/>
+                    </a:lnB>
+                    <a:solidFill>
+                      <a:srgbClr val="FFFFFF"/>
+                    </a:solidFill>
+                  </a:tcPr>
+                </a:tc>
+                <a:tc>
+                  <a:txBody>
+                    <a:bodyPr/>
+                    <a:lstStyle/>
+                    <a:p>
+                      <a:pPr eaLnBrk="0" algn="ctr" indent="0" marL="0">
+                        <a:buNone/>
+                      </a:pPr>
+                      <a:r>
+                        <a:rPr lang="en-US" sz="2600" dirty="0">
+                          <a:solidFill>
+                            <a:srgbClr val="1F2937"/>
+                          </a:solidFill>
+                          <a:latin typeface="맑은 고딕" pitchFamily="34" charset="0"/>
+                          <a:ea typeface="맑은 고딕" pitchFamily="34" charset="-122"/>
+                          <a:cs typeface="맑은 고딕" pitchFamily="34" charset="-120"/>
+                        </a:rPr>
+                        <a:t>6</a:t>
+                      </a:r>
+                      <a:endParaRPr lang="en-US" sz="2600" dirty="0">
+                        <a:latin typeface="맑은 고딕" charset="0"/>
+                        <a:ea typeface="맑은 고딕" charset="0"/>
+                        <a:cs typeface="맑은 고딕" charset="0"/>
+                      </a:endParaRPr>
+                    </a:p>
+                  </a:txBody>
+                  <a:tcPr marL="38100" marR="38100" marT="38100" marB="38100" anchor="ctr">
+                    <a:lnL w="12700" cap="flat" cmpd="sng" algn="ctr">
+                      <a:solidFill>
+                        <a:srgbClr val="94A3B8"/>
+                      </a:solidFill>
+                      <a:prstDash val="solid"/>
+                      <a:round/>
+                      <a:headEnd type="none" w="med" len="med"/>
+                      <a:tailEnd type="none" w="med" len="med"/>
+                    </a:lnL>
+                    <a:lnR w="12700" cap="flat" cmpd="sng" algn="ctr">
+                      <a:solidFill>
+                        <a:srgbClr val="94A3B8"/>
+                      </a:solidFill>
+                      <a:prstDash val="solid"/>
+                      <a:round/>
+                      <a:headEnd type="none" w="med" len="med"/>
+                      <a:tailEnd type="none" w="med" len="med"/>
+                    </a:lnR>
+                    <a:lnT w="12700" cap="flat" cmpd="sng" algn="ctr">
+                      <a:solidFill>
+                        <a:srgbClr val="94A3B8"/>
+                      </a:solidFill>
+                      <a:prstDash val="solid"/>
+                      <a:round/>
+                      <a:headEnd type="none" w="med" len="med"/>
+                      <a:tailEnd type="none" w="med" len="med"/>
+                    </a:lnT>
+                    <a:lnB w="12700" cap="flat" cmpd="sng" algn="ctr">
+                      <a:solidFill>
+                        <a:srgbClr val="94A3B8"/>
+                      </a:solidFill>
+                      <a:prstDash val="solid"/>
+                      <a:round/>
+                      <a:headEnd type="none" w="med" len="med"/>
+                      <a:tailEnd type="none" w="med" len="med"/>
+                    </a:lnB>
+                    <a:solidFill>
+                      <a:srgbClr val="FFFFFF"/>
+                    </a:solidFill>
+                  </a:tcPr>
+                </a:tc>
+                <a:tc>
+                  <a:txBody>
+                    <a:bodyPr/>
+                    <a:lstStyle/>
+                    <a:p>
+                      <a:pPr eaLnBrk="0" algn="ctr" indent="0" marL="0">
+                        <a:buNone/>
+                      </a:pPr>
+                      <a:r>
+                        <a:rPr lang="en-US" sz="2600" dirty="0">
+                          <a:solidFill>
+                            <a:srgbClr val="1F2937"/>
+                          </a:solidFill>
+                          <a:latin typeface="맑은 고딕" pitchFamily="34" charset="0"/>
+                          <a:ea typeface="맑은 고딕" pitchFamily="34" charset="-122"/>
+                          <a:cs typeface="맑은 고딕" pitchFamily="34" charset="-120"/>
+                        </a:rPr>
+                        <a:t>7</a:t>
+                      </a:r>
+                      <a:endParaRPr lang="en-US" sz="2600" dirty="0">
+                        <a:latin typeface="맑은 고딕" charset="0"/>
+                        <a:ea typeface="맑은 고딕" charset="0"/>
+                        <a:cs typeface="맑은 고딕" charset="0"/>
+                      </a:endParaRPr>
+                    </a:p>
+                  </a:txBody>
+                  <a:tcPr marL="38100" marR="38100" marT="38100" marB="38100" anchor="ctr">
+                    <a:lnL w="12700" cap="flat" cmpd="sng" algn="ctr">
+                      <a:solidFill>
+                        <a:srgbClr val="94A3B8"/>
+                      </a:solidFill>
+                      <a:prstDash val="solid"/>
+                      <a:round/>
+                      <a:headEnd type="none" w="med" len="med"/>
+                      <a:tailEnd type="none" w="med" len="med"/>
+                    </a:lnL>
+                    <a:lnR w="12700" cap="flat" cmpd="sng" algn="ctr">
+                      <a:solidFill>
+                        <a:srgbClr val="94A3B8"/>
+                      </a:solidFill>
+                      <a:prstDash val="solid"/>
+                      <a:round/>
+                      <a:headEnd type="none" w="med" len="med"/>
+                      <a:tailEnd type="none" w="med" len="med"/>
+                    </a:lnR>
+                    <a:lnT w="12700" cap="flat" cmpd="sng" algn="ctr">
+                      <a:solidFill>
+                        <a:srgbClr val="94A3B8"/>
+                      </a:solidFill>
+                      <a:prstDash val="solid"/>
+                      <a:round/>
+                      <a:headEnd type="none" w="med" len="med"/>
+                      <a:tailEnd type="none" w="med" len="med"/>
+                    </a:lnT>
+                    <a:lnB w="12700" cap="flat" cmpd="sng" algn="ctr">
+                      <a:solidFill>
+                        <a:srgbClr val="94A3B8"/>
+                      </a:solidFill>
+                      <a:prstDash val="solid"/>
+                      <a:round/>
+                      <a:headEnd type="none" w="med" len="med"/>
+                      <a:tailEnd type="none" w="med" len="med"/>
+                    </a:lnB>
+                    <a:solidFill>
+                      <a:srgbClr val="FFFFFF"/>
+                    </a:solidFill>
+                  </a:tcPr>
+                </a:tc>
+                <a:tc>
+                  <a:txBody>
+                    <a:bodyPr/>
+                    <a:lstStyle/>
+                    <a:p>
+                      <a:pPr eaLnBrk="0" algn="ctr" indent="0" marL="0">
+                        <a:buNone/>
+                      </a:pPr>
+                      <a:r>
+                        <a:rPr lang="en-US" sz="2600" dirty="0">
+                          <a:solidFill>
+                            <a:srgbClr val="1F2937"/>
+                          </a:solidFill>
+                          <a:latin typeface="맑은 고딕" pitchFamily="34" charset="0"/>
+                          <a:ea typeface="맑은 고딕" pitchFamily="34" charset="-122"/>
+                          <a:cs typeface="맑은 고딕" pitchFamily="34" charset="-120"/>
+                        </a:rPr>
+                        <a:t>8</a:t>
+                      </a:r>
+                      <a:endParaRPr lang="en-US" sz="2600" dirty="0">
+                        <a:latin typeface="맑은 고딕" charset="0"/>
+                        <a:ea typeface="맑은 고딕" charset="0"/>
+                        <a:cs typeface="맑은 고딕" charset="0"/>
+                      </a:endParaRPr>
+                    </a:p>
+                  </a:txBody>
+                  <a:tcPr marL="38100" marR="38100" marT="38100" marB="38100" anchor="ctr">
+                    <a:lnL w="12700" cap="flat" cmpd="sng" algn="ctr">
+                      <a:solidFill>
+                        <a:srgbClr val="94A3B8"/>
+                      </a:solidFill>
+                      <a:prstDash val="solid"/>
+                      <a:round/>
+                      <a:headEnd type="none" w="med" len="med"/>
+                      <a:tailEnd type="none" w="med" len="med"/>
+                    </a:lnL>
+                    <a:lnR w="12700" cap="flat" cmpd="sng" algn="ctr">
+                      <a:solidFill>
+                        <a:srgbClr val="94A3B8"/>
+                      </a:solidFill>
+                      <a:prstDash val="solid"/>
+                      <a:round/>
+                      <a:headEnd type="none" w="med" len="med"/>
+                      <a:tailEnd type="none" w="med" len="med"/>
+                    </a:lnR>
+                    <a:lnT w="12700" cap="flat" cmpd="sng" algn="ctr">
+                      <a:solidFill>
+                        <a:srgbClr val="94A3B8"/>
+                      </a:solidFill>
+                      <a:prstDash val="solid"/>
+                      <a:round/>
+                      <a:headEnd type="none" w="med" len="med"/>
+                      <a:tailEnd type="none" w="med" len="med"/>
+                    </a:lnT>
+                    <a:lnB w="12700" cap="flat" cmpd="sng" algn="ctr">
+                      <a:solidFill>
+                        <a:srgbClr val="94A3B8"/>
+                      </a:solidFill>
+                      <a:prstDash val="solid"/>
+                      <a:round/>
+                      <a:headEnd type="none" w="med" len="med"/>
+                      <a:tailEnd type="none" w="med" len="med"/>
+                    </a:lnB>
+                    <a:solidFill>
+                      <a:srgbClr val="FFFFFF"/>
+                    </a:solidFill>
+                  </a:tcPr>
+                </a:tc>
+              </a:tr>
+              <a:tr h="511810">
+                <a:tc>
+                  <a:txBody>
+                    <a:bodyPr/>
+                    <a:lstStyle/>
+                    <a:p>
+                      <a:pPr eaLnBrk="0" algn="ctr" indent="0" marL="0">
+                        <a:buNone/>
+                      </a:pPr>
+                      <a:r>
+                        <a:rPr lang="en-US" sz="2600" b="1" dirty="0">
+                          <a:solidFill>
+                            <a:srgbClr val="1F2937"/>
+                          </a:solidFill>
+                          <a:latin typeface="맑은 고딕" pitchFamily="34" charset="0"/>
+                          <a:ea typeface="맑은 고딕" pitchFamily="34" charset="-122"/>
+                          <a:cs typeface="맑은 고딕" pitchFamily="34" charset="-120"/>
+                        </a:rPr>
+                        <a:t>4</a:t>
+                      </a:r>
+                      <a:endParaRPr lang="en-US" sz="2600" dirty="0">
+                        <a:latin typeface="맑은 고딕" charset="0"/>
+                        <a:ea typeface="맑은 고딕" charset="0"/>
+                        <a:cs typeface="맑은 고딕" charset="0"/>
+                      </a:endParaRPr>
+                    </a:p>
+                  </a:txBody>
+                  <a:tcPr marL="38100" marR="38100" marT="38100" marB="38100" anchor="ctr">
+                    <a:lnL w="12700" cap="flat" cmpd="sng" algn="ctr">
+                      <a:solidFill>
+                        <a:srgbClr val="94A3B8"/>
+                      </a:solidFill>
+                      <a:prstDash val="solid"/>
+                      <a:round/>
+                      <a:headEnd type="none" w="med" len="med"/>
+                      <a:tailEnd type="none" w="med" len="med"/>
+                    </a:lnL>
+                    <a:lnR w="12700" cap="flat" cmpd="sng" algn="ctr">
+                      <a:solidFill>
+                        <a:srgbClr val="94A3B8"/>
+                      </a:solidFill>
+                      <a:prstDash val="solid"/>
+                      <a:round/>
+                      <a:headEnd type="none" w="med" len="med"/>
+                      <a:tailEnd type="none" w="med" len="med"/>
+                    </a:lnR>
+                    <a:lnT w="12700" cap="flat" cmpd="sng" algn="ctr">
+                      <a:solidFill>
+                        <a:srgbClr val="94A3B8"/>
+                      </a:solidFill>
+                      <a:prstDash val="solid"/>
+                      <a:round/>
+                      <a:headEnd type="none" w="med" len="med"/>
+                      <a:tailEnd type="none" w="med" len="med"/>
+                    </a:lnT>
+                    <a:lnB w="12700" cap="flat" cmpd="sng" algn="ctr">
+                      <a:solidFill>
+                        <a:srgbClr val="94A3B8"/>
+                      </a:solidFill>
+                      <a:prstDash val="solid"/>
+                      <a:round/>
+                      <a:headEnd type="none" w="med" len="med"/>
+                      <a:tailEnd type="none" w="med" len="med"/>
+                    </a:lnB>
+                    <a:solidFill>
+                      <a:srgbClr val="EAF3F1"/>
+                    </a:solidFill>
+                  </a:tcPr>
+                </a:tc>
+                <a:tc>
+                  <a:txBody>
+                    <a:bodyPr/>
+                    <a:lstStyle/>
+                    <a:p>
+                      <a:pPr eaLnBrk="0" algn="ctr" indent="0" marL="0">
+                        <a:buNone/>
+                      </a:pPr>
+                      <a:r>
+                        <a:rPr lang="en-US" sz="2600" dirty="0">
+                          <a:solidFill>
+                            <a:srgbClr val="1F2937"/>
+                          </a:solidFill>
+                          <a:latin typeface="맑은 고딕" pitchFamily="34" charset="0"/>
+                          <a:ea typeface="맑은 고딕" pitchFamily="34" charset="-122"/>
+                          <a:cs typeface="맑은 고딕" pitchFamily="34" charset="-120"/>
+                        </a:rPr>
+                        <a:t>5</a:t>
+                      </a:r>
+                      <a:endParaRPr lang="en-US" sz="2600" dirty="0">
+                        <a:latin typeface="맑은 고딕" charset="0"/>
+                        <a:ea typeface="맑은 고딕" charset="0"/>
+                        <a:cs typeface="맑은 고딕" charset="0"/>
+                      </a:endParaRPr>
+                    </a:p>
+                  </a:txBody>
+                  <a:tcPr marL="38100" marR="38100" marT="38100" marB="38100" anchor="ctr">
+                    <a:lnL w="12700" cap="flat" cmpd="sng" algn="ctr">
+                      <a:solidFill>
+                        <a:srgbClr val="94A3B8"/>
+                      </a:solidFill>
+                      <a:prstDash val="solid"/>
+                      <a:round/>
+                      <a:headEnd type="none" w="med" len="med"/>
+                      <a:tailEnd type="none" w="med" len="med"/>
+                    </a:lnL>
+                    <a:lnR w="12700" cap="flat" cmpd="sng" algn="ctr">
+                      <a:solidFill>
+                        <a:srgbClr val="94A3B8"/>
+                      </a:solidFill>
+                      <a:prstDash val="solid"/>
+                      <a:round/>
+                      <a:headEnd type="none" w="med" len="med"/>
+                      <a:tailEnd type="none" w="med" len="med"/>
+                    </a:lnR>
+                    <a:lnT w="12700" cap="flat" cmpd="sng" algn="ctr">
+                      <a:solidFill>
+                        <a:srgbClr val="94A3B8"/>
+                      </a:solidFill>
+                      <a:prstDash val="solid"/>
+                      <a:round/>
+                      <a:headEnd type="none" w="med" len="med"/>
+                      <a:tailEnd type="none" w="med" len="med"/>
+                    </a:lnT>
+                    <a:lnB w="12700" cap="flat" cmpd="sng" algn="ctr">
+                      <a:solidFill>
+                        <a:srgbClr val="94A3B8"/>
+                      </a:solidFill>
+                      <a:prstDash val="solid"/>
+                      <a:round/>
+                      <a:headEnd type="none" w="med" len="med"/>
+                      <a:tailEnd type="none" w="med" len="med"/>
+                    </a:lnB>
+                    <a:solidFill>
+                      <a:srgbClr val="FFFFFF"/>
+                    </a:solidFill>
+                  </a:tcPr>
+                </a:tc>
+                <a:tc>
+                  <a:txBody>
+                    <a:bodyPr/>
+                    <a:lstStyle/>
+                    <a:p>
+                      <a:pPr eaLnBrk="0" algn="ctr" indent="0" marL="0">
+                        <a:buNone/>
+                      </a:pPr>
+                      <a:r>
+                        <a:rPr lang="en-US" sz="2600" dirty="0">
+                          <a:solidFill>
+                            <a:srgbClr val="1F2937"/>
+                          </a:solidFill>
+                          <a:latin typeface="맑은 고딕" pitchFamily="34" charset="0"/>
+                          <a:ea typeface="맑은 고딕" pitchFamily="34" charset="-122"/>
+                          <a:cs typeface="맑은 고딕" pitchFamily="34" charset="-120"/>
+                        </a:rPr>
+                        <a:t>6</a:t>
+                      </a:r>
+                      <a:endParaRPr lang="en-US" sz="2600" dirty="0">
+                        <a:latin typeface="맑은 고딕" charset="0"/>
+                        <a:ea typeface="맑은 고딕" charset="0"/>
+                        <a:cs typeface="맑은 고딕" charset="0"/>
+                      </a:endParaRPr>
+                    </a:p>
+                  </a:txBody>
+                  <a:tcPr marL="38100" marR="38100" marT="38100" marB="38100" anchor="ctr">
+                    <a:lnL w="12700" cap="flat" cmpd="sng" algn="ctr">
+                      <a:solidFill>
+                        <a:srgbClr val="94A3B8"/>
+                      </a:solidFill>
+                      <a:prstDash val="solid"/>
+                      <a:round/>
+                      <a:headEnd type="none" w="med" len="med"/>
+                      <a:tailEnd type="none" w="med" len="med"/>
+                    </a:lnL>
+                    <a:lnR w="12700" cap="flat" cmpd="sng" algn="ctr">
+                      <a:solidFill>
+                        <a:srgbClr val="94A3B8"/>
+                      </a:solidFill>
+                      <a:prstDash val="solid"/>
+                      <a:round/>
+                      <a:headEnd type="none" w="med" len="med"/>
+                      <a:tailEnd type="none" w="med" len="med"/>
+                    </a:lnR>
+                    <a:lnT w="12700" cap="flat" cmpd="sng" algn="ctr">
+                      <a:solidFill>
+                        <a:srgbClr val="94A3B8"/>
+                      </a:solidFill>
+                      <a:prstDash val="solid"/>
+                      <a:round/>
+                      <a:headEnd type="none" w="med" len="med"/>
+                      <a:tailEnd type="none" w="med" len="med"/>
+                    </a:lnT>
+                    <a:lnB w="12700" cap="flat" cmpd="sng" algn="ctr">
+                      <a:solidFill>
+                        <a:srgbClr val="94A3B8"/>
+                      </a:solidFill>
+                      <a:prstDash val="solid"/>
+                      <a:round/>
+                      <a:headEnd type="none" w="med" len="med"/>
+                      <a:tailEnd type="none" w="med" len="med"/>
+                    </a:lnB>
+                    <a:solidFill>
+                      <a:srgbClr val="FFFFFF"/>
+                    </a:solidFill>
+                  </a:tcPr>
+                </a:tc>
+                <a:tc>
+                  <a:txBody>
+                    <a:bodyPr/>
+                    <a:lstStyle/>
+                    <a:p>
+                      <a:pPr eaLnBrk="0" algn="ctr" indent="0" marL="0">
+                        <a:buNone/>
+                      </a:pPr>
+                      <a:r>
+                        <a:rPr lang="en-US" sz="2600" dirty="0">
+                          <a:solidFill>
+                            <a:srgbClr val="1F2937"/>
+                          </a:solidFill>
+                          <a:latin typeface="맑은 고딕" pitchFamily="34" charset="0"/>
+                          <a:ea typeface="맑은 고딕" pitchFamily="34" charset="-122"/>
+                          <a:cs typeface="맑은 고딕" pitchFamily="34" charset="-120"/>
+                        </a:rPr>
+                        <a:t>7</a:t>
+                      </a:r>
+                      <a:endParaRPr lang="en-US" sz="2600" dirty="0">
+                        <a:latin typeface="맑은 고딕" charset="0"/>
+                        <a:ea typeface="맑은 고딕" charset="0"/>
+                        <a:cs typeface="맑은 고딕" charset="0"/>
+                      </a:endParaRPr>
+                    </a:p>
+                  </a:txBody>
+                  <a:tcPr marL="38100" marR="38100" marT="38100" marB="38100" anchor="ctr">
+                    <a:lnL w="12700" cap="flat" cmpd="sng" algn="ctr">
+                      <a:solidFill>
+                        <a:srgbClr val="94A3B8"/>
+                      </a:solidFill>
+                      <a:prstDash val="solid"/>
+                      <a:round/>
+                      <a:headEnd type="none" w="med" len="med"/>
+                      <a:tailEnd type="none" w="med" len="med"/>
+                    </a:lnL>
+                    <a:lnR w="12700" cap="flat" cmpd="sng" algn="ctr">
+                      <a:solidFill>
+                        <a:srgbClr val="94A3B8"/>
+                      </a:solidFill>
+                      <a:prstDash val="solid"/>
+                      <a:round/>
+                      <a:headEnd type="none" w="med" len="med"/>
+                      <a:tailEnd type="none" w="med" len="med"/>
+                    </a:lnR>
+                    <a:lnT w="12700" cap="flat" cmpd="sng" algn="ctr">
+                      <a:solidFill>
+                        <a:srgbClr val="94A3B8"/>
+                      </a:solidFill>
+                      <a:prstDash val="solid"/>
+                      <a:round/>
+                      <a:headEnd type="none" w="med" len="med"/>
+                      <a:tailEnd type="none" w="med" len="med"/>
+                    </a:lnT>
+                    <a:lnB w="12700" cap="flat" cmpd="sng" algn="ctr">
+                      <a:solidFill>
+                        <a:srgbClr val="94A3B8"/>
+                      </a:solidFill>
+                      <a:prstDash val="solid"/>
+                      <a:round/>
+                      <a:headEnd type="none" w="med" len="med"/>
+                      <a:tailEnd type="none" w="med" len="med"/>
+                    </a:lnB>
+                    <a:solidFill>
+                      <a:srgbClr val="FFFFFF"/>
+                    </a:solidFill>
+                  </a:tcPr>
+                </a:tc>
+                <a:tc>
+                  <a:txBody>
+                    <a:bodyPr/>
+                    <a:lstStyle/>
+                    <a:p>
+                      <a:pPr eaLnBrk="0" algn="ctr" indent="0" marL="0">
+                        <a:buNone/>
+                      </a:pPr>
+                      <a:r>
+                        <a:rPr lang="en-US" sz="2600" dirty="0">
+                          <a:solidFill>
+                            <a:srgbClr val="1F2937"/>
+                          </a:solidFill>
+                          <a:latin typeface="맑은 고딕" pitchFamily="34" charset="0"/>
+                          <a:ea typeface="맑은 고딕" pitchFamily="34" charset="-122"/>
+                          <a:cs typeface="맑은 고딕" pitchFamily="34" charset="-120"/>
+                        </a:rPr>
+                        <a:t>8</a:t>
+                      </a:r>
+                      <a:endParaRPr lang="en-US" sz="2600" dirty="0">
+                        <a:latin typeface="맑은 고딕" charset="0"/>
+                        <a:ea typeface="맑은 고딕" charset="0"/>
+                        <a:cs typeface="맑은 고딕" charset="0"/>
+                      </a:endParaRPr>
+                    </a:p>
+                  </a:txBody>
+                  <a:tcPr marL="38100" marR="38100" marT="38100" marB="38100" anchor="ctr">
+                    <a:lnL w="12700" cap="flat" cmpd="sng" algn="ctr">
+                      <a:solidFill>
+                        <a:srgbClr val="94A3B8"/>
+                      </a:solidFill>
+                      <a:prstDash val="solid"/>
+                      <a:round/>
+                      <a:headEnd type="none" w="med" len="med"/>
+                      <a:tailEnd type="none" w="med" len="med"/>
+                    </a:lnL>
+                    <a:lnR w="12700" cap="flat" cmpd="sng" algn="ctr">
+                      <a:solidFill>
+                        <a:srgbClr val="94A3B8"/>
+                      </a:solidFill>
+                      <a:prstDash val="solid"/>
+                      <a:round/>
+                      <a:headEnd type="none" w="med" len="med"/>
+                      <a:tailEnd type="none" w="med" len="med"/>
+                    </a:lnR>
+                    <a:lnT w="12700" cap="flat" cmpd="sng" algn="ctr">
+                      <a:solidFill>
+                        <a:srgbClr val="94A3B8"/>
+                      </a:solidFill>
+                      <a:prstDash val="solid"/>
+                      <a:round/>
+                      <a:headEnd type="none" w="med" len="med"/>
+                      <a:tailEnd type="none" w="med" len="med"/>
+                    </a:lnT>
+                    <a:lnB w="12700" cap="flat" cmpd="sng" algn="ctr">
+                      <a:solidFill>
+                        <a:srgbClr val="94A3B8"/>
+                      </a:solidFill>
+                      <a:prstDash val="solid"/>
+                      <a:round/>
+                      <a:headEnd type="none" w="med" len="med"/>
+                      <a:tailEnd type="none" w="med" len="med"/>
+                    </a:lnB>
+                    <a:solidFill>
+                      <a:srgbClr val="FFFFFF"/>
+                    </a:solidFill>
+                  </a:tcPr>
+                </a:tc>
+                <a:tc>
+                  <a:txBody>
+                    <a:bodyPr/>
+                    <a:lstStyle/>
+                    <a:p>
+                      <a:pPr eaLnBrk="0" algn="ctr" indent="0" marL="0">
+                        <a:buNone/>
+                      </a:pPr>
+                      <a:r>
+                        <a:rPr lang="en-US" sz="2600" dirty="0">
+                          <a:solidFill>
+                            <a:srgbClr val="1F2937"/>
+                          </a:solidFill>
+                          <a:latin typeface="맑은 고딕" pitchFamily="34" charset="0"/>
+                          <a:ea typeface="맑은 고딕" pitchFamily="34" charset="-122"/>
+                          <a:cs typeface="맑은 고딕" pitchFamily="34" charset="-120"/>
+                        </a:rPr>
+                        <a:t>9</a:t>
+                      </a:r>
+                      <a:endParaRPr lang="en-US" sz="2600" dirty="0">
+                        <a:latin typeface="맑은 고딕" charset="0"/>
+                        <a:ea typeface="맑은 고딕" charset="0"/>
+                        <a:cs typeface="맑은 고딕" charset="0"/>
+                      </a:endParaRPr>
+                    </a:p>
+                  </a:txBody>
+                  <a:tcPr marL="38100" marR="38100" marT="38100" marB="38100" anchor="ctr">
+                    <a:lnL w="12700" cap="flat" cmpd="sng" algn="ctr">
+                      <a:solidFill>
+                        <a:srgbClr val="94A3B8"/>
+                      </a:solidFill>
+                      <a:prstDash val="solid"/>
+                      <a:round/>
+                      <a:headEnd type="none" w="med" len="med"/>
+                      <a:tailEnd type="none" w="med" len="med"/>
+                    </a:lnL>
+                    <a:lnR w="12700" cap="flat" cmpd="sng" algn="ctr">
+                      <a:solidFill>
+                        <a:srgbClr val="94A3B8"/>
+                      </a:solidFill>
+                      <a:prstDash val="solid"/>
+                      <a:round/>
+                      <a:headEnd type="none" w="med" len="med"/>
+                      <a:tailEnd type="none" w="med" len="med"/>
+                    </a:lnR>
+                    <a:lnT w="12700" cap="flat" cmpd="sng" algn="ctr">
+                      <a:solidFill>
+                        <a:srgbClr val="94A3B8"/>
+                      </a:solidFill>
+                      <a:prstDash val="solid"/>
+                      <a:round/>
+                      <a:headEnd type="none" w="med" len="med"/>
+                      <a:tailEnd type="none" w="med" len="med"/>
+                    </a:lnT>
+                    <a:lnB w="12700" cap="flat" cmpd="sng" algn="ctr">
+                      <a:solidFill>
+                        <a:srgbClr val="94A3B8"/>
+                      </a:solidFill>
+                      <a:prstDash val="solid"/>
+                      <a:round/>
+                      <a:headEnd type="none" w="med" len="med"/>
+                      <a:tailEnd type="none" w="med" len="med"/>
+                    </a:lnB>
+                    <a:solidFill>
+                      <a:srgbClr val="FFFFFF"/>
+                    </a:solidFill>
+                  </a:tcPr>
+                </a:tc>
+              </a:tr>
+              <a:tr h="511810">
                 <a:tc>
                   <a:txBody>
                     <a:bodyPr/>
